--- a/slides/pptx/week06.pptx
+++ b/slides/pptx/week06.pptx
@@ -26,9 +26,12 @@
     <p:sldId id="274" r:id="rId20"/>
     <p:sldId id="275" r:id="rId21"/>
     <p:sldId id="276" r:id="rId22"/>
+    <p:sldId id="277" r:id="rId23"/>
+    <p:sldId id="278" r:id="rId24"/>
+    <p:sldId id="279" r:id="rId25"/>
   </p:sldIdLst>
   <p:notesMasterIdLst>
-    <p:notesMasterId r:id="rId23"/>
+    <p:notesMasterId r:id="rId26"/>
   </p:notesMasterIdLst>
   <p:sldSz cx="9144000" cy="5143500"/>
   <p:notesSz cx="5143500" cy="9144000"/>
@@ -610,7 +613,7 @@
           <a:p>
             <a:r>
               <a:rPr lang="en-US" dirty="0"/>
-              <a:t>Quick taxonomy — general knowledge. Today's lab does NOT implement RBAC/ABAC: the actual fix is a flat ownership check (`order["owner"] != user`), no roles or permissions structure at all. Don't tell students they'll build RBAC today; they won't. Stress the three best-practice principles — especially implicit deny (default to no access). ~4 min.</a:t>
+              <a:t>The worked example — this is the IDOR Treasure Hunt. The server authenticated you but never checked the object BELONGS to you. Horizontal = peer data; vertical = privilege escalation. ~6 min.</a:t>
             </a:r>
             <a:endParaRPr lang="en-US" dirty="0"/>
           </a:p>
@@ -698,7 +701,7 @@
           <a:p>
             <a:r>
               <a:rPr lang="en-US" dirty="0"/>
-              <a:t>Run this interactively — give 2 minutes, then poll answers. (1) QA only. (2) add JIRA-write, narrowly (least privilege, not a full role bump). (3) Developer (write Git); discuss whether QA's staging deploy counts. ~6 min.</a:t>
+              <a:t>The IDOR fix mechanism. The vulnerable get_order literally CALLS current_user() and throws the answer away (vulnerable_app.py L63) — Gate 1 runs, Gate 2 doesn't exist. Drive it home: this is not an authentication bug, alice really is alice; it's that being authenticated was treated as permission to read ANY object. The one-line fix compares the object's owner to the caller and denies by default. Emphasize 'every object access' and 'centralize' so one forgotten endpoint doesn't reopen it — which is exactly what the next slide (two gates) generalizes. ~5 min.</a:t>
             </a:r>
             <a:endParaRPr lang="en-US" dirty="0"/>
           </a:p>
@@ -786,7 +789,7 @@
           <a:p>
             <a:r>
               <a:rPr lang="en-US" dirty="0"/>
-              <a:t>Run this interactively — give 2 minutes, then poll answers. (1) QA only. (2) add JIRA-write, narrowly (least privilege, not a full role bump). (3) Developer (write Git); discuss whether QA's staging deploy counts. ~6 min.</a:t>
+              <a:t>The thesis of the whole week, made concrete: JWT pitfalls broke Gate 1, IDOR broke Gate 2, and they're independent failures — fixing one doesn't fix the other. This is why "Defenses" lists both "verify JWT" and "check ownership" as separate bullets, not one fix. ~4 min.</a:t>
             </a:r>
             <a:endParaRPr lang="en-US" dirty="0"/>
           </a:p>
@@ -874,7 +877,7 @@
           <a:p>
             <a:r>
               <a:rPr lang="en-US" dirty="0"/>
-              <a:t>Ties W4 (SQLi auth bypass + upload→RCE) into incident response. Walk the three lines as a story: get in → plant webshell → run commands. Teach URL-decoding (%20=space). Defenders read logs; attackers leave them. ~5 min.</a:t>
+              <a:t>Quick taxonomy — general knowledge. Today's lab does NOT implement RBAC/ABAC: the actual fix is a flat ownership check (`order["owner"] != user`), no roles or permissions structure at all. Don't tell students they'll build RBAC today; they won't. Stress the three best-practice principles — especially implicit deny (default to no access). ~4 min.</a:t>
             </a:r>
             <a:endParaRPr lang="en-US" dirty="0"/>
           </a:p>
@@ -962,7 +965,7 @@
           <a:p>
             <a:r>
               <a:rPr lang="en-US" dirty="0"/>
-              <a:t>Reference for the worksheet — these three are what's actually graded (worksheet header + Q1). CWE-321 is easy to drop since it's not the "obvious" JWT CWE, but it's the weak-secret task's specific id. ~1 min.</a:t>
+              <a:t>Run this interactively — give 2 minutes, then poll answers. (1) QA only. (2) add JIRA-write, narrowly (least privilege, not a full role bump). (3) Developer (write Git); discuss whether QA's staging deploy counts. ~6 min.</a:t>
             </a:r>
             <a:endParaRPr lang="en-US" dirty="0"/>
           </a:p>
@@ -1050,7 +1053,7 @@
           <a:p>
             <a:r>
               <a:rPr lang="en-US" dirty="0"/>
-              <a:t>The payoff. #1: authorize EVERY request, deny by default. "Check ownership, not just authentication" is the IDOR fix in one line. Centralize so you can't forget a check on one endpoint. ~6 min.</a:t>
+              <a:t>Run this interactively — give 2 minutes, then poll answers. (1) QA only. (2) add JIRA-write, narrowly (least privilege, not a full role bump). (3) Developer (write Git); discuss whether QA's staging deploy counts. ~6 min.</a:t>
             </a:r>
             <a:endParaRPr lang="en-US" dirty="0"/>
           </a:p>
@@ -1138,7 +1141,7 @@
           <a:p>
             <a:r>
               <a:rPr lang="en-US" dirty="0"/>
-              <a:t>Practical — they'll use Repeater to tweak object ids and Intruder to enumerate. Demo: intercept, change orders/1→2, forward, see another user's data. Set scope first so you don't attack out-of-bounds. ~5 min.</a:t>
+              <a:t>Ties W4 (SQLi auth bypass + upload→RCE) into incident response. Walk the three lines as a story: get in → plant webshell → run commands. Teach URL-decoding (%20=space). Defenders read logs; attackers leave them. ~5 min.</a:t>
             </a:r>
             <a:endParaRPr lang="en-US" dirty="0"/>
           </a:p>
@@ -1226,7 +1229,7 @@
           <a:p>
             <a:r>
               <a:rPr lang="en-US" dirty="0"/>
-              <a:t>Explain before lab. Treasure hunt = enumerate ids for per-student flags — it's horizontal privilege escalation (become another regular user), not vertical (become admin); /api/admin exists in the code but no graded task ever targets it, don't imply it does. Defend is read-and-cite against a pre-written fix, not student-authored RBAC — nothing here is role-based. ~3 min.</a:t>
+              <a:t>Reference for the worksheet — these three are what's actually graded (worksheet header + Q1). CWE-321 is easy to drop since it's not the "obvious" JWT CWE, but it's the weak-secret task's specific id. ~1 min.</a:t>
             </a:r>
             <a:endParaRPr lang="en-US" dirty="0"/>
           </a:p>
@@ -1314,7 +1317,7 @@
           <a:p>
             <a:r>
               <a:rPr lang="en-US" dirty="0"/>
-              <a:t>Logistics. Steps 3-4 (verify the defense + cite the fix) graded — no student-authored fix code in this lab, the fix is handed to them already written. Q6 of the quiz asks for the object id they used + the fix + their personal flag. Also the NoteVault project access-control task.</a:t>
+              <a:t>The payoff. #1: authorize EVERY request, deny by default. "Check ownership, not just authentication" is the IDOR fix in one line. Centralize so you can't forget a check on one endpoint. ~6 min.</a:t>
             </a:r>
             <a:endParaRPr lang="en-US" dirty="0"/>
           </a:p>
@@ -1402,7 +1405,7 @@
           <a:p>
             <a:r>
               <a:rPr lang="en-US" dirty="0"/>
-              <a:t>Before/after + proof — "citation," not "you wrote a fix": the correct app is provided pre-written. AI-resilient tasks count.</a:t>
+              <a:t>Practical — they'll use Repeater to tweak object ids and Intruder to enumerate. Demo: intercept, change orders/1→2, forward, see another user's data. Set scope first so you don't attack out-of-bounds. ~5 min.</a:t>
             </a:r>
             <a:endParaRPr lang="en-US" dirty="0"/>
           </a:p>
@@ -1578,7 +1581,7 @@
           <a:p>
             <a:r>
               <a:rPr lang="en-US" dirty="0"/>
-              <a:t>Recap. Cold-call: "we authenticated the user — why can they still read another user's order?" (no ownership/authz check). ~2 min.</a:t>
+              <a:t>Explain before lab. Treasure hunt = enumerate ids for per-student flags — it's horizontal privilege escalation (become another regular user), not vertical (become admin); /api/admin exists in the code but no graded task ever targets it, don't imply it does. Defend is read-and-cite against a pre-written fix, not student-authored RBAC — nothing here is role-based. ~3 min.</a:t>
             </a:r>
             <a:endParaRPr lang="en-US" dirty="0"/>
           </a:p>
@@ -1666,7 +1669,7 @@
           <a:p>
             <a:r>
               <a:rPr lang="en-US" dirty="0"/>
-              <a:t>Wrap the teaching block: "Next week we consolidate W1-6 — Jeopardy + a mock CTF in the exact midterm format. Bring your cheat-sheet of CWEs." Remind cumulative review quiz in W7.</a:t>
+              <a:t>Logistics. Steps 3-4 (verify the defense + cite the fix) graded — no student-authored fix code in this lab, the fix is handed to them already written. The weekly quiz no longer asks for the object id/fix/flag (dropped — quiz runs before the lab) — that's required in the worksheet instead. Also the NoteVault project access-control task.</a:t>
             </a:r>
             <a:endParaRPr lang="en-US" dirty="0"/>
           </a:p>
@@ -1690,6 +1693,270 @@
             <a:fld id="{F7021451-1387-4CA6-816F-3879F97B5CBC}" type="slidenum">
               <a:rPr lang="en-US"/>
               <a:t>21</a:t>
+            </a:fld>
+            <a:endParaRPr lang="en-US"/>
+          </a:p>
+        </p:txBody>
+      </p:sp>
+    </p:spTree>
+    <p:extLst>
+      <p:ext uri="{BB962C8B-B14F-4D97-AF65-F5344CB8AC3E}">
+        <p14:creationId xmlns:p14="http://schemas.microsoft.com/office/powerpoint/2010/main" val="1024086991"/>
+      </p:ext>
+    </p:extLst>
+  </p:cSld>
+  <p:clrMapOvr>
+    <a:masterClrMapping/>
+  </p:clrMapOvr>
+</p:notes>
+</file>
+
+<file path=ppt/notesSlides/notesSlide22.xml><?xml version="1.0" encoding="utf-8"?>
+<p:notes xmlns:a="http://schemas.openxmlformats.org/drawingml/2006/main" xmlns:r="http://schemas.openxmlformats.org/officeDocument/2006/relationships" xmlns:p="http://schemas.openxmlformats.org/presentationml/2006/main">
+  <p:cSld>
+    <p:spTree>
+      <p:nvGrpSpPr>
+        <p:cNvPr id="1" name=""/>
+        <p:cNvGrpSpPr/>
+        <p:nvPr/>
+      </p:nvGrpSpPr>
+      <p:grpSpPr>
+        <a:xfrm>
+          <a:off x="0" y="0"/>
+          <a:ext cx="0" cy="0"/>
+          <a:chOff x="0" y="0"/>
+          <a:chExt cx="0" cy="0"/>
+        </a:xfrm>
+      </p:grpSpPr>
+      <p:sp>
+        <p:nvSpPr>
+          <p:cNvPr id="2" name="Slide Image Placeholder 1"/>
+          <p:cNvSpPr>
+            <a:spLocks noGrp="1" noRot="1" noChangeAspect="1"/>
+          </p:cNvSpPr>
+          <p:nvPr>
+            <p:ph type="sldImg"/>
+          </p:nvPr>
+        </p:nvSpPr>
+        <p:spPr/>
+      </p:sp>
+      <p:sp>
+        <p:nvSpPr>
+          <p:cNvPr id="3" name="Notes Placeholder 2"/>
+          <p:cNvSpPr>
+            <a:spLocks noGrp="1"/>
+          </p:cNvSpPr>
+          <p:nvPr>
+            <p:ph type="body" idx="1"/>
+          </p:nvPr>
+        </p:nvSpPr>
+        <p:spPr/>
+        <p:txBody>
+          <a:bodyPr/>
+          <a:lstStyle/>
+          <a:p>
+            <a:r>
+              <a:rPr lang="en-US" dirty="0"/>
+              <a:t>Before/after + proof — "citation," not "you wrote a fix": the correct app is provided pre-written. AI-resilient tasks count.</a:t>
+            </a:r>
+            <a:endParaRPr lang="en-US" dirty="0"/>
+          </a:p>
+        </p:txBody>
+      </p:sp>
+      <p:sp>
+        <p:nvSpPr>
+          <p:cNvPr id="4" name="Slide Number Placeholder 3"/>
+          <p:cNvSpPr>
+            <a:spLocks noGrp="1"/>
+          </p:cNvSpPr>
+          <p:nvPr>
+            <p:ph type="sldNum" sz="quarter" idx="10"/>
+          </p:nvPr>
+        </p:nvSpPr>
+        <p:spPr/>
+        <p:txBody>
+          <a:bodyPr/>
+          <a:lstStyle/>
+          <a:p>
+            <a:fld id="{F7021451-1387-4CA6-816F-3879F97B5CBC}" type="slidenum">
+              <a:rPr lang="en-US"/>
+              <a:t>22</a:t>
+            </a:fld>
+            <a:endParaRPr lang="en-US"/>
+          </a:p>
+        </p:txBody>
+      </p:sp>
+    </p:spTree>
+    <p:extLst>
+      <p:ext uri="{BB962C8B-B14F-4D97-AF65-F5344CB8AC3E}">
+        <p14:creationId xmlns:p14="http://schemas.microsoft.com/office/powerpoint/2010/main" val="1024086991"/>
+      </p:ext>
+    </p:extLst>
+  </p:cSld>
+  <p:clrMapOvr>
+    <a:masterClrMapping/>
+  </p:clrMapOvr>
+</p:notes>
+</file>
+
+<file path=ppt/notesSlides/notesSlide23.xml><?xml version="1.0" encoding="utf-8"?>
+<p:notes xmlns:a="http://schemas.openxmlformats.org/drawingml/2006/main" xmlns:r="http://schemas.openxmlformats.org/officeDocument/2006/relationships" xmlns:p="http://schemas.openxmlformats.org/presentationml/2006/main">
+  <p:cSld>
+    <p:spTree>
+      <p:nvGrpSpPr>
+        <p:cNvPr id="1" name=""/>
+        <p:cNvGrpSpPr/>
+        <p:nvPr/>
+      </p:nvGrpSpPr>
+      <p:grpSpPr>
+        <a:xfrm>
+          <a:off x="0" y="0"/>
+          <a:ext cx="0" cy="0"/>
+          <a:chOff x="0" y="0"/>
+          <a:chExt cx="0" cy="0"/>
+        </a:xfrm>
+      </p:grpSpPr>
+      <p:sp>
+        <p:nvSpPr>
+          <p:cNvPr id="2" name="Slide Image Placeholder 1"/>
+          <p:cNvSpPr>
+            <a:spLocks noGrp="1" noRot="1" noChangeAspect="1"/>
+          </p:cNvSpPr>
+          <p:nvPr>
+            <p:ph type="sldImg"/>
+          </p:nvPr>
+        </p:nvSpPr>
+        <p:spPr/>
+      </p:sp>
+      <p:sp>
+        <p:nvSpPr>
+          <p:cNvPr id="3" name="Notes Placeholder 2"/>
+          <p:cNvSpPr>
+            <a:spLocks noGrp="1"/>
+          </p:cNvSpPr>
+          <p:nvPr>
+            <p:ph type="body" idx="1"/>
+          </p:nvPr>
+        </p:nvSpPr>
+        <p:spPr/>
+        <p:txBody>
+          <a:bodyPr/>
+          <a:lstStyle/>
+          <a:p>
+            <a:r>
+              <a:rPr lang="en-US" dirty="0"/>
+              <a:t>Recap. Cold-call: "we authenticated the user — why can they still read another user's order?" (no ownership/authz check). ~2 min.</a:t>
+            </a:r>
+            <a:endParaRPr lang="en-US" dirty="0"/>
+          </a:p>
+        </p:txBody>
+      </p:sp>
+      <p:sp>
+        <p:nvSpPr>
+          <p:cNvPr id="4" name="Slide Number Placeholder 3"/>
+          <p:cNvSpPr>
+            <a:spLocks noGrp="1"/>
+          </p:cNvSpPr>
+          <p:nvPr>
+            <p:ph type="sldNum" sz="quarter" idx="10"/>
+          </p:nvPr>
+        </p:nvSpPr>
+        <p:spPr/>
+        <p:txBody>
+          <a:bodyPr/>
+          <a:lstStyle/>
+          <a:p>
+            <a:fld id="{F7021451-1387-4CA6-816F-3879F97B5CBC}" type="slidenum">
+              <a:rPr lang="en-US"/>
+              <a:t>23</a:t>
+            </a:fld>
+            <a:endParaRPr lang="en-US"/>
+          </a:p>
+        </p:txBody>
+      </p:sp>
+    </p:spTree>
+    <p:extLst>
+      <p:ext uri="{BB962C8B-B14F-4D97-AF65-F5344CB8AC3E}">
+        <p14:creationId xmlns:p14="http://schemas.microsoft.com/office/powerpoint/2010/main" val="1024086991"/>
+      </p:ext>
+    </p:extLst>
+  </p:cSld>
+  <p:clrMapOvr>
+    <a:masterClrMapping/>
+  </p:clrMapOvr>
+</p:notes>
+</file>
+
+<file path=ppt/notesSlides/notesSlide24.xml><?xml version="1.0" encoding="utf-8"?>
+<p:notes xmlns:a="http://schemas.openxmlformats.org/drawingml/2006/main" xmlns:r="http://schemas.openxmlformats.org/officeDocument/2006/relationships" xmlns:p="http://schemas.openxmlformats.org/presentationml/2006/main">
+  <p:cSld>
+    <p:spTree>
+      <p:nvGrpSpPr>
+        <p:cNvPr id="1" name=""/>
+        <p:cNvGrpSpPr/>
+        <p:nvPr/>
+      </p:nvGrpSpPr>
+      <p:grpSpPr>
+        <a:xfrm>
+          <a:off x="0" y="0"/>
+          <a:ext cx="0" cy="0"/>
+          <a:chOff x="0" y="0"/>
+          <a:chExt cx="0" cy="0"/>
+        </a:xfrm>
+      </p:grpSpPr>
+      <p:sp>
+        <p:nvSpPr>
+          <p:cNvPr id="2" name="Slide Image Placeholder 1"/>
+          <p:cNvSpPr>
+            <a:spLocks noGrp="1" noRot="1" noChangeAspect="1"/>
+          </p:cNvSpPr>
+          <p:nvPr>
+            <p:ph type="sldImg"/>
+          </p:nvPr>
+        </p:nvSpPr>
+        <p:spPr/>
+      </p:sp>
+      <p:sp>
+        <p:nvSpPr>
+          <p:cNvPr id="3" name="Notes Placeholder 2"/>
+          <p:cNvSpPr>
+            <a:spLocks noGrp="1"/>
+          </p:cNvSpPr>
+          <p:nvPr>
+            <p:ph type="body" idx="1"/>
+          </p:nvPr>
+        </p:nvSpPr>
+        <p:spPr/>
+        <p:txBody>
+          <a:bodyPr/>
+          <a:lstStyle/>
+          <a:p>
+            <a:r>
+              <a:rPr lang="en-US" dirty="0"/>
+              <a:t>Wrap the teaching block: "Next week we consolidate W1-6 — Jeopardy + a mock CTF in the exact midterm format. Bring your cheat-sheet of CWEs." Remind cumulative review quiz in W7.</a:t>
+            </a:r>
+            <a:endParaRPr lang="en-US" dirty="0"/>
+          </a:p>
+        </p:txBody>
+      </p:sp>
+      <p:sp>
+        <p:nvSpPr>
+          <p:cNvPr id="4" name="Slide Number Placeholder 3"/>
+          <p:cNvSpPr>
+            <a:spLocks noGrp="1"/>
+          </p:cNvSpPr>
+          <p:nvPr>
+            <p:ph type="sldNum" sz="quarter" idx="10"/>
+          </p:nvPr>
+        </p:nvSpPr>
+        <p:spPr/>
+        <p:txBody>
+          <a:bodyPr/>
+          <a:lstStyle/>
+          <a:p>
+            <a:fld id="{F7021451-1387-4CA6-816F-3879F97B5CBC}" type="slidenum">
+              <a:rPr lang="en-US"/>
+              <a:t>24</a:t>
             </a:fld>
             <a:endParaRPr lang="en-US"/>
           </a:p>
@@ -2106,7 +2373,7 @@
           <a:p>
             <a:r>
               <a:rPr lang="en-US" dirty="0"/>
-              <a:t>Keep high-level (full OAuth is its own course). Key idea: "Login with Google" = delegation, you never give the app your Google password. The `state` parameter prevents CSRF on the callback. ~4 min.</a:t>
+              <a:t>Parallel to Wk4's parameterize slide. The break was never that the payload is readable (base64url always is) — it's that the server trusted a token whose signature it didn't properly check. alg:none says 'no signature' and a vulnerable server obeys; a weak secret ('secret') lets anyone RE-sign. Both defeat the ONE thing that matters: does the signature verify under a key only we hold? Fix: pin HS256 so 'none' is rejected, use a strong random secret from the environment, and require exp+aud so a stray token can't be replayed. Punch line, and the analog of 'parameterize once': this fix lives in current_user(), so the moment you fix it, /api/orders AND /api/admin are both protected — there is no per-endpoint patch to forget. Never put secrets in the payload. ~6 min.</a:t>
             </a:r>
             <a:endParaRPr lang="en-US" dirty="0"/>
           </a:p>
@@ -2194,7 +2461,7 @@
           <a:p>
             <a:r>
               <a:rPr lang="en-US" dirty="0"/>
-              <a:t>The worked example — this is the IDOR Treasure Hunt. The server authenticated you but never checked the object BELONGS to you. Horizontal = peer data; vertical = privilege escalation. ~6 min.</a:t>
+              <a:t>Consolidation slide — leave it up during the JWT Forgery lab. It shows the whole story: the payload is always readable (blue), so the bug is never 'they saw the data' — it's a signature that wasn't verified. Point at the orange empty signature (alg:none) and the orange HMAC(secret) (weak key), then the blue fix line: pin HS256, strong secret, require exp+aud. Same story the jwt-forge sim animates live. Land the punch line: signed, not sealed. ~3 min.</a:t>
             </a:r>
             <a:endParaRPr lang="en-US" dirty="0"/>
           </a:p>
@@ -2282,7 +2549,7 @@
           <a:p>
             <a:r>
               <a:rPr lang="en-US" dirty="0"/>
-              <a:t>The thesis of the whole week, made concrete: JWT pitfalls broke Gate 1, IDOR broke Gate 2, and they're independent failures — fixing one doesn't fix the other. This is why "Defenses" lists both "verify JWT" and "check ownership" as separate bullets, not one fix. ~4 min.</a:t>
+              <a:t>Keep high-level (full OAuth is its own course). Key idea: "Login with Google" = delegation, you never give the app your Google password. The `state` parameter prevents CSRF on the callback. ~4 min.</a:t>
             </a:r>
             <a:endParaRPr lang="en-US" dirty="0"/>
           </a:p>
@@ -2915,7 +3182,7 @@
                 <a:ea typeface="Arial" pitchFamily="34" charset="-122"/>
                 <a:cs typeface="Arial" pitchFamily="34" charset="-120"/>
               </a:rPr>
-              <a:t>Access control models</a:t>
+              <a:t>IDOR &amp; broken access control</a:t>
             </a:r>
             <a:endParaRPr lang="en-US" sz="2600" dirty="0"/>
           </a:p>
@@ -2930,11 +3197,96 @@
         <p:spPr>
           <a:xfrm>
             <a:off x="457200" y="1325880"/>
-            <a:ext cx="8229600" cy="1517904"/>
+            <a:ext cx="8229600" cy="713232"/>
           </a:xfrm>
           <a:prstGeom prst="roundRect">
             <a:avLst>
-              <a:gd name="adj" fmla="val 4819"/>
+              <a:gd name="adj" fmla="val 7692"/>
+            </a:avLst>
+          </a:prstGeom>
+          <a:solidFill>
+            <a:srgbClr val="0A1020"/>
+          </a:solidFill>
+          <a:ln w="12700">
+            <a:solidFill>
+              <a:srgbClr val="E8EDF3"/>
+            </a:solidFill>
+            <a:prstDash val="solid"/>
+          </a:ln>
+        </p:spPr>
+      </p:sp>
+      <p:sp>
+        <p:nvSpPr>
+          <p:cNvPr id="6" name="Text 3"/>
+          <p:cNvSpPr/>
+          <p:nvPr/>
+        </p:nvSpPr>
+        <p:spPr>
+          <a:xfrm>
+            <a:off x="640080" y="1399032"/>
+            <a:ext cx="7863840" cy="566928"/>
+          </a:xfrm>
+          <a:prstGeom prst="rect">
+            <a:avLst/>
+          </a:prstGeom>
+          <a:noFill/>
+          <a:ln/>
+        </p:spPr>
+        <p:txBody>
+          <a:bodyPr wrap="square" lIns="0" tIns="0" rIns="0" bIns="0" rtlCol="0" anchor="t">
+            <a:normAutofit/>
+          </a:bodyPr>
+          <a:lstStyle/>
+          <a:p>
+            <a:pPr indent="0" marL="0">
+              <a:buNone/>
+            </a:pPr>
+            <a:r>
+              <a:rPr lang="en-US" sz="1150" dirty="0">
+                <a:solidFill>
+                  <a:srgbClr val="9FE7D6"/>
+                </a:solidFill>
+                <a:latin typeface="Courier New" pitchFamily="34" charset="0"/>
+                <a:ea typeface="Courier New" pitchFamily="34" charset="-122"/>
+                <a:cs typeface="Courier New" pitchFamily="34" charset="-120"/>
+              </a:rPr>
+              <a:t>GET /api/orders/1   → your order</a:t>
+            </a:r>
+            <a:endParaRPr lang="en-US" sz="1150" dirty="0"/>
+          </a:p>
+          <a:p>
+            <a:pPr indent="0" marL="0">
+              <a:buNone/>
+            </a:pPr>
+            <a:r>
+              <a:rPr lang="en-US" sz="1150" dirty="0">
+                <a:solidFill>
+                  <a:srgbClr val="9FE7D6"/>
+                </a:solidFill>
+                <a:latin typeface="Courier New" pitchFamily="34" charset="0"/>
+                <a:ea typeface="Courier New" pitchFamily="34" charset="-122"/>
+                <a:cs typeface="Courier New" pitchFamily="34" charset="-120"/>
+              </a:rPr>
+              <a:t>GET /api/orders/2   → someone else's  😱</a:t>
+            </a:r>
+            <a:endParaRPr lang="en-US" sz="1150" dirty="0"/>
+          </a:p>
+        </p:txBody>
+      </p:sp>
+      <p:sp>
+        <p:nvSpPr>
+          <p:cNvPr id="7" name="Shape 4"/>
+          <p:cNvSpPr/>
+          <p:nvPr/>
+        </p:nvSpPr>
+        <p:spPr>
+          <a:xfrm>
+            <a:off x="457200" y="2203704"/>
+            <a:ext cx="8229600" cy="896112"/>
+          </a:xfrm>
+          <a:prstGeom prst="roundRect">
+            <a:avLst>
+              <a:gd name="adj" fmla="val 8163"/>
             </a:avLst>
           </a:prstGeom>
           <a:solidFill>
@@ -2952,14 +3304,14 @@
       </p:sp>
       <p:sp>
         <p:nvSpPr>
-          <p:cNvPr id="6" name="Text 3"/>
-          <p:cNvSpPr/>
-          <p:nvPr/>
-        </p:nvSpPr>
-        <p:spPr>
-          <a:xfrm>
-            <a:off x="731520" y="1435608"/>
-            <a:ext cx="7680960" cy="1298448"/>
+          <p:cNvPr id="8" name="Text 5"/>
+          <p:cNvSpPr/>
+          <p:nvPr/>
+        </p:nvSpPr>
+        <p:spPr>
+          <a:xfrm>
+            <a:off x="731520" y="2313432"/>
+            <a:ext cx="7680960" cy="676656"/>
           </a:xfrm>
           <a:prstGeom prst="rect">
             <a:avLst/>
@@ -2989,7 +3341,7 @@
                 <a:ea typeface="Calibri" pitchFamily="34" charset="-122"/>
                 <a:cs typeface="Calibri" pitchFamily="34" charset="-120"/>
               </a:rPr>
-              <a:t>MAC — Mandatory: system-enforced labels (military)</a:t>
+              <a:t>Object reference with no ownership check</a:t>
             </a:r>
             <a:endParaRPr lang="en-US" sz="1400" dirty="0"/>
           </a:p>
@@ -3010,112 +3362,7 @@
                 <a:ea typeface="Calibri" pitchFamily="34" charset="-122"/>
                 <a:cs typeface="Calibri" pitchFamily="34" charset="-120"/>
               </a:rPr>
-              <a:t>DAC — Discretionary: owner grants access (file perms)</a:t>
-            </a:r>
-            <a:endParaRPr lang="en-US" sz="1400" dirty="0"/>
-          </a:p>
-          <a:p>
-            <a:pPr marL="342900" indent="-342900">
-              <a:spcAft>
-                <a:spcPts val="600"/>
-              </a:spcAft>
-              <a:buSzPct val="100000"/>
-              <a:buChar char="•"/>
-            </a:pPr>
-            <a:r>
-              <a:rPr lang="en-US" sz="1400" dirty="0">
-                <a:solidFill>
-                  <a:srgbClr val="1F2937"/>
-                </a:solidFill>
-                <a:latin typeface="Calibri" pitchFamily="34" charset="0"/>
-                <a:ea typeface="Calibri" pitchFamily="34" charset="-122"/>
-                <a:cs typeface="Calibri" pitchFamily="34" charset="-120"/>
-              </a:rPr>
-              <a:t>RBAC — Role-Based: permissions via roles</a:t>
-            </a:r>
-            <a:endParaRPr lang="en-US" sz="1400" dirty="0"/>
-          </a:p>
-          <a:p>
-            <a:pPr marL="342900" indent="-342900">
-              <a:spcAft>
-                <a:spcPts val="600"/>
-              </a:spcAft>
-              <a:buSzPct val="100000"/>
-              <a:buChar char="•"/>
-            </a:pPr>
-            <a:r>
-              <a:rPr lang="en-US" sz="1400" dirty="0">
-                <a:solidFill>
-                  <a:srgbClr val="1F2937"/>
-                </a:solidFill>
-                <a:latin typeface="Calibri" pitchFamily="34" charset="0"/>
-                <a:ea typeface="Calibri" pitchFamily="34" charset="-122"/>
-                <a:cs typeface="Calibri" pitchFamily="34" charset="-120"/>
-              </a:rPr>
-              <a:t>RuBAC — Rule-Based: conditions (time of day, IP)</a:t>
-            </a:r>
-            <a:endParaRPr lang="en-US" sz="1400" dirty="0"/>
-          </a:p>
-        </p:txBody>
-      </p:sp>
-      <p:sp>
-        <p:nvSpPr>
-          <p:cNvPr id="7" name="Shape 4"/>
-          <p:cNvSpPr/>
-          <p:nvPr/>
-        </p:nvSpPr>
-        <p:spPr>
-          <a:xfrm>
-            <a:off x="457200" y="3008376"/>
-            <a:ext cx="8229600" cy="822960"/>
-          </a:xfrm>
-          <a:prstGeom prst="roundRect">
-            <a:avLst>
-              <a:gd name="adj" fmla="val 8889"/>
-            </a:avLst>
-          </a:prstGeom>
-          <a:solidFill>
-            <a:srgbClr val="E8EDF3"/>
-          </a:solidFill>
-          <a:ln/>
-        </p:spPr>
-      </p:sp>
-      <p:sp>
-        <p:nvSpPr>
-          <p:cNvPr id="8" name="Text 5"/>
-          <p:cNvSpPr/>
-          <p:nvPr/>
-        </p:nvSpPr>
-        <p:spPr>
-          <a:xfrm>
-            <a:off x="731520" y="3008376"/>
-            <a:ext cx="7680960" cy="822960"/>
-          </a:xfrm>
-          <a:prstGeom prst="rect">
-            <a:avLst/>
-          </a:prstGeom>
-          <a:noFill/>
-          <a:ln/>
-        </p:spPr>
-        <p:txBody>
-          <a:bodyPr wrap="square" lIns="0" tIns="0" rIns="0" bIns="0" rtlCol="0" anchor="ctr">
-            <a:normAutofit/>
-          </a:bodyPr>
-          <a:lstStyle/>
-          <a:p>
-            <a:pPr indent="0" marL="0">
-              <a:buNone/>
-            </a:pPr>
-            <a:r>
-              <a:rPr lang="en-US" sz="1400" i="1" dirty="0">
-                <a:solidFill>
-                  <a:srgbClr val="E35205"/>
-                </a:solidFill>
-                <a:latin typeface="Calibri" pitchFamily="34" charset="0"/>
-                <a:ea typeface="Calibri" pitchFamily="34" charset="-122"/>
-                <a:cs typeface="Calibri" pitchFamily="34" charset="-120"/>
-              </a:rPr>
-              <a:t>Best practices: separation of duties · least privilege · implicit deny</a:t>
+              <a:t>Vertical (become admin) vs horizontal (other users)</a:t>
             </a:r>
             <a:endParaRPr lang="en-US" sz="1400" dirty="0"/>
           </a:p>
@@ -3300,6 +3547,1077 @@
                 <a:ea typeface="Arial" pitchFamily="34" charset="-122"/>
                 <a:cs typeface="Arial" pitchFamily="34" charset="-120"/>
               </a:rPr>
+              <a:t>The fix: check ownership — a valid token is not permission</a:t>
+            </a:r>
+            <a:endParaRPr lang="en-US" sz="2600" dirty="0"/>
+          </a:p>
+        </p:txBody>
+      </p:sp>
+      <p:sp>
+        <p:nvSpPr>
+          <p:cNvPr id="5" name="Shape 2"/>
+          <p:cNvSpPr/>
+          <p:nvPr/>
+        </p:nvSpPr>
+        <p:spPr>
+          <a:xfrm>
+            <a:off x="457200" y="1325880"/>
+            <a:ext cx="8229600" cy="1810512"/>
+          </a:xfrm>
+          <a:prstGeom prst="roundRect">
+            <a:avLst>
+              <a:gd name="adj" fmla="val 3030"/>
+            </a:avLst>
+          </a:prstGeom>
+          <a:solidFill>
+            <a:srgbClr val="0A1020"/>
+          </a:solidFill>
+          <a:ln w="12700">
+            <a:solidFill>
+              <a:srgbClr val="E8EDF3"/>
+            </a:solidFill>
+            <a:prstDash val="solid"/>
+          </a:ln>
+        </p:spPr>
+      </p:sp>
+      <p:sp>
+        <p:nvSpPr>
+          <p:cNvPr id="6" name="Text 3"/>
+          <p:cNvSpPr/>
+          <p:nvPr/>
+        </p:nvSpPr>
+        <p:spPr>
+          <a:xfrm>
+            <a:off x="640080" y="1399032"/>
+            <a:ext cx="7863840" cy="1664208"/>
+          </a:xfrm>
+          <a:prstGeom prst="rect">
+            <a:avLst/>
+          </a:prstGeom>
+          <a:noFill/>
+          <a:ln/>
+        </p:spPr>
+        <p:txBody>
+          <a:bodyPr wrap="square" lIns="0" tIns="0" rIns="0" bIns="0" rtlCol="0" anchor="t">
+            <a:normAutofit/>
+          </a:bodyPr>
+          <a:lstStyle/>
+          <a:p>
+            <a:pPr indent="0" marL="0">
+              <a:buNone/>
+            </a:pPr>
+            <a:r>
+              <a:rPr lang="en-US" sz="1150" dirty="0">
+                <a:solidFill>
+                  <a:srgbClr val="9FE7D6"/>
+                </a:solidFill>
+                <a:latin typeface="Courier New" pitchFamily="34" charset="0"/>
+                <a:ea typeface="Courier New" pitchFamily="34" charset="-122"/>
+                <a:cs typeface="Courier New" pitchFamily="34" charset="-120"/>
+              </a:rPr>
+              <a:t># vulnerable: authenticated, but the result is thrown away -&gt; no Gate 2</a:t>
+            </a:r>
+            <a:endParaRPr lang="en-US" sz="1150" dirty="0"/>
+          </a:p>
+          <a:p>
+            <a:pPr indent="0" marL="0">
+              <a:buNone/>
+            </a:pPr>
+            <a:r>
+              <a:rPr lang="en-US" sz="1150" dirty="0">
+                <a:solidFill>
+                  <a:srgbClr val="9FE7D6"/>
+                </a:solidFill>
+                <a:latin typeface="Courier New" pitchFamily="34" charset="0"/>
+                <a:ea typeface="Courier New" pitchFamily="34" charset="-122"/>
+                <a:cs typeface="Courier New" pitchFamily="34" charset="-120"/>
+              </a:rPr>
+              <a:t>def get_order(oid):</a:t>
+            </a:r>
+            <a:endParaRPr lang="en-US" sz="1150" dirty="0"/>
+          </a:p>
+          <a:p>
+            <a:pPr indent="0" marL="0">
+              <a:buNone/>
+            </a:pPr>
+            <a:r>
+              <a:rPr lang="en-US" sz="1150" dirty="0">
+                <a:solidFill>
+                  <a:srgbClr val="9FE7D6"/>
+                </a:solidFill>
+                <a:latin typeface="Courier New" pitchFamily="34" charset="0"/>
+                <a:ea typeface="Courier New" pitchFamily="34" charset="-122"/>
+                <a:cs typeface="Courier New" pitchFamily="34" charset="-120"/>
+              </a:rPr>
+              <a:t>    current_user()                 # WHO you are...</a:t>
+            </a:r>
+            <a:endParaRPr lang="en-US" sz="1150" dirty="0"/>
+          </a:p>
+          <a:p>
+            <a:pPr indent="0" marL="0">
+              <a:buNone/>
+            </a:pPr>
+            <a:r>
+              <a:rPr lang="en-US" sz="1150" dirty="0">
+                <a:solidFill>
+                  <a:srgbClr val="9FE7D6"/>
+                </a:solidFill>
+                <a:latin typeface="Courier New" pitchFamily="34" charset="0"/>
+                <a:ea typeface="Courier New" pitchFamily="34" charset="-122"/>
+                <a:cs typeface="Courier New" pitchFamily="34" charset="-120"/>
+              </a:rPr>
+              <a:t>    return jsonify(ORDERS[oid])    # ...but never 'may you see THIS?'</a:t>
+            </a:r>
+            <a:endParaRPr lang="en-US" sz="1150" dirty="0"/>
+          </a:p>
+          <a:p>
+            <a:pPr indent="0" marL="0">
+              <a:buNone/>
+            </a:pPr>
+            <a:endParaRPr lang="en-US" sz="1150" dirty="0"/>
+          </a:p>
+          <a:p>
+            <a:pPr indent="0" marL="0">
+              <a:buNone/>
+            </a:pPr>
+            <a:r>
+              <a:rPr lang="en-US" sz="1150" dirty="0">
+                <a:solidFill>
+                  <a:srgbClr val="9FE7D6"/>
+                </a:solidFill>
+                <a:latin typeface="Courier New" pitchFamily="34" charset="0"/>
+                <a:ea typeface="Courier New" pitchFamily="34" charset="-122"/>
+                <a:cs typeface="Courier New" pitchFamily="34" charset="-120"/>
+              </a:rPr>
+              <a:t># fixed: deny-by-default ownership check on every object access</a:t>
+            </a:r>
+            <a:endParaRPr lang="en-US" sz="1150" dirty="0"/>
+          </a:p>
+          <a:p>
+            <a:pPr indent="0" marL="0">
+              <a:buNone/>
+            </a:pPr>
+            <a:r>
+              <a:rPr lang="en-US" sz="1150" dirty="0">
+                <a:solidFill>
+                  <a:srgbClr val="9FE7D6"/>
+                </a:solidFill>
+                <a:latin typeface="Courier New" pitchFamily="34" charset="0"/>
+                <a:ea typeface="Courier New" pitchFamily="34" charset="-122"/>
+                <a:cs typeface="Courier New" pitchFamily="34" charset="-120"/>
+              </a:rPr>
+              <a:t>    if order["owner"] != user: return 403</a:t>
+            </a:r>
+            <a:endParaRPr lang="en-US" sz="1150" dirty="0"/>
+          </a:p>
+        </p:txBody>
+      </p:sp>
+      <p:sp>
+        <p:nvSpPr>
+          <p:cNvPr id="7" name="Shape 4"/>
+          <p:cNvSpPr/>
+          <p:nvPr/>
+        </p:nvSpPr>
+        <p:spPr>
+          <a:xfrm>
+            <a:off x="457200" y="3300984"/>
+            <a:ext cx="8229600" cy="1207008"/>
+          </a:xfrm>
+          <a:prstGeom prst="roundRect">
+            <a:avLst>
+              <a:gd name="adj" fmla="val 6061"/>
+            </a:avLst>
+          </a:prstGeom>
+          <a:solidFill>
+            <a:srgbClr val="F1F5F9"/>
+          </a:solidFill>
+          <a:ln/>
+          <a:effectLst>
+            <a:outerShdw sx="100000" sy="100000" kx="0" ky="0" algn="bl" rotWithShape="0" blurRad="76200" dist="25400" dir="5400000">
+              <a:srgbClr val="000000">
+                <a:alpha val="12000"/>
+              </a:srgbClr>
+            </a:outerShdw>
+          </a:effectLst>
+        </p:spPr>
+      </p:sp>
+      <p:sp>
+        <p:nvSpPr>
+          <p:cNvPr id="8" name="Text 5"/>
+          <p:cNvSpPr/>
+          <p:nvPr/>
+        </p:nvSpPr>
+        <p:spPr>
+          <a:xfrm>
+            <a:off x="731520" y="3410712"/>
+            <a:ext cx="7680960" cy="987552"/>
+          </a:xfrm>
+          <a:prstGeom prst="rect">
+            <a:avLst/>
+          </a:prstGeom>
+          <a:noFill/>
+          <a:ln/>
+        </p:spPr>
+        <p:txBody>
+          <a:bodyPr wrap="square" lIns="0" tIns="0" rIns="0" bIns="0" rtlCol="0" anchor="t">
+            <a:normAutofit/>
+          </a:bodyPr>
+          <a:lstStyle/>
+          <a:p>
+            <a:pPr marL="342900" indent="-342900">
+              <a:spcAft>
+                <a:spcPts val="600"/>
+              </a:spcAft>
+              <a:buSzPct val="100000"/>
+              <a:buChar char="•"/>
+            </a:pPr>
+            <a:r>
+              <a:rPr lang="en-US" sz="1400" dirty="0">
+                <a:solidFill>
+                  <a:srgbClr val="1F2937"/>
+                </a:solidFill>
+                <a:latin typeface="Calibri" pitchFamily="34" charset="0"/>
+                <a:ea typeface="Calibri" pitchFamily="34" charset="-122"/>
+                <a:cs typeface="Calibri" pitchFamily="34" charset="-120"/>
+              </a:rPr>
+              <a:t>Authentication answers who; authorization answers may you touch THIS object</a:t>
+            </a:r>
+            <a:endParaRPr lang="en-US" sz="1400" dirty="0"/>
+          </a:p>
+          <a:p>
+            <a:pPr marL="342900" indent="-342900">
+              <a:spcAft>
+                <a:spcPts val="600"/>
+              </a:spcAft>
+              <a:buSzPct val="100000"/>
+              <a:buChar char="•"/>
+            </a:pPr>
+            <a:r>
+              <a:rPr lang="en-US" sz="1400" dirty="0">
+                <a:solidFill>
+                  <a:srgbClr val="1F2937"/>
+                </a:solidFill>
+                <a:latin typeface="Calibri" pitchFamily="34" charset="0"/>
+                <a:ea typeface="Calibri" pitchFamily="34" charset="-122"/>
+                <a:cs typeface="Calibri" pitchFamily="34" charset="-120"/>
+              </a:rPr>
+              <a:t>alice's real, valid token must still be refused bob's order</a:t>
+            </a:r>
+            <a:endParaRPr lang="en-US" sz="1400" dirty="0"/>
+          </a:p>
+          <a:p>
+            <a:pPr marL="342900" indent="-342900">
+              <a:spcAft>
+                <a:spcPts val="600"/>
+              </a:spcAft>
+              <a:buSzPct val="100000"/>
+              <a:buChar char="•"/>
+            </a:pPr>
+            <a:r>
+              <a:rPr lang="en-US" sz="1400" dirty="0">
+                <a:solidFill>
+                  <a:srgbClr val="1F2937"/>
+                </a:solidFill>
+                <a:latin typeface="Calibri" pitchFamily="34" charset="0"/>
+                <a:ea typeface="Calibri" pitchFamily="34" charset="-122"/>
+                <a:cs typeface="Calibri" pitchFamily="34" charset="-120"/>
+              </a:rPr>
+              <a:t>Check ownership at every object access — deny by default</a:t>
+            </a:r>
+            <a:endParaRPr lang="en-US" sz="1400" dirty="0"/>
+          </a:p>
+        </p:txBody>
+      </p:sp>
+      <p:sp>
+        <p:nvSpPr>
+          <p:cNvPr id="9" name="Text 6"/>
+          <p:cNvSpPr/>
+          <p:nvPr/>
+        </p:nvSpPr>
+        <p:spPr>
+          <a:xfrm>
+            <a:off x="457200" y="4800600"/>
+            <a:ext cx="6949440" cy="274320"/>
+          </a:xfrm>
+          <a:prstGeom prst="rect">
+            <a:avLst/>
+          </a:prstGeom>
+          <a:noFill/>
+          <a:ln/>
+        </p:spPr>
+        <p:txBody>
+          <a:bodyPr wrap="square" lIns="0" tIns="0" rIns="0" bIns="0" rtlCol="0" anchor="ctr"/>
+          <a:lstStyle/>
+          <a:p>
+            <a:pPr indent="0" marL="0">
+              <a:buNone/>
+            </a:pPr>
+            <a:r>
+              <a:rPr lang="en-US" sz="900" dirty="0">
+                <a:solidFill>
+                  <a:srgbClr val="64748B"/>
+                </a:solidFill>
+                <a:latin typeface="Calibri" pitchFamily="34" charset="0"/>
+                <a:ea typeface="Calibri" pitchFamily="34" charset="-122"/>
+                <a:cs typeface="Calibri" pitchFamily="34" charset="-120"/>
+              </a:rPr>
+              <a:t>Software Security · Week 6</a:t>
+            </a:r>
+            <a:endParaRPr lang="en-US" sz="900" dirty="0"/>
+          </a:p>
+        </p:txBody>
+      </p:sp>
+      <p:pic>
+        <p:nvPicPr>
+          <p:cNvPr id="10" name="Image 1" descr="/Users/pop7/Library/CloudStorage/OneDrive-MonsterConnectCo.,Ltd/Lecture/KOSEN69 - software-security/slides/pptx/assets/logo-small.png">    </p:cNvPr>
+          <p:cNvPicPr>
+            <a:picLocks noChangeAspect="1"/>
+          </p:cNvPicPr>
+          <p:nvPr/>
+        </p:nvPicPr>
+        <p:blipFill>
+          <a:blip r:embed="rId2"/>
+          <a:stretch>
+            <a:fillRect/>
+          </a:stretch>
+        </p:blipFill>
+        <p:spPr>
+          <a:xfrm>
+            <a:off x="7882128" y="4700016"/>
+            <a:ext cx="768096" cy="356616"/>
+          </a:xfrm>
+          <a:prstGeom prst="rect">
+            <a:avLst/>
+          </a:prstGeom>
+        </p:spPr>
+      </p:pic>
+    </p:spTree>
+  </p:cSld>
+  <p:clrMapOvr>
+    <a:masterClrMapping/>
+  </p:clrMapOvr>
+</p:sld>
+</file>
+
+<file path=ppt/slides/slide12.xml><?xml version="1.0" encoding="utf-8"?>
+<p:sld xmlns:a="http://schemas.openxmlformats.org/drawingml/2006/main" xmlns:r="http://schemas.openxmlformats.org/officeDocument/2006/relationships" xmlns:p="http://schemas.openxmlformats.org/presentationml/2006/main">
+  <p:cSld name="Slide 12">
+    <p:bg>
+      <p:bgPr>
+        <a:solidFill>
+          <a:srgbClr val="FFFFFF"/>
+        </a:solidFill>
+      </p:bgPr>
+    </p:bg>
+    <p:spTree>
+      <p:nvGrpSpPr>
+        <p:cNvPr id="1" name=""/>
+        <p:cNvGrpSpPr/>
+        <p:nvPr/>
+      </p:nvGrpSpPr>
+      <p:grpSpPr>
+        <a:xfrm>
+          <a:off x="0" y="0"/>
+          <a:ext cx="0" cy="0"/>
+          <a:chOff x="0" y="0"/>
+          <a:chExt cx="0" cy="0"/>
+        </a:xfrm>
+      </p:grpSpPr>
+      <p:sp>
+        <p:nvSpPr>
+          <p:cNvPr id="2" name="Shape 0"/>
+          <p:cNvSpPr/>
+          <p:nvPr/>
+        </p:nvSpPr>
+        <p:spPr>
+          <a:xfrm>
+            <a:off x="457200" y="384048"/>
+            <a:ext cx="530352" cy="530352"/>
+          </a:xfrm>
+          <a:prstGeom prst="ellipse">
+            <a:avLst/>
+          </a:prstGeom>
+          <a:solidFill>
+            <a:srgbClr val="E35205"/>
+          </a:solidFill>
+          <a:ln/>
+          <a:effectLst>
+            <a:outerShdw sx="100000" sy="100000" kx="0" ky="0" algn="bl" rotWithShape="0" blurRad="76200" dist="25400" dir="5400000">
+              <a:srgbClr val="000000">
+                <a:alpha val="12000"/>
+              </a:srgbClr>
+            </a:outerShdw>
+          </a:effectLst>
+        </p:spPr>
+      </p:sp>
+      <p:pic>
+        <p:nvPicPr>
+          <p:cNvPr id="3" name="Image 0" descr="preencoded.png">    </p:cNvPr>
+          <p:cNvPicPr>
+            <a:picLocks noChangeAspect="1"/>
+          </p:cNvPicPr>
+          <p:nvPr/>
+        </p:nvPicPr>
+        <p:blipFill>
+          <a:blip r:embed="rId1"/>
+          <a:stretch>
+            <a:fillRect/>
+          </a:stretch>
+        </p:blipFill>
+        <p:spPr>
+          <a:xfrm>
+            <a:off x="594360" y="521208"/>
+            <a:ext cx="256032" cy="256032"/>
+          </a:xfrm>
+          <a:prstGeom prst="rect">
+            <a:avLst/>
+          </a:prstGeom>
+        </p:spPr>
+      </p:pic>
+      <p:sp>
+        <p:nvSpPr>
+          <p:cNvPr id="4" name="Text 1"/>
+          <p:cNvSpPr/>
+          <p:nvPr/>
+        </p:nvSpPr>
+        <p:spPr>
+          <a:xfrm>
+            <a:off x="1143000" y="329184"/>
+            <a:ext cx="7498080" cy="603504"/>
+          </a:xfrm>
+          <a:prstGeom prst="rect">
+            <a:avLst/>
+          </a:prstGeom>
+          <a:noFill/>
+          <a:ln/>
+        </p:spPr>
+        <p:txBody>
+          <a:bodyPr wrap="square" lIns="0" tIns="0" rIns="0" bIns="0" rtlCol="0" anchor="ctr"/>
+          <a:lstStyle/>
+          <a:p>
+            <a:pPr indent="0" marL="0">
+              <a:buNone/>
+            </a:pPr>
+            <a:r>
+              <a:rPr lang="en-US" sz="2600" b="1" dirty="0">
+                <a:solidFill>
+                  <a:srgbClr val="1F2937"/>
+                </a:solidFill>
+                <a:latin typeface="Arial" pitchFamily="34" charset="0"/>
+                <a:ea typeface="Arial" pitchFamily="34" charset="-122"/>
+                <a:cs typeface="Arial" pitchFamily="34" charset="-120"/>
+              </a:rPr>
+              <a:t>One request, two gates</a:t>
+            </a:r>
+            <a:endParaRPr lang="en-US" sz="2600" dirty="0"/>
+          </a:p>
+        </p:txBody>
+      </p:sp>
+      <p:sp>
+        <p:nvSpPr>
+          <p:cNvPr id="5" name="Text 2"/>
+          <p:cNvSpPr/>
+          <p:nvPr/>
+        </p:nvSpPr>
+        <p:spPr>
+          <a:xfrm>
+            <a:off x="548640" y="1325880"/>
+            <a:ext cx="8046720" cy="1920240"/>
+          </a:xfrm>
+          <a:prstGeom prst="rect">
+            <a:avLst/>
+          </a:prstGeom>
+          <a:noFill/>
+          <a:ln/>
+        </p:spPr>
+        <p:txBody>
+          <a:bodyPr wrap="square" lIns="0" tIns="0" rIns="0" bIns="0" rtlCol="0" anchor="t">
+            <a:normAutofit/>
+          </a:bodyPr>
+          <a:lstStyle/>
+          <a:p>
+            <a:pPr indent="0" marL="0">
+              <a:buNone/>
+            </a:pPr>
+            <a:r>
+              <a:rPr lang="en-US" sz="1400" dirty="0">
+                <a:solidFill>
+                  <a:srgbClr val="1F2937"/>
+                </a:solidFill>
+                <a:latin typeface="Calibri" pitchFamily="34" charset="0"/>
+                <a:ea typeface="Calibri" pitchFamily="34" charset="-122"/>
+                <a:cs typeface="Calibri" pitchFamily="34" charset="-120"/>
+              </a:rPr>
+              <a:t>See diagram: One HTTP request must pass two gates. Gate 1, authentication: verify the token's signature and algorithm — broken by alg:none and a weak hardcoded secret, so a forged token passes. Gate 2, authorization: does the caller own THIS object — broken because the ownership check never runs. The key point: even a perfectly valid, genuine token clears Gate 1 but must not be enough to clear Gate 2 on its own — alice's own valid login token can still read bob's order if Gate 2 is missing. (web only)</a:t>
+            </a:r>
+            <a:endParaRPr lang="en-US" sz="1400" dirty="0"/>
+          </a:p>
+        </p:txBody>
+      </p:sp>
+      <p:sp>
+        <p:nvSpPr>
+          <p:cNvPr id="6" name="Text 3"/>
+          <p:cNvSpPr/>
+          <p:nvPr/>
+        </p:nvSpPr>
+        <p:spPr>
+          <a:xfrm>
+            <a:off x="457200" y="4800600"/>
+            <a:ext cx="6949440" cy="274320"/>
+          </a:xfrm>
+          <a:prstGeom prst="rect">
+            <a:avLst/>
+          </a:prstGeom>
+          <a:noFill/>
+          <a:ln/>
+        </p:spPr>
+        <p:txBody>
+          <a:bodyPr wrap="square" lIns="0" tIns="0" rIns="0" bIns="0" rtlCol="0" anchor="ctr"/>
+          <a:lstStyle/>
+          <a:p>
+            <a:pPr indent="0" marL="0">
+              <a:buNone/>
+            </a:pPr>
+            <a:r>
+              <a:rPr lang="en-US" sz="900" dirty="0">
+                <a:solidFill>
+                  <a:srgbClr val="64748B"/>
+                </a:solidFill>
+                <a:latin typeface="Calibri" pitchFamily="34" charset="0"/>
+                <a:ea typeface="Calibri" pitchFamily="34" charset="-122"/>
+                <a:cs typeface="Calibri" pitchFamily="34" charset="-120"/>
+              </a:rPr>
+              <a:t>Software Security · Week 6</a:t>
+            </a:r>
+            <a:endParaRPr lang="en-US" sz="900" dirty="0"/>
+          </a:p>
+        </p:txBody>
+      </p:sp>
+      <p:pic>
+        <p:nvPicPr>
+          <p:cNvPr id="7" name="Image 1" descr="/Users/pop7/Library/CloudStorage/OneDrive-MonsterConnectCo.,Ltd/Lecture/KOSEN69 - software-security/slides/pptx/assets/logo-small.png">    </p:cNvPr>
+          <p:cNvPicPr>
+            <a:picLocks noChangeAspect="1"/>
+          </p:cNvPicPr>
+          <p:nvPr/>
+        </p:nvPicPr>
+        <p:blipFill>
+          <a:blip r:embed="rId2"/>
+          <a:stretch>
+            <a:fillRect/>
+          </a:stretch>
+        </p:blipFill>
+        <p:spPr>
+          <a:xfrm>
+            <a:off x="7882128" y="4700016"/>
+            <a:ext cx="768096" cy="356616"/>
+          </a:xfrm>
+          <a:prstGeom prst="rect">
+            <a:avLst/>
+          </a:prstGeom>
+        </p:spPr>
+      </p:pic>
+    </p:spTree>
+  </p:cSld>
+  <p:clrMapOvr>
+    <a:masterClrMapping/>
+  </p:clrMapOvr>
+</p:sld>
+</file>
+
+<file path=ppt/slides/slide13.xml><?xml version="1.0" encoding="utf-8"?>
+<p:sld xmlns:a="http://schemas.openxmlformats.org/drawingml/2006/main" xmlns:r="http://schemas.openxmlformats.org/officeDocument/2006/relationships" xmlns:p="http://schemas.openxmlformats.org/presentationml/2006/main">
+  <p:cSld name="Slide 13">
+    <p:bg>
+      <p:bgPr>
+        <a:solidFill>
+          <a:srgbClr val="FFFFFF"/>
+        </a:solidFill>
+      </p:bgPr>
+    </p:bg>
+    <p:spTree>
+      <p:nvGrpSpPr>
+        <p:cNvPr id="1" name=""/>
+        <p:cNvGrpSpPr/>
+        <p:nvPr/>
+      </p:nvGrpSpPr>
+      <p:grpSpPr>
+        <a:xfrm>
+          <a:off x="0" y="0"/>
+          <a:ext cx="0" cy="0"/>
+          <a:chOff x="0" y="0"/>
+          <a:chExt cx="0" cy="0"/>
+        </a:xfrm>
+      </p:grpSpPr>
+      <p:sp>
+        <p:nvSpPr>
+          <p:cNvPr id="2" name="Shape 0"/>
+          <p:cNvSpPr/>
+          <p:nvPr/>
+        </p:nvSpPr>
+        <p:spPr>
+          <a:xfrm>
+            <a:off x="457200" y="384048"/>
+            <a:ext cx="530352" cy="530352"/>
+          </a:xfrm>
+          <a:prstGeom prst="ellipse">
+            <a:avLst/>
+          </a:prstGeom>
+          <a:solidFill>
+            <a:srgbClr val="E35205"/>
+          </a:solidFill>
+          <a:ln/>
+          <a:effectLst>
+            <a:outerShdw sx="100000" sy="100000" kx="0" ky="0" algn="bl" rotWithShape="0" blurRad="76200" dist="25400" dir="5400000">
+              <a:srgbClr val="000000">
+                <a:alpha val="12000"/>
+              </a:srgbClr>
+            </a:outerShdw>
+          </a:effectLst>
+        </p:spPr>
+      </p:sp>
+      <p:pic>
+        <p:nvPicPr>
+          <p:cNvPr id="3" name="Image 0" descr="preencoded.png">    </p:cNvPr>
+          <p:cNvPicPr>
+            <a:picLocks noChangeAspect="1"/>
+          </p:cNvPicPr>
+          <p:nvPr/>
+        </p:nvPicPr>
+        <p:blipFill>
+          <a:blip r:embed="rId1"/>
+          <a:stretch>
+            <a:fillRect/>
+          </a:stretch>
+        </p:blipFill>
+        <p:spPr>
+          <a:xfrm>
+            <a:off x="594360" y="521208"/>
+            <a:ext cx="256032" cy="256032"/>
+          </a:xfrm>
+          <a:prstGeom prst="rect">
+            <a:avLst/>
+          </a:prstGeom>
+        </p:spPr>
+      </p:pic>
+      <p:sp>
+        <p:nvSpPr>
+          <p:cNvPr id="4" name="Text 1"/>
+          <p:cNvSpPr/>
+          <p:nvPr/>
+        </p:nvSpPr>
+        <p:spPr>
+          <a:xfrm>
+            <a:off x="1143000" y="329184"/>
+            <a:ext cx="7498080" cy="603504"/>
+          </a:xfrm>
+          <a:prstGeom prst="rect">
+            <a:avLst/>
+          </a:prstGeom>
+          <a:noFill/>
+          <a:ln/>
+        </p:spPr>
+        <p:txBody>
+          <a:bodyPr wrap="square" lIns="0" tIns="0" rIns="0" bIns="0" rtlCol="0" anchor="ctr"/>
+          <a:lstStyle/>
+          <a:p>
+            <a:pPr indent="0" marL="0">
+              <a:buNone/>
+            </a:pPr>
+            <a:r>
+              <a:rPr lang="en-US" sz="2600" b="1" dirty="0">
+                <a:solidFill>
+                  <a:srgbClr val="1F2937"/>
+                </a:solidFill>
+                <a:latin typeface="Arial" pitchFamily="34" charset="0"/>
+                <a:ea typeface="Arial" pitchFamily="34" charset="-122"/>
+                <a:cs typeface="Arial" pitchFamily="34" charset="-120"/>
+              </a:rPr>
+              <a:t>Access control models</a:t>
+            </a:r>
+            <a:endParaRPr lang="en-US" sz="2600" dirty="0"/>
+          </a:p>
+        </p:txBody>
+      </p:sp>
+      <p:sp>
+        <p:nvSpPr>
+          <p:cNvPr id="5" name="Shape 2"/>
+          <p:cNvSpPr/>
+          <p:nvPr/>
+        </p:nvSpPr>
+        <p:spPr>
+          <a:xfrm>
+            <a:off x="457200" y="1325880"/>
+            <a:ext cx="8229600" cy="1517904"/>
+          </a:xfrm>
+          <a:prstGeom prst="roundRect">
+            <a:avLst>
+              <a:gd name="adj" fmla="val 4819"/>
+            </a:avLst>
+          </a:prstGeom>
+          <a:solidFill>
+            <a:srgbClr val="F1F5F9"/>
+          </a:solidFill>
+          <a:ln/>
+          <a:effectLst>
+            <a:outerShdw sx="100000" sy="100000" kx="0" ky="0" algn="bl" rotWithShape="0" blurRad="76200" dist="25400" dir="5400000">
+              <a:srgbClr val="000000">
+                <a:alpha val="12000"/>
+              </a:srgbClr>
+            </a:outerShdw>
+          </a:effectLst>
+        </p:spPr>
+      </p:sp>
+      <p:sp>
+        <p:nvSpPr>
+          <p:cNvPr id="6" name="Text 3"/>
+          <p:cNvSpPr/>
+          <p:nvPr/>
+        </p:nvSpPr>
+        <p:spPr>
+          <a:xfrm>
+            <a:off x="731520" y="1435608"/>
+            <a:ext cx="7680960" cy="1298448"/>
+          </a:xfrm>
+          <a:prstGeom prst="rect">
+            <a:avLst/>
+          </a:prstGeom>
+          <a:noFill/>
+          <a:ln/>
+        </p:spPr>
+        <p:txBody>
+          <a:bodyPr wrap="square" lIns="0" tIns="0" rIns="0" bIns="0" rtlCol="0" anchor="t">
+            <a:normAutofit/>
+          </a:bodyPr>
+          <a:lstStyle/>
+          <a:p>
+            <a:pPr marL="342900" indent="-342900">
+              <a:spcAft>
+                <a:spcPts val="600"/>
+              </a:spcAft>
+              <a:buSzPct val="100000"/>
+              <a:buChar char="•"/>
+            </a:pPr>
+            <a:r>
+              <a:rPr lang="en-US" sz="1400" dirty="0">
+                <a:solidFill>
+                  <a:srgbClr val="1F2937"/>
+                </a:solidFill>
+                <a:latin typeface="Calibri" pitchFamily="34" charset="0"/>
+                <a:ea typeface="Calibri" pitchFamily="34" charset="-122"/>
+                <a:cs typeface="Calibri" pitchFamily="34" charset="-120"/>
+              </a:rPr>
+              <a:t>MAC — Mandatory: system-enforced labels (military)</a:t>
+            </a:r>
+            <a:endParaRPr lang="en-US" sz="1400" dirty="0"/>
+          </a:p>
+          <a:p>
+            <a:pPr marL="342900" indent="-342900">
+              <a:spcAft>
+                <a:spcPts val="600"/>
+              </a:spcAft>
+              <a:buSzPct val="100000"/>
+              <a:buChar char="•"/>
+            </a:pPr>
+            <a:r>
+              <a:rPr lang="en-US" sz="1400" dirty="0">
+                <a:solidFill>
+                  <a:srgbClr val="1F2937"/>
+                </a:solidFill>
+                <a:latin typeface="Calibri" pitchFamily="34" charset="0"/>
+                <a:ea typeface="Calibri" pitchFamily="34" charset="-122"/>
+                <a:cs typeface="Calibri" pitchFamily="34" charset="-120"/>
+              </a:rPr>
+              <a:t>DAC — Discretionary: owner grants access (file perms)</a:t>
+            </a:r>
+            <a:endParaRPr lang="en-US" sz="1400" dirty="0"/>
+          </a:p>
+          <a:p>
+            <a:pPr marL="342900" indent="-342900">
+              <a:spcAft>
+                <a:spcPts val="600"/>
+              </a:spcAft>
+              <a:buSzPct val="100000"/>
+              <a:buChar char="•"/>
+            </a:pPr>
+            <a:r>
+              <a:rPr lang="en-US" sz="1400" dirty="0">
+                <a:solidFill>
+                  <a:srgbClr val="1F2937"/>
+                </a:solidFill>
+                <a:latin typeface="Calibri" pitchFamily="34" charset="0"/>
+                <a:ea typeface="Calibri" pitchFamily="34" charset="-122"/>
+                <a:cs typeface="Calibri" pitchFamily="34" charset="-120"/>
+              </a:rPr>
+              <a:t>RBAC — Role-Based: permissions via roles</a:t>
+            </a:r>
+            <a:endParaRPr lang="en-US" sz="1400" dirty="0"/>
+          </a:p>
+          <a:p>
+            <a:pPr marL="342900" indent="-342900">
+              <a:spcAft>
+                <a:spcPts val="600"/>
+              </a:spcAft>
+              <a:buSzPct val="100000"/>
+              <a:buChar char="•"/>
+            </a:pPr>
+            <a:r>
+              <a:rPr lang="en-US" sz="1400" dirty="0">
+                <a:solidFill>
+                  <a:srgbClr val="1F2937"/>
+                </a:solidFill>
+                <a:latin typeface="Calibri" pitchFamily="34" charset="0"/>
+                <a:ea typeface="Calibri" pitchFamily="34" charset="-122"/>
+                <a:cs typeface="Calibri" pitchFamily="34" charset="-120"/>
+              </a:rPr>
+              <a:t>RuBAC — Rule-Based: conditions (time of day, IP)</a:t>
+            </a:r>
+            <a:endParaRPr lang="en-US" sz="1400" dirty="0"/>
+          </a:p>
+        </p:txBody>
+      </p:sp>
+      <p:sp>
+        <p:nvSpPr>
+          <p:cNvPr id="7" name="Shape 4"/>
+          <p:cNvSpPr/>
+          <p:nvPr/>
+        </p:nvSpPr>
+        <p:spPr>
+          <a:xfrm>
+            <a:off x="457200" y="3008376"/>
+            <a:ext cx="8229600" cy="822960"/>
+          </a:xfrm>
+          <a:prstGeom prst="roundRect">
+            <a:avLst>
+              <a:gd name="adj" fmla="val 8889"/>
+            </a:avLst>
+          </a:prstGeom>
+          <a:solidFill>
+            <a:srgbClr val="E8EDF3"/>
+          </a:solidFill>
+          <a:ln/>
+        </p:spPr>
+      </p:sp>
+      <p:sp>
+        <p:nvSpPr>
+          <p:cNvPr id="8" name="Text 5"/>
+          <p:cNvSpPr/>
+          <p:nvPr/>
+        </p:nvSpPr>
+        <p:spPr>
+          <a:xfrm>
+            <a:off x="731520" y="3008376"/>
+            <a:ext cx="7680960" cy="822960"/>
+          </a:xfrm>
+          <a:prstGeom prst="rect">
+            <a:avLst/>
+          </a:prstGeom>
+          <a:noFill/>
+          <a:ln/>
+        </p:spPr>
+        <p:txBody>
+          <a:bodyPr wrap="square" lIns="0" tIns="0" rIns="0" bIns="0" rtlCol="0" anchor="ctr">
+            <a:normAutofit/>
+          </a:bodyPr>
+          <a:lstStyle/>
+          <a:p>
+            <a:pPr indent="0" marL="0">
+              <a:buNone/>
+            </a:pPr>
+            <a:r>
+              <a:rPr lang="en-US" sz="1400" i="1" dirty="0">
+                <a:solidFill>
+                  <a:srgbClr val="E35205"/>
+                </a:solidFill>
+                <a:latin typeface="Calibri" pitchFamily="34" charset="0"/>
+                <a:ea typeface="Calibri" pitchFamily="34" charset="-122"/>
+                <a:cs typeface="Calibri" pitchFamily="34" charset="-120"/>
+              </a:rPr>
+              <a:t>Best practices: separation of duties · least privilege · implicit deny</a:t>
+            </a:r>
+            <a:endParaRPr lang="en-US" sz="1400" dirty="0"/>
+          </a:p>
+        </p:txBody>
+      </p:sp>
+      <p:sp>
+        <p:nvSpPr>
+          <p:cNvPr id="9" name="Text 6"/>
+          <p:cNvSpPr/>
+          <p:nvPr/>
+        </p:nvSpPr>
+        <p:spPr>
+          <a:xfrm>
+            <a:off x="457200" y="4800600"/>
+            <a:ext cx="6949440" cy="274320"/>
+          </a:xfrm>
+          <a:prstGeom prst="rect">
+            <a:avLst/>
+          </a:prstGeom>
+          <a:noFill/>
+          <a:ln/>
+        </p:spPr>
+        <p:txBody>
+          <a:bodyPr wrap="square" lIns="0" tIns="0" rIns="0" bIns="0" rtlCol="0" anchor="ctr"/>
+          <a:lstStyle/>
+          <a:p>
+            <a:pPr indent="0" marL="0">
+              <a:buNone/>
+            </a:pPr>
+            <a:r>
+              <a:rPr lang="en-US" sz="900" dirty="0">
+                <a:solidFill>
+                  <a:srgbClr val="64748B"/>
+                </a:solidFill>
+                <a:latin typeface="Calibri" pitchFamily="34" charset="0"/>
+                <a:ea typeface="Calibri" pitchFamily="34" charset="-122"/>
+                <a:cs typeface="Calibri" pitchFamily="34" charset="-120"/>
+              </a:rPr>
+              <a:t>Software Security · Week 6</a:t>
+            </a:r>
+            <a:endParaRPr lang="en-US" sz="900" dirty="0"/>
+          </a:p>
+        </p:txBody>
+      </p:sp>
+      <p:pic>
+        <p:nvPicPr>
+          <p:cNvPr id="10" name="Image 1" descr="/Users/pop7/Library/CloudStorage/OneDrive-MonsterConnectCo.,Ltd/Lecture/KOSEN69 - software-security/slides/pptx/assets/logo-small.png">    </p:cNvPr>
+          <p:cNvPicPr>
+            <a:picLocks noChangeAspect="1"/>
+          </p:cNvPicPr>
+          <p:nvPr/>
+        </p:nvPicPr>
+        <p:blipFill>
+          <a:blip r:embed="rId2"/>
+          <a:stretch>
+            <a:fillRect/>
+          </a:stretch>
+        </p:blipFill>
+        <p:spPr>
+          <a:xfrm>
+            <a:off x="7882128" y="4700016"/>
+            <a:ext cx="768096" cy="356616"/>
+          </a:xfrm>
+          <a:prstGeom prst="rect">
+            <a:avLst/>
+          </a:prstGeom>
+        </p:spPr>
+      </p:pic>
+    </p:spTree>
+  </p:cSld>
+  <p:clrMapOvr>
+    <a:masterClrMapping/>
+  </p:clrMapOvr>
+</p:sld>
+</file>
+
+<file path=ppt/slides/slide14.xml><?xml version="1.0" encoding="utf-8"?>
+<p:sld xmlns:a="http://schemas.openxmlformats.org/drawingml/2006/main" xmlns:r="http://schemas.openxmlformats.org/officeDocument/2006/relationships" xmlns:p="http://schemas.openxmlformats.org/presentationml/2006/main">
+  <p:cSld name="Slide 14">
+    <p:bg>
+      <p:bgPr>
+        <a:solidFill>
+          <a:srgbClr val="FFFFFF"/>
+        </a:solidFill>
+      </p:bgPr>
+    </p:bg>
+    <p:spTree>
+      <p:nvGrpSpPr>
+        <p:cNvPr id="1" name=""/>
+        <p:cNvGrpSpPr/>
+        <p:nvPr/>
+      </p:nvGrpSpPr>
+      <p:grpSpPr>
+        <a:xfrm>
+          <a:off x="0" y="0"/>
+          <a:ext cx="0" cy="0"/>
+          <a:chOff x="0" y="0"/>
+          <a:chExt cx="0" cy="0"/>
+        </a:xfrm>
+      </p:grpSpPr>
+      <p:sp>
+        <p:nvSpPr>
+          <p:cNvPr id="2" name="Shape 0"/>
+          <p:cNvSpPr/>
+          <p:nvPr/>
+        </p:nvSpPr>
+        <p:spPr>
+          <a:xfrm>
+            <a:off x="457200" y="384048"/>
+            <a:ext cx="530352" cy="530352"/>
+          </a:xfrm>
+          <a:prstGeom prst="ellipse">
+            <a:avLst/>
+          </a:prstGeom>
+          <a:solidFill>
+            <a:srgbClr val="E35205"/>
+          </a:solidFill>
+          <a:ln/>
+          <a:effectLst>
+            <a:outerShdw sx="100000" sy="100000" kx="0" ky="0" algn="bl" rotWithShape="0" blurRad="76200" dist="25400" dir="5400000">
+              <a:srgbClr val="000000">
+                <a:alpha val="12000"/>
+              </a:srgbClr>
+            </a:outerShdw>
+          </a:effectLst>
+        </p:spPr>
+      </p:sp>
+      <p:pic>
+        <p:nvPicPr>
+          <p:cNvPr id="3" name="Image 0" descr="preencoded.png">    </p:cNvPr>
+          <p:cNvPicPr>
+            <a:picLocks noChangeAspect="1"/>
+          </p:cNvPicPr>
+          <p:nvPr/>
+        </p:nvPicPr>
+        <p:blipFill>
+          <a:blip r:embed="rId1"/>
+          <a:stretch>
+            <a:fillRect/>
+          </a:stretch>
+        </p:blipFill>
+        <p:spPr>
+          <a:xfrm>
+            <a:off x="594360" y="521208"/>
+            <a:ext cx="256032" cy="256032"/>
+          </a:xfrm>
+          <a:prstGeom prst="rect">
+            <a:avLst/>
+          </a:prstGeom>
+        </p:spPr>
+      </p:pic>
+      <p:sp>
+        <p:nvSpPr>
+          <p:cNvPr id="4" name="Text 1"/>
+          <p:cNvSpPr/>
+          <p:nvPr/>
+        </p:nvSpPr>
+        <p:spPr>
+          <a:xfrm>
+            <a:off x="1143000" y="329184"/>
+            <a:ext cx="7498080" cy="603504"/>
+          </a:xfrm>
+          <a:prstGeom prst="rect">
+            <a:avLst/>
+          </a:prstGeom>
+          <a:noFill/>
+          <a:ln/>
+        </p:spPr>
+        <p:txBody>
+          <a:bodyPr wrap="square" lIns="0" tIns="0" rIns="0" bIns="0" rtlCol="0" anchor="ctr"/>
+          <a:lstStyle/>
+          <a:p>
+            <a:pPr indent="0" marL="0">
+              <a:buNone/>
+            </a:pPr>
+            <a:r>
+              <a:rPr lang="en-US" sz="2600" b="1" dirty="0">
+                <a:solidFill>
+                  <a:srgbClr val="1F2937"/>
+                </a:solidFill>
+                <a:latin typeface="Arial" pitchFamily="34" charset="0"/>
+                <a:ea typeface="Arial" pitchFamily="34" charset="-122"/>
+                <a:cs typeface="Arial" pitchFamily="34" charset="-120"/>
+              </a:rPr>
               <a:t>Exercise — RBAC</a:t>
             </a:r>
             <a:endParaRPr lang="en-US" sz="2600" dirty="0"/>
@@ -3308,7 +4626,7 @@
       </p:sp>
       <p:graphicFrame>
         <p:nvGraphicFramePr>
-          <p:cNvPr id="12" name="Table 0"/>
+          <p:cNvPr id="15" name="Table 0"/>
           <p:cNvGraphicFramePr>
             <a:graphicFrameLocks noGrp="1"/>
           </p:cNvGraphicFramePr>
@@ -4127,1094 +5445,6 @@
 </p:sld>
 </file>
 
-<file path=ppt/slides/slide12.xml><?xml version="1.0" encoding="utf-8"?>
-<p:sld xmlns:a="http://schemas.openxmlformats.org/drawingml/2006/main" xmlns:r="http://schemas.openxmlformats.org/officeDocument/2006/relationships" xmlns:p="http://schemas.openxmlformats.org/presentationml/2006/main">
-  <p:cSld name="Slide 12">
-    <p:bg>
-      <p:bgPr>
-        <a:solidFill>
-          <a:srgbClr val="FFFFFF"/>
-        </a:solidFill>
-      </p:bgPr>
-    </p:bg>
-    <p:spTree>
-      <p:nvGrpSpPr>
-        <p:cNvPr id="1" name=""/>
-        <p:cNvGrpSpPr/>
-        <p:nvPr/>
-      </p:nvGrpSpPr>
-      <p:grpSpPr>
-        <a:xfrm>
-          <a:off x="0" y="0"/>
-          <a:ext cx="0" cy="0"/>
-          <a:chOff x="0" y="0"/>
-          <a:chExt cx="0" cy="0"/>
-        </a:xfrm>
-      </p:grpSpPr>
-      <p:sp>
-        <p:nvSpPr>
-          <p:cNvPr id="2" name="Shape 0"/>
-          <p:cNvSpPr/>
-          <p:nvPr/>
-        </p:nvSpPr>
-        <p:spPr>
-          <a:xfrm>
-            <a:off x="457200" y="384048"/>
-            <a:ext cx="530352" cy="530352"/>
-          </a:xfrm>
-          <a:prstGeom prst="ellipse">
-            <a:avLst/>
-          </a:prstGeom>
-          <a:solidFill>
-            <a:srgbClr val="E35205"/>
-          </a:solidFill>
-          <a:ln/>
-          <a:effectLst>
-            <a:outerShdw sx="100000" sy="100000" kx="0" ky="0" algn="bl" rotWithShape="0" blurRad="76200" dist="25400" dir="5400000">
-              <a:srgbClr val="000000">
-                <a:alpha val="12000"/>
-              </a:srgbClr>
-            </a:outerShdw>
-          </a:effectLst>
-        </p:spPr>
-      </p:sp>
-      <p:pic>
-        <p:nvPicPr>
-          <p:cNvPr id="3" name="Image 0" descr="preencoded.png">    </p:cNvPr>
-          <p:cNvPicPr>
-            <a:picLocks noChangeAspect="1"/>
-          </p:cNvPicPr>
-          <p:nvPr/>
-        </p:nvPicPr>
-        <p:blipFill>
-          <a:blip r:embed="rId1"/>
-          <a:stretch>
-            <a:fillRect/>
-          </a:stretch>
-        </p:blipFill>
-        <p:spPr>
-          <a:xfrm>
-            <a:off x="594360" y="521208"/>
-            <a:ext cx="256032" cy="256032"/>
-          </a:xfrm>
-          <a:prstGeom prst="rect">
-            <a:avLst/>
-          </a:prstGeom>
-        </p:spPr>
-      </p:pic>
-      <p:sp>
-        <p:nvSpPr>
-          <p:cNvPr id="4" name="Text 1"/>
-          <p:cNvSpPr/>
-          <p:nvPr/>
-        </p:nvSpPr>
-        <p:spPr>
-          <a:xfrm>
-            <a:off x="1143000" y="329184"/>
-            <a:ext cx="7498080" cy="603504"/>
-          </a:xfrm>
-          <a:prstGeom prst="rect">
-            <a:avLst/>
-          </a:prstGeom>
-          <a:noFill/>
-          <a:ln/>
-        </p:spPr>
-        <p:txBody>
-          <a:bodyPr wrap="square" lIns="0" tIns="0" rIns="0" bIns="0" rtlCol="0" anchor="ctr"/>
-          <a:lstStyle/>
-          <a:p>
-            <a:pPr indent="0" marL="0">
-              <a:buNone/>
-            </a:pPr>
-            <a:r>
-              <a:rPr lang="en-US" sz="2600" b="1" dirty="0">
-                <a:solidFill>
-                  <a:srgbClr val="1F2937"/>
-                </a:solidFill>
-                <a:latin typeface="Arial" pitchFamily="34" charset="0"/>
-                <a:ea typeface="Arial" pitchFamily="34" charset="-122"/>
-                <a:cs typeface="Arial" pitchFamily="34" charset="-120"/>
-              </a:rPr>
-              <a:t>Exercise — RBAC (cont.)</a:t>
-            </a:r>
-            <a:endParaRPr lang="en-US" sz="2600" dirty="0"/>
-          </a:p>
-        </p:txBody>
-      </p:sp>
-      <p:sp>
-        <p:nvSpPr>
-          <p:cNvPr id="5" name="Shape 2"/>
-          <p:cNvSpPr/>
-          <p:nvPr/>
-        </p:nvSpPr>
-        <p:spPr>
-          <a:xfrm>
-            <a:off x="502920" y="1325880"/>
-            <a:ext cx="384048" cy="384048"/>
-          </a:xfrm>
-          <a:prstGeom prst="ellipse">
-            <a:avLst/>
-          </a:prstGeom>
-          <a:solidFill>
-            <a:srgbClr val="E35205"/>
-          </a:solidFill>
-          <a:ln/>
-        </p:spPr>
-      </p:sp>
-      <p:sp>
-        <p:nvSpPr>
-          <p:cNvPr id="6" name="Text 3"/>
-          <p:cNvSpPr/>
-          <p:nvPr/>
-        </p:nvSpPr>
-        <p:spPr>
-          <a:xfrm>
-            <a:off x="502920" y="1325880"/>
-            <a:ext cx="384048" cy="384048"/>
-          </a:xfrm>
-          <a:prstGeom prst="rect">
-            <a:avLst/>
-          </a:prstGeom>
-          <a:noFill/>
-          <a:ln/>
-        </p:spPr>
-        <p:txBody>
-          <a:bodyPr wrap="square" lIns="0" tIns="0" rIns="0" bIns="0" rtlCol="0" anchor="ctr"/>
-          <a:lstStyle/>
-          <a:p>
-            <a:pPr algn="ctr" indent="0" marL="0">
-              <a:buNone/>
-            </a:pPr>
-            <a:r>
-              <a:rPr lang="en-US" sz="1500" b="1" dirty="0">
-                <a:solidFill>
-                  <a:srgbClr val="0E1726"/>
-                </a:solidFill>
-                <a:latin typeface="Arial" pitchFamily="34" charset="0"/>
-                <a:ea typeface="Arial" pitchFamily="34" charset="-122"/>
-                <a:cs typeface="Arial" pitchFamily="34" charset="-120"/>
-              </a:rPr>
-              <a:t>2</a:t>
-            </a:r>
-            <a:endParaRPr lang="en-US" sz="1500" dirty="0"/>
-          </a:p>
-        </p:txBody>
-      </p:sp>
-      <p:sp>
-        <p:nvSpPr>
-          <p:cNvPr id="7" name="Text 4"/>
-          <p:cNvSpPr/>
-          <p:nvPr/>
-        </p:nvSpPr>
-        <p:spPr>
-          <a:xfrm>
-            <a:off x="1051560" y="1325880"/>
-            <a:ext cx="7589520" cy="402336"/>
-          </a:xfrm>
-          <a:prstGeom prst="rect">
-            <a:avLst/>
-          </a:prstGeom>
-          <a:noFill/>
-          <a:ln/>
-        </p:spPr>
-        <p:txBody>
-          <a:bodyPr wrap="square" lIns="0" tIns="0" rIns="0" bIns="0" rtlCol="0" anchor="ctr">
-            <a:normAutofit/>
-          </a:bodyPr>
-          <a:lstStyle/>
-          <a:p>
-            <a:pPr indent="0" marL="0">
-              <a:buNone/>
-            </a:pPr>
-            <a:r>
-              <a:rPr lang="en-US" sz="1350" dirty="0">
-                <a:solidFill>
-                  <a:srgbClr val="1F2937"/>
-                </a:solidFill>
-                <a:latin typeface="Calibri" pitchFamily="34" charset="0"/>
-                <a:ea typeface="Calibri" pitchFamily="34" charset="-122"/>
-                <a:cs typeface="Calibri" pitchFamily="34" charset="-120"/>
-              </a:rPr>
-              <a:t>An intern must create bug entries — which role's perms to add?</a:t>
-            </a:r>
-            <a:endParaRPr lang="en-US" sz="1350" dirty="0"/>
-          </a:p>
-        </p:txBody>
-      </p:sp>
-      <p:sp>
-        <p:nvSpPr>
-          <p:cNvPr id="8" name="Shape 5"/>
-          <p:cNvSpPr/>
-          <p:nvPr/>
-        </p:nvSpPr>
-        <p:spPr>
-          <a:xfrm>
-            <a:off x="502920" y="1801368"/>
-            <a:ext cx="384048" cy="384048"/>
-          </a:xfrm>
-          <a:prstGeom prst="ellipse">
-            <a:avLst/>
-          </a:prstGeom>
-          <a:solidFill>
-            <a:srgbClr val="E35205"/>
-          </a:solidFill>
-          <a:ln/>
-        </p:spPr>
-      </p:sp>
-      <p:sp>
-        <p:nvSpPr>
-          <p:cNvPr id="9" name="Text 6"/>
-          <p:cNvSpPr/>
-          <p:nvPr/>
-        </p:nvSpPr>
-        <p:spPr>
-          <a:xfrm>
-            <a:off x="502920" y="1801368"/>
-            <a:ext cx="384048" cy="384048"/>
-          </a:xfrm>
-          <a:prstGeom prst="rect">
-            <a:avLst/>
-          </a:prstGeom>
-          <a:noFill/>
-          <a:ln/>
-        </p:spPr>
-        <p:txBody>
-          <a:bodyPr wrap="square" lIns="0" tIns="0" rIns="0" bIns="0" rtlCol="0" anchor="ctr"/>
-          <a:lstStyle/>
-          <a:p>
-            <a:pPr algn="ctr" indent="0" marL="0">
-              <a:buNone/>
-            </a:pPr>
-            <a:r>
-              <a:rPr lang="en-US" sz="1500" b="1" dirty="0">
-                <a:solidFill>
-                  <a:srgbClr val="0E1726"/>
-                </a:solidFill>
-                <a:latin typeface="Arial" pitchFamily="34" charset="0"/>
-                <a:ea typeface="Arial" pitchFamily="34" charset="-122"/>
-                <a:cs typeface="Arial" pitchFamily="34" charset="-120"/>
-              </a:rPr>
-              <a:t>3</a:t>
-            </a:r>
-            <a:endParaRPr lang="en-US" sz="1500" dirty="0"/>
-          </a:p>
-        </p:txBody>
-      </p:sp>
-      <p:sp>
-        <p:nvSpPr>
-          <p:cNvPr id="10" name="Text 7"/>
-          <p:cNvSpPr/>
-          <p:nvPr/>
-        </p:nvSpPr>
-        <p:spPr>
-          <a:xfrm>
-            <a:off x="1051560" y="1801368"/>
-            <a:ext cx="7589520" cy="402336"/>
-          </a:xfrm>
-          <a:prstGeom prst="rect">
-            <a:avLst/>
-          </a:prstGeom>
-          <a:noFill/>
-          <a:ln/>
-        </p:spPr>
-        <p:txBody>
-          <a:bodyPr wrap="square" lIns="0" tIns="0" rIns="0" bIns="0" rtlCol="0" anchor="ctr">
-            <a:normAutofit/>
-          </a:bodyPr>
-          <a:lstStyle/>
-          <a:p>
-            <a:pPr indent="0" marL="0">
-              <a:buNone/>
-            </a:pPr>
-            <a:r>
-              <a:rPr lang="en-US" sz="1350" dirty="0">
-                <a:solidFill>
-                  <a:srgbClr val="1F2937"/>
-                </a:solidFill>
-                <a:latin typeface="Calibri" pitchFamily="34" charset="0"/>
-                <a:ea typeface="Calibri" pitchFamily="34" charset="-122"/>
-                <a:cs typeface="Calibri" pitchFamily="34" charset="-120"/>
-              </a:rPr>
-              <a:t>List all roles that can modify the codebase.</a:t>
-            </a:r>
-            <a:endParaRPr lang="en-US" sz="1350" dirty="0"/>
-          </a:p>
-        </p:txBody>
-      </p:sp>
-      <p:sp>
-        <p:nvSpPr>
-          <p:cNvPr id="11" name="Text 8"/>
-          <p:cNvSpPr/>
-          <p:nvPr/>
-        </p:nvSpPr>
-        <p:spPr>
-          <a:xfrm>
-            <a:off x="457200" y="4800600"/>
-            <a:ext cx="6949440" cy="274320"/>
-          </a:xfrm>
-          <a:prstGeom prst="rect">
-            <a:avLst/>
-          </a:prstGeom>
-          <a:noFill/>
-          <a:ln/>
-        </p:spPr>
-        <p:txBody>
-          <a:bodyPr wrap="square" lIns="0" tIns="0" rIns="0" bIns="0" rtlCol="0" anchor="ctr"/>
-          <a:lstStyle/>
-          <a:p>
-            <a:pPr indent="0" marL="0">
-              <a:buNone/>
-            </a:pPr>
-            <a:r>
-              <a:rPr lang="en-US" sz="900" dirty="0">
-                <a:solidFill>
-                  <a:srgbClr val="64748B"/>
-                </a:solidFill>
-                <a:latin typeface="Calibri" pitchFamily="34" charset="0"/>
-                <a:ea typeface="Calibri" pitchFamily="34" charset="-122"/>
-                <a:cs typeface="Calibri" pitchFamily="34" charset="-120"/>
-              </a:rPr>
-              <a:t>Software Security · Week 6</a:t>
-            </a:r>
-            <a:endParaRPr lang="en-US" sz="900" dirty="0"/>
-          </a:p>
-        </p:txBody>
-      </p:sp>
-      <p:pic>
-        <p:nvPicPr>
-          <p:cNvPr id="12" name="Image 1" descr="/Users/pop7/Library/CloudStorage/OneDrive-MonsterConnectCo.,Ltd/Lecture/KOSEN69 - software-security/slides/pptx/assets/logo-small.png">    </p:cNvPr>
-          <p:cNvPicPr>
-            <a:picLocks noChangeAspect="1"/>
-          </p:cNvPicPr>
-          <p:nvPr/>
-        </p:nvPicPr>
-        <p:blipFill>
-          <a:blip r:embed="rId2"/>
-          <a:stretch>
-            <a:fillRect/>
-          </a:stretch>
-        </p:blipFill>
-        <p:spPr>
-          <a:xfrm>
-            <a:off x="7882128" y="4700016"/>
-            <a:ext cx="768096" cy="356616"/>
-          </a:xfrm>
-          <a:prstGeom prst="rect">
-            <a:avLst/>
-          </a:prstGeom>
-        </p:spPr>
-      </p:pic>
-    </p:spTree>
-  </p:cSld>
-  <p:clrMapOvr>
-    <a:masterClrMapping/>
-  </p:clrMapOvr>
-</p:sld>
-</file>
-
-<file path=ppt/slides/slide13.xml><?xml version="1.0" encoding="utf-8"?>
-<p:sld xmlns:a="http://schemas.openxmlformats.org/drawingml/2006/main" xmlns:r="http://schemas.openxmlformats.org/officeDocument/2006/relationships" xmlns:p="http://schemas.openxmlformats.org/presentationml/2006/main">
-  <p:cSld name="Slide 13">
-    <p:bg>
-      <p:bgPr>
-        <a:solidFill>
-          <a:srgbClr val="FFFFFF"/>
-        </a:solidFill>
-      </p:bgPr>
-    </p:bg>
-    <p:spTree>
-      <p:nvGrpSpPr>
-        <p:cNvPr id="1" name=""/>
-        <p:cNvGrpSpPr/>
-        <p:nvPr/>
-      </p:nvGrpSpPr>
-      <p:grpSpPr>
-        <a:xfrm>
-          <a:off x="0" y="0"/>
-          <a:ext cx="0" cy="0"/>
-          <a:chOff x="0" y="0"/>
-          <a:chExt cx="0" cy="0"/>
-        </a:xfrm>
-      </p:grpSpPr>
-      <p:sp>
-        <p:nvSpPr>
-          <p:cNvPr id="2" name="Shape 0"/>
-          <p:cNvSpPr/>
-          <p:nvPr/>
-        </p:nvSpPr>
-        <p:spPr>
-          <a:xfrm>
-            <a:off x="457200" y="384048"/>
-            <a:ext cx="530352" cy="530352"/>
-          </a:xfrm>
-          <a:prstGeom prst="ellipse">
-            <a:avLst/>
-          </a:prstGeom>
-          <a:solidFill>
-            <a:srgbClr val="E35205"/>
-          </a:solidFill>
-          <a:ln/>
-          <a:effectLst>
-            <a:outerShdw sx="100000" sy="100000" kx="0" ky="0" algn="bl" rotWithShape="0" blurRad="76200" dist="25400" dir="5400000">
-              <a:srgbClr val="000000">
-                <a:alpha val="12000"/>
-              </a:srgbClr>
-            </a:outerShdw>
-          </a:effectLst>
-        </p:spPr>
-      </p:sp>
-      <p:pic>
-        <p:nvPicPr>
-          <p:cNvPr id="3" name="Image 0" descr="preencoded.png">    </p:cNvPr>
-          <p:cNvPicPr>
-            <a:picLocks noChangeAspect="1"/>
-          </p:cNvPicPr>
-          <p:nvPr/>
-        </p:nvPicPr>
-        <p:blipFill>
-          <a:blip r:embed="rId1"/>
-          <a:stretch>
-            <a:fillRect/>
-          </a:stretch>
-        </p:blipFill>
-        <p:spPr>
-          <a:xfrm>
-            <a:off x="594360" y="521208"/>
-            <a:ext cx="256032" cy="256032"/>
-          </a:xfrm>
-          <a:prstGeom prst="rect">
-            <a:avLst/>
-          </a:prstGeom>
-        </p:spPr>
-      </p:pic>
-      <p:sp>
-        <p:nvSpPr>
-          <p:cNvPr id="4" name="Text 1"/>
-          <p:cNvSpPr/>
-          <p:nvPr/>
-        </p:nvSpPr>
-        <p:spPr>
-          <a:xfrm>
-            <a:off x="1143000" y="329184"/>
-            <a:ext cx="7498080" cy="603504"/>
-          </a:xfrm>
-          <a:prstGeom prst="rect">
-            <a:avLst/>
-          </a:prstGeom>
-          <a:noFill/>
-          <a:ln/>
-        </p:spPr>
-        <p:txBody>
-          <a:bodyPr wrap="square" lIns="0" tIns="0" rIns="0" bIns="0" rtlCol="0" anchor="ctr"/>
-          <a:lstStyle/>
-          <a:p>
-            <a:pPr indent="0" marL="0">
-              <a:buNone/>
-            </a:pPr>
-            <a:r>
-              <a:rPr lang="en-US" sz="2600" b="1" dirty="0">
-                <a:solidFill>
-                  <a:srgbClr val="1F2937"/>
-                </a:solidFill>
-                <a:latin typeface="Arial" pitchFamily="34" charset="0"/>
-                <a:ea typeface="Arial" pitchFamily="34" charset="-122"/>
-                <a:cs typeface="Arial" pitchFamily="34" charset="-120"/>
-              </a:rPr>
-              <a:t>Reading the attack in the logs</a:t>
-            </a:r>
-            <a:endParaRPr lang="en-US" sz="2600" dirty="0"/>
-          </a:p>
-        </p:txBody>
-      </p:sp>
-      <p:sp>
-        <p:nvSpPr>
-          <p:cNvPr id="5" name="Text 2"/>
-          <p:cNvSpPr/>
-          <p:nvPr/>
-        </p:nvSpPr>
-        <p:spPr>
-          <a:xfrm>
-            <a:off x="548640" y="1325880"/>
-            <a:ext cx="8046720" cy="548640"/>
-          </a:xfrm>
-          <a:prstGeom prst="rect">
-            <a:avLst/>
-          </a:prstGeom>
-          <a:noFill/>
-          <a:ln/>
-        </p:spPr>
-        <p:txBody>
-          <a:bodyPr wrap="square" lIns="0" tIns="0" rIns="0" bIns="0" rtlCol="0" anchor="t">
-            <a:normAutofit/>
-          </a:bodyPr>
-          <a:lstStyle/>
-          <a:p>
-            <a:pPr indent="0" marL="0">
-              <a:buNone/>
-            </a:pPr>
-            <a:r>
-              <a:rPr lang="en-US" sz="1400" dirty="0">
-                <a:solidFill>
-                  <a:srgbClr val="1F2937"/>
-                </a:solidFill>
-                <a:latin typeface="Calibri" pitchFamily="34" charset="0"/>
-                <a:ea typeface="Calibri" pitchFamily="34" charset="-122"/>
-                <a:cs typeface="Calibri" pitchFamily="34" charset="-120"/>
-              </a:rPr>
-              <a:t>Reconstruct the kill chain from Apache logs:</a:t>
-            </a:r>
-            <a:endParaRPr lang="en-US" sz="1400" dirty="0"/>
-          </a:p>
-        </p:txBody>
-      </p:sp>
-      <p:sp>
-        <p:nvSpPr>
-          <p:cNvPr id="6" name="Shape 3"/>
-          <p:cNvSpPr/>
-          <p:nvPr/>
-        </p:nvSpPr>
-        <p:spPr>
-          <a:xfrm>
-            <a:off x="457200" y="1965960"/>
-            <a:ext cx="8229600" cy="932688"/>
-          </a:xfrm>
-          <a:prstGeom prst="roundRect">
-            <a:avLst>
-              <a:gd name="adj" fmla="val 5882"/>
-            </a:avLst>
-          </a:prstGeom>
-          <a:solidFill>
-            <a:srgbClr val="0A1020"/>
-          </a:solidFill>
-          <a:ln w="12700">
-            <a:solidFill>
-              <a:srgbClr val="E8EDF3"/>
-            </a:solidFill>
-            <a:prstDash val="solid"/>
-          </a:ln>
-        </p:spPr>
-      </p:sp>
-      <p:sp>
-        <p:nvSpPr>
-          <p:cNvPr id="7" name="Text 4"/>
-          <p:cNvSpPr/>
-          <p:nvPr/>
-        </p:nvSpPr>
-        <p:spPr>
-          <a:xfrm>
-            <a:off x="640080" y="2039112"/>
-            <a:ext cx="7863840" cy="786384"/>
-          </a:xfrm>
-          <a:prstGeom prst="rect">
-            <a:avLst/>
-          </a:prstGeom>
-          <a:noFill/>
-          <a:ln/>
-        </p:spPr>
-        <p:txBody>
-          <a:bodyPr wrap="square" lIns="0" tIns="0" rIns="0" bIns="0" rtlCol="0" anchor="t">
-            <a:normAutofit/>
-          </a:bodyPr>
-          <a:lstStyle/>
-          <a:p>
-            <a:pPr indent="0" marL="0">
-              <a:buNone/>
-            </a:pPr>
-            <a:r>
-              <a:rPr lang="en-US" sz="1150" dirty="0">
-                <a:solidFill>
-                  <a:srgbClr val="9FE7D6"/>
-                </a:solidFill>
-                <a:latin typeface="Courier New" pitchFamily="34" charset="0"/>
-                <a:ea typeface="Courier New" pitchFamily="34" charset="-122"/>
-                <a:cs typeface="Courier New" pitchFamily="34" charset="-120"/>
-              </a:rPr>
-              <a:t>GET /login.php?username=' or 1=1 limit 1; -- a&amp;...   302   ← SQLi admin</a:t>
-            </a:r>
-            <a:endParaRPr lang="en-US" sz="1150" dirty="0"/>
-          </a:p>
-          <a:p>
-            <a:pPr indent="0" marL="0">
-              <a:buNone/>
-            </a:pPr>
-            <a:r>
-              <a:rPr lang="en-US" sz="1150" dirty="0">
-                <a:solidFill>
-                  <a:srgbClr val="9FE7D6"/>
-                </a:solidFill>
-                <a:latin typeface="Courier New" pitchFamily="34" charset="0"/>
-                <a:ea typeface="Courier New" pitchFamily="34" charset="-122"/>
-                <a:cs typeface="Courier New" pitchFamily="34" charset="-120"/>
-              </a:rPr>
-              <a:t>POST /upload.php                                     200   ← backdoor</a:t>
-            </a:r>
-            <a:endParaRPr lang="en-US" sz="1150" dirty="0"/>
-          </a:p>
-          <a:p>
-            <a:pPr indent="0" marL="0">
-              <a:buNone/>
-            </a:pPr>
-            <a:r>
-              <a:rPr lang="en-US" sz="1150" dirty="0">
-                <a:solidFill>
-                  <a:srgbClr val="9FE7D6"/>
-                </a:solidFill>
-                <a:latin typeface="Courier New" pitchFamily="34" charset="0"/>
-                <a:ea typeface="Courier New" pitchFamily="34" charset="-122"/>
-                <a:cs typeface="Courier New" pitchFamily="34" charset="-120"/>
-              </a:rPr>
-              <a:t>GET /uploads/backdoor.php?cmd=ls%20-l                200   ← RCE</a:t>
-            </a:r>
-            <a:endParaRPr lang="en-US" sz="1150" dirty="0"/>
-          </a:p>
-        </p:txBody>
-      </p:sp>
-      <p:sp>
-        <p:nvSpPr>
-          <p:cNvPr id="8" name="Shape 5"/>
-          <p:cNvSpPr/>
-          <p:nvPr/>
-        </p:nvSpPr>
-        <p:spPr>
-          <a:xfrm>
-            <a:off x="457200" y="3063240"/>
-            <a:ext cx="8229600" cy="585216"/>
-          </a:xfrm>
-          <a:prstGeom prst="roundRect">
-            <a:avLst>
-              <a:gd name="adj" fmla="val 12500"/>
-            </a:avLst>
-          </a:prstGeom>
-          <a:solidFill>
-            <a:srgbClr val="F1F5F9"/>
-          </a:solidFill>
-          <a:ln/>
-          <a:effectLst>
-            <a:outerShdw sx="100000" sy="100000" kx="0" ky="0" algn="bl" rotWithShape="0" blurRad="76200" dist="25400" dir="5400000">
-              <a:srgbClr val="000000">
-                <a:alpha val="12000"/>
-              </a:srgbClr>
-            </a:outerShdw>
-          </a:effectLst>
-        </p:spPr>
-      </p:sp>
-      <p:sp>
-        <p:nvSpPr>
-          <p:cNvPr id="9" name="Text 6"/>
-          <p:cNvSpPr/>
-          <p:nvPr/>
-        </p:nvSpPr>
-        <p:spPr>
-          <a:xfrm>
-            <a:off x="731520" y="3172968"/>
-            <a:ext cx="7680960" cy="365760"/>
-          </a:xfrm>
-          <a:prstGeom prst="rect">
-            <a:avLst/>
-          </a:prstGeom>
-          <a:noFill/>
-          <a:ln/>
-        </p:spPr>
-        <p:txBody>
-          <a:bodyPr wrap="square" lIns="0" tIns="0" rIns="0" bIns="0" rtlCol="0" anchor="t">
-            <a:normAutofit/>
-          </a:bodyPr>
-          <a:lstStyle/>
-          <a:p>
-            <a:pPr marL="342900" indent="-342900">
-              <a:spcAft>
-                <a:spcPts val="600"/>
-              </a:spcAft>
-              <a:buSzPct val="100000"/>
-              <a:buChar char="•"/>
-            </a:pPr>
-            <a:r>
-              <a:rPr lang="en-US" sz="1400" dirty="0">
-                <a:solidFill>
-                  <a:srgbClr val="1F2937"/>
-                </a:solidFill>
-                <a:latin typeface="Calibri" pitchFamily="34" charset="0"/>
-                <a:ea typeface="Calibri" pitchFamily="34" charset="-122"/>
-                <a:cs typeface="Calibri" pitchFamily="34" charset="-120"/>
-              </a:rPr>
-              <a:t>%20 = space (URL-decode!) · logs let you trace what happened</a:t>
-            </a:r>
-            <a:endParaRPr lang="en-US" sz="1400" dirty="0"/>
-          </a:p>
-        </p:txBody>
-      </p:sp>
-      <p:sp>
-        <p:nvSpPr>
-          <p:cNvPr id="10" name="Text 7"/>
-          <p:cNvSpPr/>
-          <p:nvPr/>
-        </p:nvSpPr>
-        <p:spPr>
-          <a:xfrm>
-            <a:off x="457200" y="4800600"/>
-            <a:ext cx="6949440" cy="274320"/>
-          </a:xfrm>
-          <a:prstGeom prst="rect">
-            <a:avLst/>
-          </a:prstGeom>
-          <a:noFill/>
-          <a:ln/>
-        </p:spPr>
-        <p:txBody>
-          <a:bodyPr wrap="square" lIns="0" tIns="0" rIns="0" bIns="0" rtlCol="0" anchor="ctr"/>
-          <a:lstStyle/>
-          <a:p>
-            <a:pPr indent="0" marL="0">
-              <a:buNone/>
-            </a:pPr>
-            <a:r>
-              <a:rPr lang="en-US" sz="900" dirty="0">
-                <a:solidFill>
-                  <a:srgbClr val="64748B"/>
-                </a:solidFill>
-                <a:latin typeface="Calibri" pitchFamily="34" charset="0"/>
-                <a:ea typeface="Calibri" pitchFamily="34" charset="-122"/>
-                <a:cs typeface="Calibri" pitchFamily="34" charset="-120"/>
-              </a:rPr>
-              <a:t>Software Security · Week 6</a:t>
-            </a:r>
-            <a:endParaRPr lang="en-US" sz="900" dirty="0"/>
-          </a:p>
-        </p:txBody>
-      </p:sp>
-      <p:pic>
-        <p:nvPicPr>
-          <p:cNvPr id="11" name="Image 1" descr="/Users/pop7/Library/CloudStorage/OneDrive-MonsterConnectCo.,Ltd/Lecture/KOSEN69 - software-security/slides/pptx/assets/logo-small.png">    </p:cNvPr>
-          <p:cNvPicPr>
-            <a:picLocks noChangeAspect="1"/>
-          </p:cNvPicPr>
-          <p:nvPr/>
-        </p:nvPicPr>
-        <p:blipFill>
-          <a:blip r:embed="rId2"/>
-          <a:stretch>
-            <a:fillRect/>
-          </a:stretch>
-        </p:blipFill>
-        <p:spPr>
-          <a:xfrm>
-            <a:off x="7882128" y="4700016"/>
-            <a:ext cx="768096" cy="356616"/>
-          </a:xfrm>
-          <a:prstGeom prst="rect">
-            <a:avLst/>
-          </a:prstGeom>
-        </p:spPr>
-      </p:pic>
-    </p:spTree>
-  </p:cSld>
-  <p:clrMapOvr>
-    <a:masterClrMapping/>
-  </p:clrMapOvr>
-</p:sld>
-</file>
-
-<file path=ppt/slides/slide14.xml><?xml version="1.0" encoding="utf-8"?>
-<p:sld xmlns:a="http://schemas.openxmlformats.org/drawingml/2006/main" xmlns:r="http://schemas.openxmlformats.org/officeDocument/2006/relationships" xmlns:p="http://schemas.openxmlformats.org/presentationml/2006/main">
-  <p:cSld name="Slide 14">
-    <p:bg>
-      <p:bgPr>
-        <a:solidFill>
-          <a:srgbClr val="FFFFFF"/>
-        </a:solidFill>
-      </p:bgPr>
-    </p:bg>
-    <p:spTree>
-      <p:nvGrpSpPr>
-        <p:cNvPr id="1" name=""/>
-        <p:cNvGrpSpPr/>
-        <p:nvPr/>
-      </p:nvGrpSpPr>
-      <p:grpSpPr>
-        <a:xfrm>
-          <a:off x="0" y="0"/>
-          <a:ext cx="0" cy="0"/>
-          <a:chOff x="0" y="0"/>
-          <a:chExt cx="0" cy="0"/>
-        </a:xfrm>
-      </p:grpSpPr>
-      <p:sp>
-        <p:nvSpPr>
-          <p:cNvPr id="2" name="Shape 0"/>
-          <p:cNvSpPr/>
-          <p:nvPr/>
-        </p:nvSpPr>
-        <p:spPr>
-          <a:xfrm>
-            <a:off x="457200" y="384048"/>
-            <a:ext cx="530352" cy="530352"/>
-          </a:xfrm>
-          <a:prstGeom prst="ellipse">
-            <a:avLst/>
-          </a:prstGeom>
-          <a:solidFill>
-            <a:srgbClr val="E35205"/>
-          </a:solidFill>
-          <a:ln/>
-          <a:effectLst>
-            <a:outerShdw sx="100000" sy="100000" kx="0" ky="0" algn="bl" rotWithShape="0" blurRad="76200" dist="25400" dir="5400000">
-              <a:srgbClr val="000000">
-                <a:alpha val="12000"/>
-              </a:srgbClr>
-            </a:outerShdw>
-          </a:effectLst>
-        </p:spPr>
-      </p:sp>
-      <p:pic>
-        <p:nvPicPr>
-          <p:cNvPr id="3" name="Image 0" descr="preencoded.png">    </p:cNvPr>
-          <p:cNvPicPr>
-            <a:picLocks noChangeAspect="1"/>
-          </p:cNvPicPr>
-          <p:nvPr/>
-        </p:nvPicPr>
-        <p:blipFill>
-          <a:blip r:embed="rId1"/>
-          <a:stretch>
-            <a:fillRect/>
-          </a:stretch>
-        </p:blipFill>
-        <p:spPr>
-          <a:xfrm>
-            <a:off x="594360" y="521208"/>
-            <a:ext cx="256032" cy="256032"/>
-          </a:xfrm>
-          <a:prstGeom prst="rect">
-            <a:avLst/>
-          </a:prstGeom>
-        </p:spPr>
-      </p:pic>
-      <p:sp>
-        <p:nvSpPr>
-          <p:cNvPr id="4" name="Text 1"/>
-          <p:cNvSpPr/>
-          <p:nvPr/>
-        </p:nvSpPr>
-        <p:spPr>
-          <a:xfrm>
-            <a:off x="1143000" y="329184"/>
-            <a:ext cx="7498080" cy="603504"/>
-          </a:xfrm>
-          <a:prstGeom prst="rect">
-            <a:avLst/>
-          </a:prstGeom>
-          <a:noFill/>
-          <a:ln/>
-        </p:spPr>
-        <p:txBody>
-          <a:bodyPr wrap="square" lIns="0" tIns="0" rIns="0" bIns="0" rtlCol="0" anchor="ctr"/>
-          <a:lstStyle/>
-          <a:p>
-            <a:pPr indent="0" marL="0">
-              <a:buNone/>
-            </a:pPr>
-            <a:r>
-              <a:rPr lang="en-US" sz="2600" b="1" dirty="0">
-                <a:solidFill>
-                  <a:srgbClr val="1F2937"/>
-                </a:solidFill>
-                <a:latin typeface="Arial" pitchFamily="34" charset="0"/>
-                <a:ea typeface="Arial" pitchFamily="34" charset="-122"/>
-                <a:cs typeface="Arial" pitchFamily="34" charset="-120"/>
-              </a:rPr>
-              <a:t>CWE mapping</a:t>
-            </a:r>
-            <a:endParaRPr lang="en-US" sz="2600" dirty="0"/>
-          </a:p>
-        </p:txBody>
-      </p:sp>
-      <p:sp>
-        <p:nvSpPr>
-          <p:cNvPr id="5" name="Shape 2"/>
-          <p:cNvSpPr/>
-          <p:nvPr/>
-        </p:nvSpPr>
-        <p:spPr>
-          <a:xfrm>
-            <a:off x="457200" y="1325880"/>
-            <a:ext cx="8229600" cy="1207008"/>
-          </a:xfrm>
-          <a:prstGeom prst="roundRect">
-            <a:avLst>
-              <a:gd name="adj" fmla="val 6061"/>
-            </a:avLst>
-          </a:prstGeom>
-          <a:solidFill>
-            <a:srgbClr val="F1F5F9"/>
-          </a:solidFill>
-          <a:ln/>
-          <a:effectLst>
-            <a:outerShdw sx="100000" sy="100000" kx="0" ky="0" algn="bl" rotWithShape="0" blurRad="76200" dist="25400" dir="5400000">
-              <a:srgbClr val="000000">
-                <a:alpha val="12000"/>
-              </a:srgbClr>
-            </a:outerShdw>
-          </a:effectLst>
-        </p:spPr>
-      </p:sp>
-      <p:sp>
-        <p:nvSpPr>
-          <p:cNvPr id="6" name="Text 3"/>
-          <p:cNvSpPr/>
-          <p:nvPr/>
-        </p:nvSpPr>
-        <p:spPr>
-          <a:xfrm>
-            <a:off x="731520" y="1435608"/>
-            <a:ext cx="7680960" cy="987552"/>
-          </a:xfrm>
-          <a:prstGeom prst="rect">
-            <a:avLst/>
-          </a:prstGeom>
-          <a:noFill/>
-          <a:ln/>
-        </p:spPr>
-        <p:txBody>
-          <a:bodyPr wrap="square" lIns="0" tIns="0" rIns="0" bIns="0" rtlCol="0" anchor="t">
-            <a:normAutofit/>
-          </a:bodyPr>
-          <a:lstStyle/>
-          <a:p>
-            <a:pPr marL="342900" indent="-342900">
-              <a:spcAft>
-                <a:spcPts val="600"/>
-              </a:spcAft>
-              <a:buSzPct val="100000"/>
-              <a:buChar char="•"/>
-            </a:pPr>
-            <a:r>
-              <a:rPr lang="en-US" sz="1400" dirty="0">
-                <a:solidFill>
-                  <a:srgbClr val="1F2937"/>
-                </a:solidFill>
-                <a:latin typeface="Calibri" pitchFamily="34" charset="0"/>
-                <a:ea typeface="Calibri" pitchFamily="34" charset="-122"/>
-                <a:cs typeface="Calibri" pitchFamily="34" charset="-120"/>
-              </a:rPr>
-              <a:t>CWE-639 — IDOR / missing ownership check</a:t>
-            </a:r>
-            <a:endParaRPr lang="en-US" sz="1400" dirty="0"/>
-          </a:p>
-          <a:p>
-            <a:pPr marL="342900" indent="-342900">
-              <a:spcAft>
-                <a:spcPts val="600"/>
-              </a:spcAft>
-              <a:buSzPct val="100000"/>
-              <a:buChar char="•"/>
-            </a:pPr>
-            <a:r>
-              <a:rPr lang="en-US" sz="1400" dirty="0">
-                <a:solidFill>
-                  <a:srgbClr val="1F2937"/>
-                </a:solidFill>
-                <a:latin typeface="Calibri" pitchFamily="34" charset="0"/>
-                <a:ea typeface="Calibri" pitchFamily="34" charset="-122"/>
-                <a:cs typeface="Calibri" pitchFamily="34" charset="-120"/>
-              </a:rPr>
-              <a:t>CWE-347 — improper signature verification (alg:none forgery)</a:t>
-            </a:r>
-            <a:endParaRPr lang="en-US" sz="1400" dirty="0"/>
-          </a:p>
-          <a:p>
-            <a:pPr marL="342900" indent="-342900">
-              <a:spcAft>
-                <a:spcPts val="600"/>
-              </a:spcAft>
-              <a:buSzPct val="100000"/>
-              <a:buChar char="•"/>
-            </a:pPr>
-            <a:r>
-              <a:rPr lang="en-US" sz="1400" dirty="0">
-                <a:solidFill>
-                  <a:srgbClr val="1F2937"/>
-                </a:solidFill>
-                <a:latin typeface="Calibri" pitchFamily="34" charset="0"/>
-                <a:ea typeface="Calibri" pitchFamily="34" charset="-122"/>
-                <a:cs typeface="Calibri" pitchFamily="34" charset="-120"/>
-              </a:rPr>
-              <a:t>CWE-321 — use of a hardcoded/weak cryptographic key (the guessable HMAC secret)</a:t>
-            </a:r>
-            <a:endParaRPr lang="en-US" sz="1400" dirty="0"/>
-          </a:p>
-        </p:txBody>
-      </p:sp>
-      <p:sp>
-        <p:nvSpPr>
-          <p:cNvPr id="7" name="Text 4"/>
-          <p:cNvSpPr/>
-          <p:nvPr/>
-        </p:nvSpPr>
-        <p:spPr>
-          <a:xfrm>
-            <a:off x="457200" y="4800600"/>
-            <a:ext cx="6949440" cy="274320"/>
-          </a:xfrm>
-          <a:prstGeom prst="rect">
-            <a:avLst/>
-          </a:prstGeom>
-          <a:noFill/>
-          <a:ln/>
-        </p:spPr>
-        <p:txBody>
-          <a:bodyPr wrap="square" lIns="0" tIns="0" rIns="0" bIns="0" rtlCol="0" anchor="ctr"/>
-          <a:lstStyle/>
-          <a:p>
-            <a:pPr indent="0" marL="0">
-              <a:buNone/>
-            </a:pPr>
-            <a:r>
-              <a:rPr lang="en-US" sz="900" dirty="0">
-                <a:solidFill>
-                  <a:srgbClr val="64748B"/>
-                </a:solidFill>
-                <a:latin typeface="Calibri" pitchFamily="34" charset="0"/>
-                <a:ea typeface="Calibri" pitchFamily="34" charset="-122"/>
-                <a:cs typeface="Calibri" pitchFamily="34" charset="-120"/>
-              </a:rPr>
-              <a:t>Software Security · Week 6</a:t>
-            </a:r>
-            <a:endParaRPr lang="en-US" sz="900" dirty="0"/>
-          </a:p>
-        </p:txBody>
-      </p:sp>
-      <p:pic>
-        <p:nvPicPr>
-          <p:cNvPr id="8" name="Image 1" descr="/Users/pop7/Library/CloudStorage/OneDrive-MonsterConnectCo.,Ltd/Lecture/KOSEN69 - software-security/slides/pptx/assets/logo-small.png">    </p:cNvPr>
-          <p:cNvPicPr>
-            <a:picLocks noChangeAspect="1"/>
-          </p:cNvPicPr>
-          <p:nvPr/>
-        </p:nvPicPr>
-        <p:blipFill>
-          <a:blip r:embed="rId2"/>
-          <a:stretch>
-            <a:fillRect/>
-          </a:stretch>
-        </p:blipFill>
-        <p:spPr>
-          <a:xfrm>
-            <a:off x="7882128" y="4700016"/>
-            <a:ext cx="768096" cy="356616"/>
-          </a:xfrm>
-          <a:prstGeom prst="rect">
-            <a:avLst/>
-          </a:prstGeom>
-        </p:spPr>
-      </p:pic>
-    </p:spTree>
-  </p:cSld>
-  <p:clrMapOvr>
-    <a:masterClrMapping/>
-  </p:clrMapOvr>
-</p:sld>
-</file>
-
 <file path=ppt/slides/slide15.xml><?xml version="1.0" encoding="utf-8"?>
 <p:sld xmlns:a="http://schemas.openxmlformats.org/drawingml/2006/main" xmlns:r="http://schemas.openxmlformats.org/officeDocument/2006/relationships" xmlns:p="http://schemas.openxmlformats.org/presentationml/2006/main">
   <p:cSld name="Slide 15">
@@ -5323,7 +5553,7 @@
                 <a:ea typeface="Arial" pitchFamily="34" charset="-122"/>
                 <a:cs typeface="Arial" pitchFamily="34" charset="-120"/>
               </a:rPr>
-              <a:t>Defenses</a:t>
+              <a:t>Exercise — RBAC (cont.)</a:t>
             </a:r>
             <a:endParaRPr lang="en-US" sz="2600" dirty="0"/>
           </a:p>
@@ -5337,25 +5567,16 @@
         </p:nvSpPr>
         <p:spPr>
           <a:xfrm>
-            <a:off x="457200" y="1325880"/>
-            <a:ext cx="8229600" cy="2139696"/>
-          </a:xfrm>
-          <a:prstGeom prst="roundRect">
-            <a:avLst>
-              <a:gd name="adj" fmla="val 3419"/>
-            </a:avLst>
+            <a:off x="502920" y="1325880"/>
+            <a:ext cx="384048" cy="384048"/>
+          </a:xfrm>
+          <a:prstGeom prst="ellipse">
+            <a:avLst/>
           </a:prstGeom>
           <a:solidFill>
-            <a:srgbClr val="F1F5F9"/>
+            <a:srgbClr val="E35205"/>
           </a:solidFill>
           <a:ln/>
-          <a:effectLst>
-            <a:outerShdw sx="100000" sy="100000" kx="0" ky="0" algn="bl" rotWithShape="0" blurRad="76200" dist="25400" dir="5400000">
-              <a:srgbClr val="000000">
-                <a:alpha val="12000"/>
-              </a:srgbClr>
-            </a:outerShdw>
-          </a:effectLst>
         </p:spPr>
       </p:sp>
       <p:sp>
@@ -5366,8 +5587,8 @@
         </p:nvSpPr>
         <p:spPr>
           <a:xfrm>
-            <a:off x="731520" y="1435608"/>
-            <a:ext cx="7680960" cy="1920240"/>
+            <a:off x="502920" y="1325880"/>
+            <a:ext cx="384048" cy="384048"/>
           </a:xfrm>
           <a:prstGeom prst="rect">
             <a:avLst/>
@@ -5376,20 +5597,55 @@
           <a:ln/>
         </p:spPr>
         <p:txBody>
-          <a:bodyPr wrap="square" lIns="0" tIns="0" rIns="0" bIns="0" rtlCol="0" anchor="t">
+          <a:bodyPr wrap="square" lIns="0" tIns="0" rIns="0" bIns="0" rtlCol="0" anchor="ctr"/>
+          <a:lstStyle/>
+          <a:p>
+            <a:pPr algn="ctr" indent="0" marL="0">
+              <a:buNone/>
+            </a:pPr>
+            <a:r>
+              <a:rPr lang="en-US" sz="1500" b="1" dirty="0">
+                <a:solidFill>
+                  <a:srgbClr val="0E1726"/>
+                </a:solidFill>
+                <a:latin typeface="Arial" pitchFamily="34" charset="0"/>
+                <a:ea typeface="Arial" pitchFamily="34" charset="-122"/>
+                <a:cs typeface="Arial" pitchFamily="34" charset="-120"/>
+              </a:rPr>
+              <a:t>2</a:t>
+            </a:r>
+            <a:endParaRPr lang="en-US" sz="1500" dirty="0"/>
+          </a:p>
+        </p:txBody>
+      </p:sp>
+      <p:sp>
+        <p:nvSpPr>
+          <p:cNvPr id="7" name="Text 4"/>
+          <p:cNvSpPr/>
+          <p:nvPr/>
+        </p:nvSpPr>
+        <p:spPr>
+          <a:xfrm>
+            <a:off x="1051560" y="1325880"/>
+            <a:ext cx="7589520" cy="402336"/>
+          </a:xfrm>
+          <a:prstGeom prst="rect">
+            <a:avLst/>
+          </a:prstGeom>
+          <a:noFill/>
+          <a:ln/>
+        </p:spPr>
+        <p:txBody>
+          <a:bodyPr wrap="square" lIns="0" tIns="0" rIns="0" bIns="0" rtlCol="0" anchor="ctr">
             <a:normAutofit/>
           </a:bodyPr>
           <a:lstStyle/>
           <a:p>
-            <a:pPr marL="342900" indent="-342900">
-              <a:spcAft>
-                <a:spcPts val="600"/>
-              </a:spcAft>
-              <a:buSzPct val="100000"/>
-              <a:buChar char="•"/>
-            </a:pPr>
-            <a:r>
-              <a:rPr lang="en-US" sz="1400" dirty="0">
+            <a:pPr indent="0" marL="0">
+              <a:buNone/>
+            </a:pPr>
+            <a:r>
+              <a:rPr lang="en-US" sz="1350" dirty="0">
                 <a:solidFill>
                   <a:srgbClr val="1F2937"/>
                 </a:solidFill>
@@ -5397,20 +5653,99 @@
                 <a:ea typeface="Calibri" pitchFamily="34" charset="-122"/>
                 <a:cs typeface="Calibri" pitchFamily="34" charset="-120"/>
               </a:rPr>
-              <a:t>Server-side authorization on every request (deny by default)</a:t>
-            </a:r>
-            <a:endParaRPr lang="en-US" sz="1400" dirty="0"/>
-          </a:p>
-          <a:p>
-            <a:pPr marL="342900" indent="-342900">
-              <a:spcAft>
-                <a:spcPts val="600"/>
-              </a:spcAft>
-              <a:buSzPct val="100000"/>
-              <a:buChar char="•"/>
-            </a:pPr>
-            <a:r>
-              <a:rPr lang="en-US" sz="1400" dirty="0">
+              <a:t>An intern must create bug entries — which role's perms to add?</a:t>
+            </a:r>
+            <a:endParaRPr lang="en-US" sz="1350" dirty="0"/>
+          </a:p>
+        </p:txBody>
+      </p:sp>
+      <p:sp>
+        <p:nvSpPr>
+          <p:cNvPr id="8" name="Shape 5"/>
+          <p:cNvSpPr/>
+          <p:nvPr/>
+        </p:nvSpPr>
+        <p:spPr>
+          <a:xfrm>
+            <a:off x="502920" y="1801368"/>
+            <a:ext cx="384048" cy="384048"/>
+          </a:xfrm>
+          <a:prstGeom prst="ellipse">
+            <a:avLst/>
+          </a:prstGeom>
+          <a:solidFill>
+            <a:srgbClr val="E35205"/>
+          </a:solidFill>
+          <a:ln/>
+        </p:spPr>
+      </p:sp>
+      <p:sp>
+        <p:nvSpPr>
+          <p:cNvPr id="9" name="Text 6"/>
+          <p:cNvSpPr/>
+          <p:nvPr/>
+        </p:nvSpPr>
+        <p:spPr>
+          <a:xfrm>
+            <a:off x="502920" y="1801368"/>
+            <a:ext cx="384048" cy="384048"/>
+          </a:xfrm>
+          <a:prstGeom prst="rect">
+            <a:avLst/>
+          </a:prstGeom>
+          <a:noFill/>
+          <a:ln/>
+        </p:spPr>
+        <p:txBody>
+          <a:bodyPr wrap="square" lIns="0" tIns="0" rIns="0" bIns="0" rtlCol="0" anchor="ctr"/>
+          <a:lstStyle/>
+          <a:p>
+            <a:pPr algn="ctr" indent="0" marL="0">
+              <a:buNone/>
+            </a:pPr>
+            <a:r>
+              <a:rPr lang="en-US" sz="1500" b="1" dirty="0">
+                <a:solidFill>
+                  <a:srgbClr val="0E1726"/>
+                </a:solidFill>
+                <a:latin typeface="Arial" pitchFamily="34" charset="0"/>
+                <a:ea typeface="Arial" pitchFamily="34" charset="-122"/>
+                <a:cs typeface="Arial" pitchFamily="34" charset="-120"/>
+              </a:rPr>
+              <a:t>3</a:t>
+            </a:r>
+            <a:endParaRPr lang="en-US" sz="1500" dirty="0"/>
+          </a:p>
+        </p:txBody>
+      </p:sp>
+      <p:sp>
+        <p:nvSpPr>
+          <p:cNvPr id="10" name="Text 7"/>
+          <p:cNvSpPr/>
+          <p:nvPr/>
+        </p:nvSpPr>
+        <p:spPr>
+          <a:xfrm>
+            <a:off x="1051560" y="1801368"/>
+            <a:ext cx="7589520" cy="402336"/>
+          </a:xfrm>
+          <a:prstGeom prst="rect">
+            <a:avLst/>
+          </a:prstGeom>
+          <a:noFill/>
+          <a:ln/>
+        </p:spPr>
+        <p:txBody>
+          <a:bodyPr wrap="square" lIns="0" tIns="0" rIns="0" bIns="0" rtlCol="0" anchor="ctr">
+            <a:normAutofit/>
+          </a:bodyPr>
+          <a:lstStyle/>
+          <a:p>
+            <a:pPr indent="0" marL="0">
+              <a:buNone/>
+            </a:pPr>
+            <a:r>
+              <a:rPr lang="en-US" sz="1350" dirty="0">
                 <a:solidFill>
                   <a:srgbClr val="1F2937"/>
                 </a:solidFill>
@@ -5418,129 +5753,45 @@
                 <a:ea typeface="Calibri" pitchFamily="34" charset="-122"/>
                 <a:cs typeface="Calibri" pitchFamily="34" charset="-120"/>
               </a:rPr>
-              <a:t>Check ownership, not just authentication</a:t>
-            </a:r>
-            <a:endParaRPr lang="en-US" sz="1400" dirty="0"/>
-          </a:p>
-          <a:p>
-            <a:pPr marL="342900" indent="-342900">
-              <a:spcAft>
-                <a:spcPts val="600"/>
-              </a:spcAft>
-              <a:buSzPct val="100000"/>
-              <a:buChar char="•"/>
-            </a:pPr>
-            <a:r>
-              <a:rPr lang="en-US" sz="1400" dirty="0">
-                <a:solidFill>
-                  <a:srgbClr val="1F2937"/>
+              <a:t>List all roles that can modify the codebase.</a:t>
+            </a:r>
+            <a:endParaRPr lang="en-US" sz="1350" dirty="0"/>
+          </a:p>
+        </p:txBody>
+      </p:sp>
+      <p:sp>
+        <p:nvSpPr>
+          <p:cNvPr id="11" name="Text 8"/>
+          <p:cNvSpPr/>
+          <p:nvPr/>
+        </p:nvSpPr>
+        <p:spPr>
+          <a:xfrm>
+            <a:off x="457200" y="4800600"/>
+            <a:ext cx="6949440" cy="274320"/>
+          </a:xfrm>
+          <a:prstGeom prst="rect">
+            <a:avLst/>
+          </a:prstGeom>
+          <a:noFill/>
+          <a:ln/>
+        </p:spPr>
+        <p:txBody>
+          <a:bodyPr wrap="square" lIns="0" tIns="0" rIns="0" bIns="0" rtlCol="0" anchor="ctr"/>
+          <a:lstStyle/>
+          <a:p>
+            <a:pPr indent="0" marL="0">
+              <a:buNone/>
+            </a:pPr>
+            <a:r>
+              <a:rPr lang="en-US" sz="900" dirty="0">
+                <a:solidFill>
+                  <a:srgbClr val="64748B"/>
                 </a:solidFill>
                 <a:latin typeface="Calibri" pitchFamily="34" charset="0"/>
                 <a:ea typeface="Calibri" pitchFamily="34" charset="-122"/>
                 <a:cs typeface="Calibri" pitchFamily="34" charset="-120"/>
               </a:rPr>
-              <a:t>Strong session tokens + proper expiry/rotation</a:t>
-            </a:r>
-            <a:endParaRPr lang="en-US" sz="1400" dirty="0"/>
-          </a:p>
-          <a:p>
-            <a:pPr marL="342900" indent="-342900">
-              <a:spcAft>
-                <a:spcPts val="600"/>
-              </a:spcAft>
-              <a:buSzPct val="100000"/>
-              <a:buChar char="•"/>
-            </a:pPr>
-            <a:r>
-              <a:rPr lang="en-US" sz="1400" dirty="0">
-                <a:solidFill>
-                  <a:srgbClr val="1F2937"/>
-                </a:solidFill>
-                <a:latin typeface="Calibri" pitchFamily="34" charset="0"/>
-                <a:ea typeface="Calibri" pitchFamily="34" charset="-122"/>
-                <a:cs typeface="Calibri" pitchFamily="34" charset="-120"/>
-              </a:rPr>
-              <a:t>Verify JWT signature, alg, exp, aud; keep secrets strong</a:t>
-            </a:r>
-            <a:endParaRPr lang="en-US" sz="1400" dirty="0"/>
-          </a:p>
-          <a:p>
-            <a:pPr marL="342900" indent="-342900">
-              <a:spcAft>
-                <a:spcPts val="600"/>
-              </a:spcAft>
-              <a:buSzPct val="100000"/>
-              <a:buChar char="•"/>
-            </a:pPr>
-            <a:r>
-              <a:rPr lang="en-US" sz="1400" dirty="0">
-                <a:solidFill>
-                  <a:srgbClr val="1F2937"/>
-                </a:solidFill>
-                <a:latin typeface="Calibri" pitchFamily="34" charset="0"/>
-                <a:ea typeface="Calibri" pitchFamily="34" charset="-122"/>
-                <a:cs typeface="Calibri" pitchFamily="34" charset="-120"/>
-              </a:rPr>
-              <a:t>RBAC / ABAC enforced centrally</a:t>
-            </a:r>
-            <a:endParaRPr lang="en-US" sz="1400" dirty="0"/>
-          </a:p>
-          <a:p>
-            <a:pPr marL="342900" indent="-342900">
-              <a:spcAft>
-                <a:spcPts val="600"/>
-              </a:spcAft>
-              <a:buSzPct val="100000"/>
-              <a:buChar char="•"/>
-            </a:pPr>
-            <a:r>
-              <a:rPr lang="en-US" sz="1400" dirty="0">
-                <a:solidFill>
-                  <a:srgbClr val="1F2937"/>
-                </a:solidFill>
-                <a:latin typeface="Calibri" pitchFamily="34" charset="0"/>
-                <a:ea typeface="Calibri" pitchFamily="34" charset="-122"/>
-                <a:cs typeface="Calibri" pitchFamily="34" charset="-120"/>
-              </a:rPr>
-              <a:t>Centralize the check — don't scatter if role==... everywhere</a:t>
-            </a:r>
-            <a:endParaRPr lang="en-US" sz="1400" dirty="0"/>
-          </a:p>
-        </p:txBody>
-      </p:sp>
-      <p:sp>
-        <p:nvSpPr>
-          <p:cNvPr id="7" name="Text 4"/>
-          <p:cNvSpPr/>
-          <p:nvPr/>
-        </p:nvSpPr>
-        <p:spPr>
-          <a:xfrm>
-            <a:off x="457200" y="4800600"/>
-            <a:ext cx="6949440" cy="274320"/>
-          </a:xfrm>
-          <a:prstGeom prst="rect">
-            <a:avLst/>
-          </a:prstGeom>
-          <a:noFill/>
-          <a:ln/>
-        </p:spPr>
-        <p:txBody>
-          <a:bodyPr wrap="square" lIns="0" tIns="0" rIns="0" bIns="0" rtlCol="0" anchor="ctr"/>
-          <a:lstStyle/>
-          <a:p>
-            <a:pPr indent="0" marL="0">
-              <a:buNone/>
-            </a:pPr>
-            <a:r>
-              <a:rPr lang="en-US" sz="900" dirty="0">
-                <a:solidFill>
-                  <a:srgbClr val="64748B"/>
-                </a:solidFill>
-                <a:latin typeface="Calibri" pitchFamily="34" charset="0"/>
-                <a:ea typeface="Calibri" pitchFamily="34" charset="-122"/>
-                <a:cs typeface="Calibri" pitchFamily="34" charset="-120"/>
-              </a:rPr>
               <a:t>Software Security · Week 6</a:t>
             </a:r>
             <a:endParaRPr lang="en-US" sz="900" dirty="0"/>
@@ -5549,7 +5800,7 @@
       </p:sp>
       <p:pic>
         <p:nvPicPr>
-          <p:cNvPr id="8" name="Image 1" descr="/Users/pop7/Library/CloudStorage/OneDrive-MonsterConnectCo.,Ltd/Lecture/KOSEN69 - software-security/slides/pptx/assets/logo-small.png">    </p:cNvPr>
+          <p:cNvPr id="12" name="Image 1" descr="/Users/pop7/Library/CloudStorage/OneDrive-MonsterConnectCo.,Ltd/Lecture/KOSEN69 - software-security/slides/pptx/assets/logo-small.png">    </p:cNvPr>
           <p:cNvPicPr>
             <a:picLocks noChangeAspect="1"/>
           </p:cNvPicPr>
@@ -5687,6 +5938,1073 @@
                 <a:ea typeface="Arial" pitchFamily="34" charset="-122"/>
                 <a:cs typeface="Arial" pitchFamily="34" charset="-120"/>
               </a:rPr>
+              <a:t>Reading the attack in the logs</a:t>
+            </a:r>
+            <a:endParaRPr lang="en-US" sz="2600" dirty="0"/>
+          </a:p>
+        </p:txBody>
+      </p:sp>
+      <p:sp>
+        <p:nvSpPr>
+          <p:cNvPr id="5" name="Text 2"/>
+          <p:cNvSpPr/>
+          <p:nvPr/>
+        </p:nvSpPr>
+        <p:spPr>
+          <a:xfrm>
+            <a:off x="548640" y="1325880"/>
+            <a:ext cx="8046720" cy="548640"/>
+          </a:xfrm>
+          <a:prstGeom prst="rect">
+            <a:avLst/>
+          </a:prstGeom>
+          <a:noFill/>
+          <a:ln/>
+        </p:spPr>
+        <p:txBody>
+          <a:bodyPr wrap="square" lIns="0" tIns="0" rIns="0" bIns="0" rtlCol="0" anchor="t">
+            <a:normAutofit/>
+          </a:bodyPr>
+          <a:lstStyle/>
+          <a:p>
+            <a:pPr indent="0" marL="0">
+              <a:buNone/>
+            </a:pPr>
+            <a:r>
+              <a:rPr lang="en-US" sz="1400" dirty="0">
+                <a:solidFill>
+                  <a:srgbClr val="1F2937"/>
+                </a:solidFill>
+                <a:latin typeface="Calibri" pitchFamily="34" charset="0"/>
+                <a:ea typeface="Calibri" pitchFamily="34" charset="-122"/>
+                <a:cs typeface="Calibri" pitchFamily="34" charset="-120"/>
+              </a:rPr>
+              <a:t>Reconstruct the kill chain from Apache logs:</a:t>
+            </a:r>
+            <a:endParaRPr lang="en-US" sz="1400" dirty="0"/>
+          </a:p>
+        </p:txBody>
+      </p:sp>
+      <p:sp>
+        <p:nvSpPr>
+          <p:cNvPr id="6" name="Shape 3"/>
+          <p:cNvSpPr/>
+          <p:nvPr/>
+        </p:nvSpPr>
+        <p:spPr>
+          <a:xfrm>
+            <a:off x="457200" y="1965960"/>
+            <a:ext cx="8229600" cy="932688"/>
+          </a:xfrm>
+          <a:prstGeom prst="roundRect">
+            <a:avLst>
+              <a:gd name="adj" fmla="val 5882"/>
+            </a:avLst>
+          </a:prstGeom>
+          <a:solidFill>
+            <a:srgbClr val="0A1020"/>
+          </a:solidFill>
+          <a:ln w="12700">
+            <a:solidFill>
+              <a:srgbClr val="E8EDF3"/>
+            </a:solidFill>
+            <a:prstDash val="solid"/>
+          </a:ln>
+        </p:spPr>
+      </p:sp>
+      <p:sp>
+        <p:nvSpPr>
+          <p:cNvPr id="7" name="Text 4"/>
+          <p:cNvSpPr/>
+          <p:nvPr/>
+        </p:nvSpPr>
+        <p:spPr>
+          <a:xfrm>
+            <a:off x="640080" y="2039112"/>
+            <a:ext cx="7863840" cy="786384"/>
+          </a:xfrm>
+          <a:prstGeom prst="rect">
+            <a:avLst/>
+          </a:prstGeom>
+          <a:noFill/>
+          <a:ln/>
+        </p:spPr>
+        <p:txBody>
+          <a:bodyPr wrap="square" lIns="0" tIns="0" rIns="0" bIns="0" rtlCol="0" anchor="t">
+            <a:normAutofit/>
+          </a:bodyPr>
+          <a:lstStyle/>
+          <a:p>
+            <a:pPr indent="0" marL="0">
+              <a:buNone/>
+            </a:pPr>
+            <a:r>
+              <a:rPr lang="en-US" sz="1150" dirty="0">
+                <a:solidFill>
+                  <a:srgbClr val="9FE7D6"/>
+                </a:solidFill>
+                <a:latin typeface="Courier New" pitchFamily="34" charset="0"/>
+                <a:ea typeface="Courier New" pitchFamily="34" charset="-122"/>
+                <a:cs typeface="Courier New" pitchFamily="34" charset="-120"/>
+              </a:rPr>
+              <a:t>GET /login.php?username=' or 1=1 limit 1; -- a&amp;...   302   ← SQLi admin</a:t>
+            </a:r>
+            <a:endParaRPr lang="en-US" sz="1150" dirty="0"/>
+          </a:p>
+          <a:p>
+            <a:pPr indent="0" marL="0">
+              <a:buNone/>
+            </a:pPr>
+            <a:r>
+              <a:rPr lang="en-US" sz="1150" dirty="0">
+                <a:solidFill>
+                  <a:srgbClr val="9FE7D6"/>
+                </a:solidFill>
+                <a:latin typeface="Courier New" pitchFamily="34" charset="0"/>
+                <a:ea typeface="Courier New" pitchFamily="34" charset="-122"/>
+                <a:cs typeface="Courier New" pitchFamily="34" charset="-120"/>
+              </a:rPr>
+              <a:t>POST /upload.php                                     200   ← backdoor</a:t>
+            </a:r>
+            <a:endParaRPr lang="en-US" sz="1150" dirty="0"/>
+          </a:p>
+          <a:p>
+            <a:pPr indent="0" marL="0">
+              <a:buNone/>
+            </a:pPr>
+            <a:r>
+              <a:rPr lang="en-US" sz="1150" dirty="0">
+                <a:solidFill>
+                  <a:srgbClr val="9FE7D6"/>
+                </a:solidFill>
+                <a:latin typeface="Courier New" pitchFamily="34" charset="0"/>
+                <a:ea typeface="Courier New" pitchFamily="34" charset="-122"/>
+                <a:cs typeface="Courier New" pitchFamily="34" charset="-120"/>
+              </a:rPr>
+              <a:t>GET /uploads/backdoor.php?cmd=ls%20-l                200   ← RCE</a:t>
+            </a:r>
+            <a:endParaRPr lang="en-US" sz="1150" dirty="0"/>
+          </a:p>
+        </p:txBody>
+      </p:sp>
+      <p:sp>
+        <p:nvSpPr>
+          <p:cNvPr id="8" name="Shape 5"/>
+          <p:cNvSpPr/>
+          <p:nvPr/>
+        </p:nvSpPr>
+        <p:spPr>
+          <a:xfrm>
+            <a:off x="457200" y="3063240"/>
+            <a:ext cx="8229600" cy="585216"/>
+          </a:xfrm>
+          <a:prstGeom prst="roundRect">
+            <a:avLst>
+              <a:gd name="adj" fmla="val 12500"/>
+            </a:avLst>
+          </a:prstGeom>
+          <a:solidFill>
+            <a:srgbClr val="F1F5F9"/>
+          </a:solidFill>
+          <a:ln/>
+          <a:effectLst>
+            <a:outerShdw sx="100000" sy="100000" kx="0" ky="0" algn="bl" rotWithShape="0" blurRad="76200" dist="25400" dir="5400000">
+              <a:srgbClr val="000000">
+                <a:alpha val="12000"/>
+              </a:srgbClr>
+            </a:outerShdw>
+          </a:effectLst>
+        </p:spPr>
+      </p:sp>
+      <p:sp>
+        <p:nvSpPr>
+          <p:cNvPr id="9" name="Text 6"/>
+          <p:cNvSpPr/>
+          <p:nvPr/>
+        </p:nvSpPr>
+        <p:spPr>
+          <a:xfrm>
+            <a:off x="731520" y="3172968"/>
+            <a:ext cx="7680960" cy="365760"/>
+          </a:xfrm>
+          <a:prstGeom prst="rect">
+            <a:avLst/>
+          </a:prstGeom>
+          <a:noFill/>
+          <a:ln/>
+        </p:spPr>
+        <p:txBody>
+          <a:bodyPr wrap="square" lIns="0" tIns="0" rIns="0" bIns="0" rtlCol="0" anchor="t">
+            <a:normAutofit/>
+          </a:bodyPr>
+          <a:lstStyle/>
+          <a:p>
+            <a:pPr marL="342900" indent="-342900">
+              <a:spcAft>
+                <a:spcPts val="600"/>
+              </a:spcAft>
+              <a:buSzPct val="100000"/>
+              <a:buChar char="•"/>
+            </a:pPr>
+            <a:r>
+              <a:rPr lang="en-US" sz="1400" dirty="0">
+                <a:solidFill>
+                  <a:srgbClr val="1F2937"/>
+                </a:solidFill>
+                <a:latin typeface="Calibri" pitchFamily="34" charset="0"/>
+                <a:ea typeface="Calibri" pitchFamily="34" charset="-122"/>
+                <a:cs typeface="Calibri" pitchFamily="34" charset="-120"/>
+              </a:rPr>
+              <a:t>%20 = space (URL-decode!) · logs let you trace what happened</a:t>
+            </a:r>
+            <a:endParaRPr lang="en-US" sz="1400" dirty="0"/>
+          </a:p>
+        </p:txBody>
+      </p:sp>
+      <p:sp>
+        <p:nvSpPr>
+          <p:cNvPr id="10" name="Text 7"/>
+          <p:cNvSpPr/>
+          <p:nvPr/>
+        </p:nvSpPr>
+        <p:spPr>
+          <a:xfrm>
+            <a:off x="457200" y="4800600"/>
+            <a:ext cx="6949440" cy="274320"/>
+          </a:xfrm>
+          <a:prstGeom prst="rect">
+            <a:avLst/>
+          </a:prstGeom>
+          <a:noFill/>
+          <a:ln/>
+        </p:spPr>
+        <p:txBody>
+          <a:bodyPr wrap="square" lIns="0" tIns="0" rIns="0" bIns="0" rtlCol="0" anchor="ctr"/>
+          <a:lstStyle/>
+          <a:p>
+            <a:pPr indent="0" marL="0">
+              <a:buNone/>
+            </a:pPr>
+            <a:r>
+              <a:rPr lang="en-US" sz="900" dirty="0">
+                <a:solidFill>
+                  <a:srgbClr val="64748B"/>
+                </a:solidFill>
+                <a:latin typeface="Calibri" pitchFamily="34" charset="0"/>
+                <a:ea typeface="Calibri" pitchFamily="34" charset="-122"/>
+                <a:cs typeface="Calibri" pitchFamily="34" charset="-120"/>
+              </a:rPr>
+              <a:t>Software Security · Week 6</a:t>
+            </a:r>
+            <a:endParaRPr lang="en-US" sz="900" dirty="0"/>
+          </a:p>
+        </p:txBody>
+      </p:sp>
+      <p:pic>
+        <p:nvPicPr>
+          <p:cNvPr id="11" name="Image 1" descr="/Users/pop7/Library/CloudStorage/OneDrive-MonsterConnectCo.,Ltd/Lecture/KOSEN69 - software-security/slides/pptx/assets/logo-small.png">    </p:cNvPr>
+          <p:cNvPicPr>
+            <a:picLocks noChangeAspect="1"/>
+          </p:cNvPicPr>
+          <p:nvPr/>
+        </p:nvPicPr>
+        <p:blipFill>
+          <a:blip r:embed="rId2"/>
+          <a:stretch>
+            <a:fillRect/>
+          </a:stretch>
+        </p:blipFill>
+        <p:spPr>
+          <a:xfrm>
+            <a:off x="7882128" y="4700016"/>
+            <a:ext cx="768096" cy="356616"/>
+          </a:xfrm>
+          <a:prstGeom prst="rect">
+            <a:avLst/>
+          </a:prstGeom>
+        </p:spPr>
+      </p:pic>
+    </p:spTree>
+  </p:cSld>
+  <p:clrMapOvr>
+    <a:masterClrMapping/>
+  </p:clrMapOvr>
+</p:sld>
+</file>
+
+<file path=ppt/slides/slide17.xml><?xml version="1.0" encoding="utf-8"?>
+<p:sld xmlns:a="http://schemas.openxmlformats.org/drawingml/2006/main" xmlns:r="http://schemas.openxmlformats.org/officeDocument/2006/relationships" xmlns:p="http://schemas.openxmlformats.org/presentationml/2006/main">
+  <p:cSld name="Slide 17">
+    <p:bg>
+      <p:bgPr>
+        <a:solidFill>
+          <a:srgbClr val="FFFFFF"/>
+        </a:solidFill>
+      </p:bgPr>
+    </p:bg>
+    <p:spTree>
+      <p:nvGrpSpPr>
+        <p:cNvPr id="1" name=""/>
+        <p:cNvGrpSpPr/>
+        <p:nvPr/>
+      </p:nvGrpSpPr>
+      <p:grpSpPr>
+        <a:xfrm>
+          <a:off x="0" y="0"/>
+          <a:ext cx="0" cy="0"/>
+          <a:chOff x="0" y="0"/>
+          <a:chExt cx="0" cy="0"/>
+        </a:xfrm>
+      </p:grpSpPr>
+      <p:sp>
+        <p:nvSpPr>
+          <p:cNvPr id="2" name="Shape 0"/>
+          <p:cNvSpPr/>
+          <p:nvPr/>
+        </p:nvSpPr>
+        <p:spPr>
+          <a:xfrm>
+            <a:off x="457200" y="384048"/>
+            <a:ext cx="530352" cy="530352"/>
+          </a:xfrm>
+          <a:prstGeom prst="ellipse">
+            <a:avLst/>
+          </a:prstGeom>
+          <a:solidFill>
+            <a:srgbClr val="E35205"/>
+          </a:solidFill>
+          <a:ln/>
+          <a:effectLst>
+            <a:outerShdw sx="100000" sy="100000" kx="0" ky="0" algn="bl" rotWithShape="0" blurRad="76200" dist="25400" dir="5400000">
+              <a:srgbClr val="000000">
+                <a:alpha val="12000"/>
+              </a:srgbClr>
+            </a:outerShdw>
+          </a:effectLst>
+        </p:spPr>
+      </p:sp>
+      <p:pic>
+        <p:nvPicPr>
+          <p:cNvPr id="3" name="Image 0" descr="preencoded.png">    </p:cNvPr>
+          <p:cNvPicPr>
+            <a:picLocks noChangeAspect="1"/>
+          </p:cNvPicPr>
+          <p:nvPr/>
+        </p:nvPicPr>
+        <p:blipFill>
+          <a:blip r:embed="rId1"/>
+          <a:stretch>
+            <a:fillRect/>
+          </a:stretch>
+        </p:blipFill>
+        <p:spPr>
+          <a:xfrm>
+            <a:off x="594360" y="521208"/>
+            <a:ext cx="256032" cy="256032"/>
+          </a:xfrm>
+          <a:prstGeom prst="rect">
+            <a:avLst/>
+          </a:prstGeom>
+        </p:spPr>
+      </p:pic>
+      <p:sp>
+        <p:nvSpPr>
+          <p:cNvPr id="4" name="Text 1"/>
+          <p:cNvSpPr/>
+          <p:nvPr/>
+        </p:nvSpPr>
+        <p:spPr>
+          <a:xfrm>
+            <a:off x="1143000" y="329184"/>
+            <a:ext cx="7498080" cy="603504"/>
+          </a:xfrm>
+          <a:prstGeom prst="rect">
+            <a:avLst/>
+          </a:prstGeom>
+          <a:noFill/>
+          <a:ln/>
+        </p:spPr>
+        <p:txBody>
+          <a:bodyPr wrap="square" lIns="0" tIns="0" rIns="0" bIns="0" rtlCol="0" anchor="ctr"/>
+          <a:lstStyle/>
+          <a:p>
+            <a:pPr indent="0" marL="0">
+              <a:buNone/>
+            </a:pPr>
+            <a:r>
+              <a:rPr lang="en-US" sz="2600" b="1" dirty="0">
+                <a:solidFill>
+                  <a:srgbClr val="1F2937"/>
+                </a:solidFill>
+                <a:latin typeface="Arial" pitchFamily="34" charset="0"/>
+                <a:ea typeface="Arial" pitchFamily="34" charset="-122"/>
+                <a:cs typeface="Arial" pitchFamily="34" charset="-120"/>
+              </a:rPr>
+              <a:t>CWE mapping</a:t>
+            </a:r>
+            <a:endParaRPr lang="en-US" sz="2600" dirty="0"/>
+          </a:p>
+        </p:txBody>
+      </p:sp>
+      <p:sp>
+        <p:nvSpPr>
+          <p:cNvPr id="5" name="Shape 2"/>
+          <p:cNvSpPr/>
+          <p:nvPr/>
+        </p:nvSpPr>
+        <p:spPr>
+          <a:xfrm>
+            <a:off x="457200" y="1325880"/>
+            <a:ext cx="8229600" cy="1207008"/>
+          </a:xfrm>
+          <a:prstGeom prst="roundRect">
+            <a:avLst>
+              <a:gd name="adj" fmla="val 6061"/>
+            </a:avLst>
+          </a:prstGeom>
+          <a:solidFill>
+            <a:srgbClr val="F1F5F9"/>
+          </a:solidFill>
+          <a:ln/>
+          <a:effectLst>
+            <a:outerShdw sx="100000" sy="100000" kx="0" ky="0" algn="bl" rotWithShape="0" blurRad="76200" dist="25400" dir="5400000">
+              <a:srgbClr val="000000">
+                <a:alpha val="12000"/>
+              </a:srgbClr>
+            </a:outerShdw>
+          </a:effectLst>
+        </p:spPr>
+      </p:sp>
+      <p:sp>
+        <p:nvSpPr>
+          <p:cNvPr id="6" name="Text 3"/>
+          <p:cNvSpPr/>
+          <p:nvPr/>
+        </p:nvSpPr>
+        <p:spPr>
+          <a:xfrm>
+            <a:off x="731520" y="1435608"/>
+            <a:ext cx="7680960" cy="987552"/>
+          </a:xfrm>
+          <a:prstGeom prst="rect">
+            <a:avLst/>
+          </a:prstGeom>
+          <a:noFill/>
+          <a:ln/>
+        </p:spPr>
+        <p:txBody>
+          <a:bodyPr wrap="square" lIns="0" tIns="0" rIns="0" bIns="0" rtlCol="0" anchor="t">
+            <a:normAutofit/>
+          </a:bodyPr>
+          <a:lstStyle/>
+          <a:p>
+            <a:pPr marL="342900" indent="-342900">
+              <a:spcAft>
+                <a:spcPts val="600"/>
+              </a:spcAft>
+              <a:buSzPct val="100000"/>
+              <a:buChar char="•"/>
+            </a:pPr>
+            <a:r>
+              <a:rPr lang="en-US" sz="1400" dirty="0">
+                <a:solidFill>
+                  <a:srgbClr val="1F2937"/>
+                </a:solidFill>
+                <a:latin typeface="Calibri" pitchFamily="34" charset="0"/>
+                <a:ea typeface="Calibri" pitchFamily="34" charset="-122"/>
+                <a:cs typeface="Calibri" pitchFamily="34" charset="-120"/>
+              </a:rPr>
+              <a:t>CWE-639 — IDOR / missing ownership check</a:t>
+            </a:r>
+            <a:endParaRPr lang="en-US" sz="1400" dirty="0"/>
+          </a:p>
+          <a:p>
+            <a:pPr marL="342900" indent="-342900">
+              <a:spcAft>
+                <a:spcPts val="600"/>
+              </a:spcAft>
+              <a:buSzPct val="100000"/>
+              <a:buChar char="•"/>
+            </a:pPr>
+            <a:r>
+              <a:rPr lang="en-US" sz="1400" dirty="0">
+                <a:solidFill>
+                  <a:srgbClr val="1F2937"/>
+                </a:solidFill>
+                <a:latin typeface="Calibri" pitchFamily="34" charset="0"/>
+                <a:ea typeface="Calibri" pitchFamily="34" charset="-122"/>
+                <a:cs typeface="Calibri" pitchFamily="34" charset="-120"/>
+              </a:rPr>
+              <a:t>CWE-347 — improper signature verification (alg:none forgery)</a:t>
+            </a:r>
+            <a:endParaRPr lang="en-US" sz="1400" dirty="0"/>
+          </a:p>
+          <a:p>
+            <a:pPr marL="342900" indent="-342900">
+              <a:spcAft>
+                <a:spcPts val="600"/>
+              </a:spcAft>
+              <a:buSzPct val="100000"/>
+              <a:buChar char="•"/>
+            </a:pPr>
+            <a:r>
+              <a:rPr lang="en-US" sz="1400" dirty="0">
+                <a:solidFill>
+                  <a:srgbClr val="1F2937"/>
+                </a:solidFill>
+                <a:latin typeface="Calibri" pitchFamily="34" charset="0"/>
+                <a:ea typeface="Calibri" pitchFamily="34" charset="-122"/>
+                <a:cs typeface="Calibri" pitchFamily="34" charset="-120"/>
+              </a:rPr>
+              <a:t>CWE-321 — use of a hardcoded/weak cryptographic key (the guessable HMAC secret)</a:t>
+            </a:r>
+            <a:endParaRPr lang="en-US" sz="1400" dirty="0"/>
+          </a:p>
+        </p:txBody>
+      </p:sp>
+      <p:sp>
+        <p:nvSpPr>
+          <p:cNvPr id="7" name="Text 4"/>
+          <p:cNvSpPr/>
+          <p:nvPr/>
+        </p:nvSpPr>
+        <p:spPr>
+          <a:xfrm>
+            <a:off x="457200" y="4800600"/>
+            <a:ext cx="6949440" cy="274320"/>
+          </a:xfrm>
+          <a:prstGeom prst="rect">
+            <a:avLst/>
+          </a:prstGeom>
+          <a:noFill/>
+          <a:ln/>
+        </p:spPr>
+        <p:txBody>
+          <a:bodyPr wrap="square" lIns="0" tIns="0" rIns="0" bIns="0" rtlCol="0" anchor="ctr"/>
+          <a:lstStyle/>
+          <a:p>
+            <a:pPr indent="0" marL="0">
+              <a:buNone/>
+            </a:pPr>
+            <a:r>
+              <a:rPr lang="en-US" sz="900" dirty="0">
+                <a:solidFill>
+                  <a:srgbClr val="64748B"/>
+                </a:solidFill>
+                <a:latin typeface="Calibri" pitchFamily="34" charset="0"/>
+                <a:ea typeface="Calibri" pitchFamily="34" charset="-122"/>
+                <a:cs typeface="Calibri" pitchFamily="34" charset="-120"/>
+              </a:rPr>
+              <a:t>Software Security · Week 6</a:t>
+            </a:r>
+            <a:endParaRPr lang="en-US" sz="900" dirty="0"/>
+          </a:p>
+        </p:txBody>
+      </p:sp>
+      <p:pic>
+        <p:nvPicPr>
+          <p:cNvPr id="8" name="Image 1" descr="/Users/pop7/Library/CloudStorage/OneDrive-MonsterConnectCo.,Ltd/Lecture/KOSEN69 - software-security/slides/pptx/assets/logo-small.png">    </p:cNvPr>
+          <p:cNvPicPr>
+            <a:picLocks noChangeAspect="1"/>
+          </p:cNvPicPr>
+          <p:nvPr/>
+        </p:nvPicPr>
+        <p:blipFill>
+          <a:blip r:embed="rId2"/>
+          <a:stretch>
+            <a:fillRect/>
+          </a:stretch>
+        </p:blipFill>
+        <p:spPr>
+          <a:xfrm>
+            <a:off x="7882128" y="4700016"/>
+            <a:ext cx="768096" cy="356616"/>
+          </a:xfrm>
+          <a:prstGeom prst="rect">
+            <a:avLst/>
+          </a:prstGeom>
+        </p:spPr>
+      </p:pic>
+    </p:spTree>
+  </p:cSld>
+  <p:clrMapOvr>
+    <a:masterClrMapping/>
+  </p:clrMapOvr>
+</p:sld>
+</file>
+
+<file path=ppt/slides/slide18.xml><?xml version="1.0" encoding="utf-8"?>
+<p:sld xmlns:a="http://schemas.openxmlformats.org/drawingml/2006/main" xmlns:r="http://schemas.openxmlformats.org/officeDocument/2006/relationships" xmlns:p="http://schemas.openxmlformats.org/presentationml/2006/main">
+  <p:cSld name="Slide 18">
+    <p:bg>
+      <p:bgPr>
+        <a:solidFill>
+          <a:srgbClr val="FFFFFF"/>
+        </a:solidFill>
+      </p:bgPr>
+    </p:bg>
+    <p:spTree>
+      <p:nvGrpSpPr>
+        <p:cNvPr id="1" name=""/>
+        <p:cNvGrpSpPr/>
+        <p:nvPr/>
+      </p:nvGrpSpPr>
+      <p:grpSpPr>
+        <a:xfrm>
+          <a:off x="0" y="0"/>
+          <a:ext cx="0" cy="0"/>
+          <a:chOff x="0" y="0"/>
+          <a:chExt cx="0" cy="0"/>
+        </a:xfrm>
+      </p:grpSpPr>
+      <p:sp>
+        <p:nvSpPr>
+          <p:cNvPr id="2" name="Shape 0"/>
+          <p:cNvSpPr/>
+          <p:nvPr/>
+        </p:nvSpPr>
+        <p:spPr>
+          <a:xfrm>
+            <a:off x="457200" y="384048"/>
+            <a:ext cx="530352" cy="530352"/>
+          </a:xfrm>
+          <a:prstGeom prst="ellipse">
+            <a:avLst/>
+          </a:prstGeom>
+          <a:solidFill>
+            <a:srgbClr val="E35205"/>
+          </a:solidFill>
+          <a:ln/>
+          <a:effectLst>
+            <a:outerShdw sx="100000" sy="100000" kx="0" ky="0" algn="bl" rotWithShape="0" blurRad="76200" dist="25400" dir="5400000">
+              <a:srgbClr val="000000">
+                <a:alpha val="12000"/>
+              </a:srgbClr>
+            </a:outerShdw>
+          </a:effectLst>
+        </p:spPr>
+      </p:sp>
+      <p:pic>
+        <p:nvPicPr>
+          <p:cNvPr id="3" name="Image 0" descr="preencoded.png">    </p:cNvPr>
+          <p:cNvPicPr>
+            <a:picLocks noChangeAspect="1"/>
+          </p:cNvPicPr>
+          <p:nvPr/>
+        </p:nvPicPr>
+        <p:blipFill>
+          <a:blip r:embed="rId1"/>
+          <a:stretch>
+            <a:fillRect/>
+          </a:stretch>
+        </p:blipFill>
+        <p:spPr>
+          <a:xfrm>
+            <a:off x="594360" y="521208"/>
+            <a:ext cx="256032" cy="256032"/>
+          </a:xfrm>
+          <a:prstGeom prst="rect">
+            <a:avLst/>
+          </a:prstGeom>
+        </p:spPr>
+      </p:pic>
+      <p:sp>
+        <p:nvSpPr>
+          <p:cNvPr id="4" name="Text 1"/>
+          <p:cNvSpPr/>
+          <p:nvPr/>
+        </p:nvSpPr>
+        <p:spPr>
+          <a:xfrm>
+            <a:off x="1143000" y="329184"/>
+            <a:ext cx="7498080" cy="603504"/>
+          </a:xfrm>
+          <a:prstGeom prst="rect">
+            <a:avLst/>
+          </a:prstGeom>
+          <a:noFill/>
+          <a:ln/>
+        </p:spPr>
+        <p:txBody>
+          <a:bodyPr wrap="square" lIns="0" tIns="0" rIns="0" bIns="0" rtlCol="0" anchor="ctr"/>
+          <a:lstStyle/>
+          <a:p>
+            <a:pPr indent="0" marL="0">
+              <a:buNone/>
+            </a:pPr>
+            <a:r>
+              <a:rPr lang="en-US" sz="2600" b="1" dirty="0">
+                <a:solidFill>
+                  <a:srgbClr val="1F2937"/>
+                </a:solidFill>
+                <a:latin typeface="Arial" pitchFamily="34" charset="0"/>
+                <a:ea typeface="Arial" pitchFamily="34" charset="-122"/>
+                <a:cs typeface="Arial" pitchFamily="34" charset="-120"/>
+              </a:rPr>
+              <a:t>Defenses</a:t>
+            </a:r>
+            <a:endParaRPr lang="en-US" sz="2600" dirty="0"/>
+          </a:p>
+        </p:txBody>
+      </p:sp>
+      <p:sp>
+        <p:nvSpPr>
+          <p:cNvPr id="5" name="Shape 2"/>
+          <p:cNvSpPr/>
+          <p:nvPr/>
+        </p:nvSpPr>
+        <p:spPr>
+          <a:xfrm>
+            <a:off x="457200" y="1325880"/>
+            <a:ext cx="8229600" cy="2139696"/>
+          </a:xfrm>
+          <a:prstGeom prst="roundRect">
+            <a:avLst>
+              <a:gd name="adj" fmla="val 3419"/>
+            </a:avLst>
+          </a:prstGeom>
+          <a:solidFill>
+            <a:srgbClr val="F1F5F9"/>
+          </a:solidFill>
+          <a:ln/>
+          <a:effectLst>
+            <a:outerShdw sx="100000" sy="100000" kx="0" ky="0" algn="bl" rotWithShape="0" blurRad="76200" dist="25400" dir="5400000">
+              <a:srgbClr val="000000">
+                <a:alpha val="12000"/>
+              </a:srgbClr>
+            </a:outerShdw>
+          </a:effectLst>
+        </p:spPr>
+      </p:sp>
+      <p:sp>
+        <p:nvSpPr>
+          <p:cNvPr id="6" name="Text 3"/>
+          <p:cNvSpPr/>
+          <p:nvPr/>
+        </p:nvSpPr>
+        <p:spPr>
+          <a:xfrm>
+            <a:off x="731520" y="1435608"/>
+            <a:ext cx="7680960" cy="1920240"/>
+          </a:xfrm>
+          <a:prstGeom prst="rect">
+            <a:avLst/>
+          </a:prstGeom>
+          <a:noFill/>
+          <a:ln/>
+        </p:spPr>
+        <p:txBody>
+          <a:bodyPr wrap="square" lIns="0" tIns="0" rIns="0" bIns="0" rtlCol="0" anchor="t">
+            <a:normAutofit/>
+          </a:bodyPr>
+          <a:lstStyle/>
+          <a:p>
+            <a:pPr marL="342900" indent="-342900">
+              <a:spcAft>
+                <a:spcPts val="600"/>
+              </a:spcAft>
+              <a:buSzPct val="100000"/>
+              <a:buChar char="•"/>
+            </a:pPr>
+            <a:r>
+              <a:rPr lang="en-US" sz="1400" dirty="0">
+                <a:solidFill>
+                  <a:srgbClr val="1F2937"/>
+                </a:solidFill>
+                <a:latin typeface="Calibri" pitchFamily="34" charset="0"/>
+                <a:ea typeface="Calibri" pitchFamily="34" charset="-122"/>
+                <a:cs typeface="Calibri" pitchFamily="34" charset="-120"/>
+              </a:rPr>
+              <a:t>Server-side authorization on every request (deny by default)</a:t>
+            </a:r>
+            <a:endParaRPr lang="en-US" sz="1400" dirty="0"/>
+          </a:p>
+          <a:p>
+            <a:pPr marL="342900" indent="-342900">
+              <a:spcAft>
+                <a:spcPts val="600"/>
+              </a:spcAft>
+              <a:buSzPct val="100000"/>
+              <a:buChar char="•"/>
+            </a:pPr>
+            <a:r>
+              <a:rPr lang="en-US" sz="1400" dirty="0">
+                <a:solidFill>
+                  <a:srgbClr val="1F2937"/>
+                </a:solidFill>
+                <a:latin typeface="Calibri" pitchFamily="34" charset="0"/>
+                <a:ea typeface="Calibri" pitchFamily="34" charset="-122"/>
+                <a:cs typeface="Calibri" pitchFamily="34" charset="-120"/>
+              </a:rPr>
+              <a:t>Check ownership, not just authentication</a:t>
+            </a:r>
+            <a:endParaRPr lang="en-US" sz="1400" dirty="0"/>
+          </a:p>
+          <a:p>
+            <a:pPr marL="342900" indent="-342900">
+              <a:spcAft>
+                <a:spcPts val="600"/>
+              </a:spcAft>
+              <a:buSzPct val="100000"/>
+              <a:buChar char="•"/>
+            </a:pPr>
+            <a:r>
+              <a:rPr lang="en-US" sz="1400" dirty="0">
+                <a:solidFill>
+                  <a:srgbClr val="1F2937"/>
+                </a:solidFill>
+                <a:latin typeface="Calibri" pitchFamily="34" charset="0"/>
+                <a:ea typeface="Calibri" pitchFamily="34" charset="-122"/>
+                <a:cs typeface="Calibri" pitchFamily="34" charset="-120"/>
+              </a:rPr>
+              <a:t>Strong session tokens + proper expiry/rotation</a:t>
+            </a:r>
+            <a:endParaRPr lang="en-US" sz="1400" dirty="0"/>
+          </a:p>
+          <a:p>
+            <a:pPr marL="342900" indent="-342900">
+              <a:spcAft>
+                <a:spcPts val="600"/>
+              </a:spcAft>
+              <a:buSzPct val="100000"/>
+              <a:buChar char="•"/>
+            </a:pPr>
+            <a:r>
+              <a:rPr lang="en-US" sz="1400" dirty="0">
+                <a:solidFill>
+                  <a:srgbClr val="1F2937"/>
+                </a:solidFill>
+                <a:latin typeface="Calibri" pitchFamily="34" charset="0"/>
+                <a:ea typeface="Calibri" pitchFamily="34" charset="-122"/>
+                <a:cs typeface="Calibri" pitchFamily="34" charset="-120"/>
+              </a:rPr>
+              <a:t>Verify JWT signature, alg, exp, aud; keep secrets strong</a:t>
+            </a:r>
+            <a:endParaRPr lang="en-US" sz="1400" dirty="0"/>
+          </a:p>
+          <a:p>
+            <a:pPr marL="342900" indent="-342900">
+              <a:spcAft>
+                <a:spcPts val="600"/>
+              </a:spcAft>
+              <a:buSzPct val="100000"/>
+              <a:buChar char="•"/>
+            </a:pPr>
+            <a:r>
+              <a:rPr lang="en-US" sz="1400" dirty="0">
+                <a:solidFill>
+                  <a:srgbClr val="1F2937"/>
+                </a:solidFill>
+                <a:latin typeface="Calibri" pitchFamily="34" charset="0"/>
+                <a:ea typeface="Calibri" pitchFamily="34" charset="-122"/>
+                <a:cs typeface="Calibri" pitchFamily="34" charset="-120"/>
+              </a:rPr>
+              <a:t>RBAC / ABAC enforced centrally</a:t>
+            </a:r>
+            <a:endParaRPr lang="en-US" sz="1400" dirty="0"/>
+          </a:p>
+          <a:p>
+            <a:pPr marL="342900" indent="-342900">
+              <a:spcAft>
+                <a:spcPts val="600"/>
+              </a:spcAft>
+              <a:buSzPct val="100000"/>
+              <a:buChar char="•"/>
+            </a:pPr>
+            <a:r>
+              <a:rPr lang="en-US" sz="1400" dirty="0">
+                <a:solidFill>
+                  <a:srgbClr val="1F2937"/>
+                </a:solidFill>
+                <a:latin typeface="Calibri" pitchFamily="34" charset="0"/>
+                <a:ea typeface="Calibri" pitchFamily="34" charset="-122"/>
+                <a:cs typeface="Calibri" pitchFamily="34" charset="-120"/>
+              </a:rPr>
+              <a:t>Centralize the check — don't scatter if role==... everywhere</a:t>
+            </a:r>
+            <a:endParaRPr lang="en-US" sz="1400" dirty="0"/>
+          </a:p>
+        </p:txBody>
+      </p:sp>
+      <p:sp>
+        <p:nvSpPr>
+          <p:cNvPr id="7" name="Text 4"/>
+          <p:cNvSpPr/>
+          <p:nvPr/>
+        </p:nvSpPr>
+        <p:spPr>
+          <a:xfrm>
+            <a:off x="457200" y="4800600"/>
+            <a:ext cx="6949440" cy="274320"/>
+          </a:xfrm>
+          <a:prstGeom prst="rect">
+            <a:avLst/>
+          </a:prstGeom>
+          <a:noFill/>
+          <a:ln/>
+        </p:spPr>
+        <p:txBody>
+          <a:bodyPr wrap="square" lIns="0" tIns="0" rIns="0" bIns="0" rtlCol="0" anchor="ctr"/>
+          <a:lstStyle/>
+          <a:p>
+            <a:pPr indent="0" marL="0">
+              <a:buNone/>
+            </a:pPr>
+            <a:r>
+              <a:rPr lang="en-US" sz="900" dirty="0">
+                <a:solidFill>
+                  <a:srgbClr val="64748B"/>
+                </a:solidFill>
+                <a:latin typeface="Calibri" pitchFamily="34" charset="0"/>
+                <a:ea typeface="Calibri" pitchFamily="34" charset="-122"/>
+                <a:cs typeface="Calibri" pitchFamily="34" charset="-120"/>
+              </a:rPr>
+              <a:t>Software Security · Week 6</a:t>
+            </a:r>
+            <a:endParaRPr lang="en-US" sz="900" dirty="0"/>
+          </a:p>
+        </p:txBody>
+      </p:sp>
+      <p:pic>
+        <p:nvPicPr>
+          <p:cNvPr id="8" name="Image 1" descr="/Users/pop7/Library/CloudStorage/OneDrive-MonsterConnectCo.,Ltd/Lecture/KOSEN69 - software-security/slides/pptx/assets/logo-small.png">    </p:cNvPr>
+          <p:cNvPicPr>
+            <a:picLocks noChangeAspect="1"/>
+          </p:cNvPicPr>
+          <p:nvPr/>
+        </p:nvPicPr>
+        <p:blipFill>
+          <a:blip r:embed="rId2"/>
+          <a:stretch>
+            <a:fillRect/>
+          </a:stretch>
+        </p:blipFill>
+        <p:spPr>
+          <a:xfrm>
+            <a:off x="7882128" y="4700016"/>
+            <a:ext cx="768096" cy="356616"/>
+          </a:xfrm>
+          <a:prstGeom prst="rect">
+            <a:avLst/>
+          </a:prstGeom>
+        </p:spPr>
+      </p:pic>
+    </p:spTree>
+  </p:cSld>
+  <p:clrMapOvr>
+    <a:masterClrMapping/>
+  </p:clrMapOvr>
+</p:sld>
+</file>
+
+<file path=ppt/slides/slide19.xml><?xml version="1.0" encoding="utf-8"?>
+<p:sld xmlns:a="http://schemas.openxmlformats.org/drawingml/2006/main" xmlns:r="http://schemas.openxmlformats.org/officeDocument/2006/relationships" xmlns:p="http://schemas.openxmlformats.org/presentationml/2006/main">
+  <p:cSld name="Slide 19">
+    <p:bg>
+      <p:bgPr>
+        <a:solidFill>
+          <a:srgbClr val="FFFFFF"/>
+        </a:solidFill>
+      </p:bgPr>
+    </p:bg>
+    <p:spTree>
+      <p:nvGrpSpPr>
+        <p:cNvPr id="1" name=""/>
+        <p:cNvGrpSpPr/>
+        <p:nvPr/>
+      </p:nvGrpSpPr>
+      <p:grpSpPr>
+        <a:xfrm>
+          <a:off x="0" y="0"/>
+          <a:ext cx="0" cy="0"/>
+          <a:chOff x="0" y="0"/>
+          <a:chExt cx="0" cy="0"/>
+        </a:xfrm>
+      </p:grpSpPr>
+      <p:sp>
+        <p:nvSpPr>
+          <p:cNvPr id="2" name="Shape 0"/>
+          <p:cNvSpPr/>
+          <p:nvPr/>
+        </p:nvSpPr>
+        <p:spPr>
+          <a:xfrm>
+            <a:off x="457200" y="384048"/>
+            <a:ext cx="530352" cy="530352"/>
+          </a:xfrm>
+          <a:prstGeom prst="ellipse">
+            <a:avLst/>
+          </a:prstGeom>
+          <a:solidFill>
+            <a:srgbClr val="E35205"/>
+          </a:solidFill>
+          <a:ln/>
+          <a:effectLst>
+            <a:outerShdw sx="100000" sy="100000" kx="0" ky="0" algn="bl" rotWithShape="0" blurRad="76200" dist="25400" dir="5400000">
+              <a:srgbClr val="000000">
+                <a:alpha val="12000"/>
+              </a:srgbClr>
+            </a:outerShdw>
+          </a:effectLst>
+        </p:spPr>
+      </p:sp>
+      <p:pic>
+        <p:nvPicPr>
+          <p:cNvPr id="3" name="Image 0" descr="preencoded.png">    </p:cNvPr>
+          <p:cNvPicPr>
+            <a:picLocks noChangeAspect="1"/>
+          </p:cNvPicPr>
+          <p:nvPr/>
+        </p:nvPicPr>
+        <p:blipFill>
+          <a:blip r:embed="rId1"/>
+          <a:stretch>
+            <a:fillRect/>
+          </a:stretch>
+        </p:blipFill>
+        <p:spPr>
+          <a:xfrm>
+            <a:off x="594360" y="521208"/>
+            <a:ext cx="256032" cy="256032"/>
+          </a:xfrm>
+          <a:prstGeom prst="rect">
+            <a:avLst/>
+          </a:prstGeom>
+        </p:spPr>
+      </p:pic>
+      <p:sp>
+        <p:nvSpPr>
+          <p:cNvPr id="4" name="Text 1"/>
+          <p:cNvSpPr/>
+          <p:nvPr/>
+        </p:nvSpPr>
+        <p:spPr>
+          <a:xfrm>
+            <a:off x="1143000" y="329184"/>
+            <a:ext cx="7498080" cy="603504"/>
+          </a:xfrm>
+          <a:prstGeom prst="rect">
+            <a:avLst/>
+          </a:prstGeom>
+          <a:noFill/>
+          <a:ln/>
+        </p:spPr>
+        <p:txBody>
+          <a:bodyPr wrap="square" lIns="0" tIns="0" rIns="0" bIns="0" rtlCol="0" anchor="ctr"/>
+          <a:lstStyle/>
+          <a:p>
+            <a:pPr indent="0" marL="0">
+              <a:buNone/>
+            </a:pPr>
+            <a:r>
+              <a:rPr lang="en-US" sz="2600" b="1" dirty="0">
+                <a:solidFill>
+                  <a:srgbClr val="1F2937"/>
+                </a:solidFill>
+                <a:latin typeface="Arial" pitchFamily="34" charset="0"/>
+                <a:ea typeface="Arial" pitchFamily="34" charset="-122"/>
+                <a:cs typeface="Arial" pitchFamily="34" charset="-120"/>
+              </a:rPr>
               <a:t>Tool — Burp Suite workflow</a:t>
             </a:r>
             <a:endParaRPr lang="en-US" sz="2600" dirty="0"/>
@@ -5695,7 +7013,7 @@
       </p:sp>
       <p:graphicFrame>
         <p:nvGraphicFramePr>
-          <p:cNvPr id="17" name="Table 0"/>
+          <p:cNvPr id="20" name="Table 0"/>
           <p:cNvGraphicFramePr>
             <a:graphicFrameLocks noGrp="1"/>
           </p:cNvGraphicFramePr>
@@ -6509,1461 +7827,6 @@
 </p:sld>
 </file>
 
-<file path=ppt/slides/slide17.xml><?xml version="1.0" encoding="utf-8"?>
-<p:sld xmlns:a="http://schemas.openxmlformats.org/drawingml/2006/main" xmlns:r="http://schemas.openxmlformats.org/officeDocument/2006/relationships" xmlns:p="http://schemas.openxmlformats.org/presentationml/2006/main">
-  <p:cSld name="Slide 17">
-    <p:bg>
-      <p:bgPr>
-        <a:solidFill>
-          <a:srgbClr val="FFFFFF"/>
-        </a:solidFill>
-      </p:bgPr>
-    </p:bg>
-    <p:spTree>
-      <p:nvGrpSpPr>
-        <p:cNvPr id="1" name=""/>
-        <p:cNvGrpSpPr/>
-        <p:nvPr/>
-      </p:nvGrpSpPr>
-      <p:grpSpPr>
-        <a:xfrm>
-          <a:off x="0" y="0"/>
-          <a:ext cx="0" cy="0"/>
-          <a:chOff x="0" y="0"/>
-          <a:chExt cx="0" cy="0"/>
-        </a:xfrm>
-      </p:grpSpPr>
-      <p:sp>
-        <p:nvSpPr>
-          <p:cNvPr id="2" name="Shape 0"/>
-          <p:cNvSpPr/>
-          <p:nvPr/>
-        </p:nvSpPr>
-        <p:spPr>
-          <a:xfrm>
-            <a:off x="457200" y="384048"/>
-            <a:ext cx="530352" cy="530352"/>
-          </a:xfrm>
-          <a:prstGeom prst="ellipse">
-            <a:avLst/>
-          </a:prstGeom>
-          <a:solidFill>
-            <a:srgbClr val="E35205"/>
-          </a:solidFill>
-          <a:ln/>
-          <a:effectLst>
-            <a:outerShdw sx="100000" sy="100000" kx="0" ky="0" algn="bl" rotWithShape="0" blurRad="76200" dist="25400" dir="5400000">
-              <a:srgbClr val="000000">
-                <a:alpha val="12000"/>
-              </a:srgbClr>
-            </a:outerShdw>
-          </a:effectLst>
-        </p:spPr>
-      </p:sp>
-      <p:pic>
-        <p:nvPicPr>
-          <p:cNvPr id="3" name="Image 0" descr="preencoded.png">    </p:cNvPr>
-          <p:cNvPicPr>
-            <a:picLocks noChangeAspect="1"/>
-          </p:cNvPicPr>
-          <p:nvPr/>
-        </p:nvPicPr>
-        <p:blipFill>
-          <a:blip r:embed="rId1"/>
-          <a:stretch>
-            <a:fillRect/>
-          </a:stretch>
-        </p:blipFill>
-        <p:spPr>
-          <a:xfrm>
-            <a:off x="594360" y="521208"/>
-            <a:ext cx="256032" cy="256032"/>
-          </a:xfrm>
-          <a:prstGeom prst="rect">
-            <a:avLst/>
-          </a:prstGeom>
-        </p:spPr>
-      </p:pic>
-      <p:sp>
-        <p:nvSpPr>
-          <p:cNvPr id="4" name="Text 1"/>
-          <p:cNvSpPr/>
-          <p:nvPr/>
-        </p:nvSpPr>
-        <p:spPr>
-          <a:xfrm>
-            <a:off x="1143000" y="329184"/>
-            <a:ext cx="7498080" cy="603504"/>
-          </a:xfrm>
-          <a:prstGeom prst="rect">
-            <a:avLst/>
-          </a:prstGeom>
-          <a:noFill/>
-          <a:ln/>
-        </p:spPr>
-        <p:txBody>
-          <a:bodyPr wrap="square" lIns="0" tIns="0" rIns="0" bIns="0" rtlCol="0" anchor="ctr"/>
-          <a:lstStyle/>
-          <a:p>
-            <a:pPr indent="0" marL="0">
-              <a:buNone/>
-            </a:pPr>
-            <a:r>
-              <a:rPr lang="en-US" sz="2600" b="1" dirty="0">
-                <a:solidFill>
-                  <a:srgbClr val="1F2937"/>
-                </a:solidFill>
-                <a:latin typeface="Arial" pitchFamily="34" charset="0"/>
-                <a:ea typeface="Arial" pitchFamily="34" charset="-122"/>
-                <a:cs typeface="Arial" pitchFamily="34" charset="-120"/>
-              </a:rPr>
-              <a:t>🗺️ Game — IDOR Treasure Hunt + JWT Forgery</a:t>
-            </a:r>
-            <a:endParaRPr lang="en-US" sz="2600" dirty="0"/>
-          </a:p>
-        </p:txBody>
-      </p:sp>
-      <p:sp>
-        <p:nvSpPr>
-          <p:cNvPr id="5" name="Shape 2"/>
-          <p:cNvSpPr/>
-          <p:nvPr/>
-        </p:nvSpPr>
-        <p:spPr>
-          <a:xfrm>
-            <a:off x="502920" y="1325880"/>
-            <a:ext cx="384048" cy="384048"/>
-          </a:xfrm>
-          <a:prstGeom prst="ellipse">
-            <a:avLst/>
-          </a:prstGeom>
-          <a:solidFill>
-            <a:srgbClr val="E35205"/>
-          </a:solidFill>
-          <a:ln/>
-        </p:spPr>
-      </p:sp>
-      <p:sp>
-        <p:nvSpPr>
-          <p:cNvPr id="6" name="Text 3"/>
-          <p:cNvSpPr/>
-          <p:nvPr/>
-        </p:nvSpPr>
-        <p:spPr>
-          <a:xfrm>
-            <a:off x="502920" y="1325880"/>
-            <a:ext cx="384048" cy="384048"/>
-          </a:xfrm>
-          <a:prstGeom prst="rect">
-            <a:avLst/>
-          </a:prstGeom>
-          <a:noFill/>
-          <a:ln/>
-        </p:spPr>
-        <p:txBody>
-          <a:bodyPr wrap="square" lIns="0" tIns="0" rIns="0" bIns="0" rtlCol="0" anchor="ctr"/>
-          <a:lstStyle/>
-          <a:p>
-            <a:pPr algn="ctr" indent="0" marL="0">
-              <a:buNone/>
-            </a:pPr>
-            <a:r>
-              <a:rPr lang="en-US" sz="1500" b="1" dirty="0">
-                <a:solidFill>
-                  <a:srgbClr val="0E1726"/>
-                </a:solidFill>
-                <a:latin typeface="Arial" pitchFamily="34" charset="0"/>
-                <a:ea typeface="Arial" pitchFamily="34" charset="-122"/>
-                <a:cs typeface="Arial" pitchFamily="34" charset="-120"/>
-              </a:rPr>
-              <a:t>1</a:t>
-            </a:r>
-            <a:endParaRPr lang="en-US" sz="1500" dirty="0"/>
-          </a:p>
-        </p:txBody>
-      </p:sp>
-      <p:sp>
-        <p:nvSpPr>
-          <p:cNvPr id="7" name="Text 4"/>
-          <p:cNvSpPr/>
-          <p:nvPr/>
-        </p:nvSpPr>
-        <p:spPr>
-          <a:xfrm>
-            <a:off x="1051560" y="1325880"/>
-            <a:ext cx="7589520" cy="658368"/>
-          </a:xfrm>
-          <a:prstGeom prst="rect">
-            <a:avLst/>
-          </a:prstGeom>
-          <a:noFill/>
-          <a:ln/>
-        </p:spPr>
-        <p:txBody>
-          <a:bodyPr wrap="square" lIns="0" tIns="0" rIns="0" bIns="0" rtlCol="0" anchor="ctr">
-            <a:normAutofit/>
-          </a:bodyPr>
-          <a:lstStyle/>
-          <a:p>
-            <a:pPr indent="0" marL="0">
-              <a:buNone/>
-            </a:pPr>
-            <a:r>
-              <a:rPr lang="en-US" sz="1350" dirty="0">
-                <a:solidFill>
-                  <a:srgbClr val="1F2937"/>
-                </a:solidFill>
-                <a:latin typeface="Calibri" pitchFamily="34" charset="0"/>
-                <a:ea typeface="Calibri" pitchFamily="34" charset="-122"/>
-                <a:cs typeface="Calibri" pitchFamily="34" charset="-120"/>
-              </a:rPr>
-              <a:t>Tamper object IDs to reach another user's data (horizontal — become "bob," not admin) → each secret = a flag</a:t>
-            </a:r>
-            <a:endParaRPr lang="en-US" sz="1350" dirty="0"/>
-          </a:p>
-        </p:txBody>
-      </p:sp>
-      <p:sp>
-        <p:nvSpPr>
-          <p:cNvPr id="8" name="Shape 5"/>
-          <p:cNvSpPr/>
-          <p:nvPr/>
-        </p:nvSpPr>
-        <p:spPr>
-          <a:xfrm>
-            <a:off x="502920" y="2057400"/>
-            <a:ext cx="384048" cy="384048"/>
-          </a:xfrm>
-          <a:prstGeom prst="ellipse">
-            <a:avLst/>
-          </a:prstGeom>
-          <a:solidFill>
-            <a:srgbClr val="E35205"/>
-          </a:solidFill>
-          <a:ln/>
-        </p:spPr>
-      </p:sp>
-      <p:sp>
-        <p:nvSpPr>
-          <p:cNvPr id="9" name="Text 6"/>
-          <p:cNvSpPr/>
-          <p:nvPr/>
-        </p:nvSpPr>
-        <p:spPr>
-          <a:xfrm>
-            <a:off x="502920" y="2057400"/>
-            <a:ext cx="384048" cy="384048"/>
-          </a:xfrm>
-          <a:prstGeom prst="rect">
-            <a:avLst/>
-          </a:prstGeom>
-          <a:noFill/>
-          <a:ln/>
-        </p:spPr>
-        <p:txBody>
-          <a:bodyPr wrap="square" lIns="0" tIns="0" rIns="0" bIns="0" rtlCol="0" anchor="ctr"/>
-          <a:lstStyle/>
-          <a:p>
-            <a:pPr algn="ctr" indent="0" marL="0">
-              <a:buNone/>
-            </a:pPr>
-            <a:r>
-              <a:rPr lang="en-US" sz="1500" b="1" dirty="0">
-                <a:solidFill>
-                  <a:srgbClr val="0E1726"/>
-                </a:solidFill>
-                <a:latin typeface="Arial" pitchFamily="34" charset="0"/>
-                <a:ea typeface="Arial" pitchFamily="34" charset="-122"/>
-                <a:cs typeface="Arial" pitchFamily="34" charset="-120"/>
-              </a:rPr>
-              <a:t>2</a:t>
-            </a:r>
-            <a:endParaRPr lang="en-US" sz="1500" dirty="0"/>
-          </a:p>
-        </p:txBody>
-      </p:sp>
-      <p:sp>
-        <p:nvSpPr>
-          <p:cNvPr id="10" name="Text 7"/>
-          <p:cNvSpPr/>
-          <p:nvPr/>
-        </p:nvSpPr>
-        <p:spPr>
-          <a:xfrm>
-            <a:off x="1051560" y="2057400"/>
-            <a:ext cx="7589520" cy="402336"/>
-          </a:xfrm>
-          <a:prstGeom prst="rect">
-            <a:avLst/>
-          </a:prstGeom>
-          <a:noFill/>
-          <a:ln/>
-        </p:spPr>
-        <p:txBody>
-          <a:bodyPr wrap="square" lIns="0" tIns="0" rIns="0" bIns="0" rtlCol="0" anchor="ctr">
-            <a:normAutofit/>
-          </a:bodyPr>
-          <a:lstStyle/>
-          <a:p>
-            <a:pPr indent="0" marL="0">
-              <a:buNone/>
-            </a:pPr>
-            <a:r>
-              <a:rPr lang="en-US" sz="1350" dirty="0">
-                <a:solidFill>
-                  <a:srgbClr val="1F2937"/>
-                </a:solidFill>
-                <a:latin typeface="Calibri" pitchFamily="34" charset="0"/>
-                <a:ea typeface="Calibri" pitchFamily="34" charset="-122"/>
-                <a:cs typeface="Calibri" pitchFamily="34" charset="-120"/>
-              </a:rPr>
-              <a:t>Forge a weak JWT two ways: alg:none, then crack the hardcoded HMAC secret</a:t>
-            </a:r>
-            <a:endParaRPr lang="en-US" sz="1350" dirty="0"/>
-          </a:p>
-        </p:txBody>
-      </p:sp>
-      <p:sp>
-        <p:nvSpPr>
-          <p:cNvPr id="11" name="Shape 8"/>
-          <p:cNvSpPr/>
-          <p:nvPr/>
-        </p:nvSpPr>
-        <p:spPr>
-          <a:xfrm>
-            <a:off x="502920" y="2532888"/>
-            <a:ext cx="384048" cy="384048"/>
-          </a:xfrm>
-          <a:prstGeom prst="ellipse">
-            <a:avLst/>
-          </a:prstGeom>
-          <a:solidFill>
-            <a:srgbClr val="E35205"/>
-          </a:solidFill>
-          <a:ln/>
-        </p:spPr>
-      </p:sp>
-      <p:sp>
-        <p:nvSpPr>
-          <p:cNvPr id="12" name="Text 9"/>
-          <p:cNvSpPr/>
-          <p:nvPr/>
-        </p:nvSpPr>
-        <p:spPr>
-          <a:xfrm>
-            <a:off x="502920" y="2532888"/>
-            <a:ext cx="384048" cy="384048"/>
-          </a:xfrm>
-          <a:prstGeom prst="rect">
-            <a:avLst/>
-          </a:prstGeom>
-          <a:noFill/>
-          <a:ln/>
-        </p:spPr>
-        <p:txBody>
-          <a:bodyPr wrap="square" lIns="0" tIns="0" rIns="0" bIns="0" rtlCol="0" anchor="ctr"/>
-          <a:lstStyle/>
-          <a:p>
-            <a:pPr algn="ctr" indent="0" marL="0">
-              <a:buNone/>
-            </a:pPr>
-            <a:r>
-              <a:rPr lang="en-US" sz="1500" b="1" dirty="0">
-                <a:solidFill>
-                  <a:srgbClr val="0E1726"/>
-                </a:solidFill>
-                <a:latin typeface="Arial" pitchFamily="34" charset="0"/>
-                <a:ea typeface="Arial" pitchFamily="34" charset="-122"/>
-                <a:cs typeface="Arial" pitchFamily="34" charset="-120"/>
-              </a:rPr>
-              <a:t>3</a:t>
-            </a:r>
-            <a:endParaRPr lang="en-US" sz="1500" dirty="0"/>
-          </a:p>
-        </p:txBody>
-      </p:sp>
-      <p:sp>
-        <p:nvSpPr>
-          <p:cNvPr id="13" name="Text 10"/>
-          <p:cNvSpPr/>
-          <p:nvPr/>
-        </p:nvSpPr>
-        <p:spPr>
-          <a:xfrm>
-            <a:off x="1051560" y="2532888"/>
-            <a:ext cx="7589520" cy="658368"/>
-          </a:xfrm>
-          <a:prstGeom prst="rect">
-            <a:avLst/>
-          </a:prstGeom>
-          <a:noFill/>
-          <a:ln/>
-        </p:spPr>
-        <p:txBody>
-          <a:bodyPr wrap="square" lIns="0" tIns="0" rIns="0" bIns="0" rtlCol="0" anchor="ctr">
-            <a:normAutofit/>
-          </a:bodyPr>
-          <a:lstStyle/>
-          <a:p>
-            <a:pPr indent="0" marL="0">
-              <a:buNone/>
-            </a:pPr>
-            <a:r>
-              <a:rPr lang="en-US" sz="1350" dirty="0">
-                <a:solidFill>
-                  <a:srgbClr val="1F2937"/>
-                </a:solidFill>
-                <a:latin typeface="Calibri" pitchFamily="34" charset="0"/>
-                <a:ea typeface="Calibri" pitchFamily="34" charset="-122"/>
-                <a:cs typeface="Calibri" pitchFamily="34" charset="-120"/>
-              </a:rPr>
-              <a:t>Defend: switch to solution_app.py (already fixed), prove it blocks all three attacks (403 + two 401s), cite the exact fix line for each</a:t>
-            </a:r>
-            <a:endParaRPr lang="en-US" sz="1350" dirty="0"/>
-          </a:p>
-        </p:txBody>
-      </p:sp>
-      <p:sp>
-        <p:nvSpPr>
-          <p:cNvPr id="14" name="Text 11"/>
-          <p:cNvSpPr/>
-          <p:nvPr/>
-        </p:nvSpPr>
-        <p:spPr>
-          <a:xfrm>
-            <a:off x="457200" y="4800600"/>
-            <a:ext cx="6949440" cy="274320"/>
-          </a:xfrm>
-          <a:prstGeom prst="rect">
-            <a:avLst/>
-          </a:prstGeom>
-          <a:noFill/>
-          <a:ln/>
-        </p:spPr>
-        <p:txBody>
-          <a:bodyPr wrap="square" lIns="0" tIns="0" rIns="0" bIns="0" rtlCol="0" anchor="ctr"/>
-          <a:lstStyle/>
-          <a:p>
-            <a:pPr indent="0" marL="0">
-              <a:buNone/>
-            </a:pPr>
-            <a:r>
-              <a:rPr lang="en-US" sz="900" dirty="0">
-                <a:solidFill>
-                  <a:srgbClr val="64748B"/>
-                </a:solidFill>
-                <a:latin typeface="Calibri" pitchFamily="34" charset="0"/>
-                <a:ea typeface="Calibri" pitchFamily="34" charset="-122"/>
-                <a:cs typeface="Calibri" pitchFamily="34" charset="-120"/>
-              </a:rPr>
-              <a:t>Software Security · Week 6</a:t>
-            </a:r>
-            <a:endParaRPr lang="en-US" sz="900" dirty="0"/>
-          </a:p>
-        </p:txBody>
-      </p:sp>
-      <p:pic>
-        <p:nvPicPr>
-          <p:cNvPr id="15" name="Image 1" descr="/Users/pop7/Library/CloudStorage/OneDrive-MonsterConnectCo.,Ltd/Lecture/KOSEN69 - software-security/slides/pptx/assets/logo-small.png">    </p:cNvPr>
-          <p:cNvPicPr>
-            <a:picLocks noChangeAspect="1"/>
-          </p:cNvPicPr>
-          <p:nvPr/>
-        </p:nvPicPr>
-        <p:blipFill>
-          <a:blip r:embed="rId2"/>
-          <a:stretch>
-            <a:fillRect/>
-          </a:stretch>
-        </p:blipFill>
-        <p:spPr>
-          <a:xfrm>
-            <a:off x="7882128" y="4700016"/>
-            <a:ext cx="768096" cy="356616"/>
-          </a:xfrm>
-          <a:prstGeom prst="rect">
-            <a:avLst/>
-          </a:prstGeom>
-        </p:spPr>
-      </p:pic>
-    </p:spTree>
-  </p:cSld>
-  <p:clrMapOvr>
-    <a:masterClrMapping/>
-  </p:clrMapOvr>
-</p:sld>
-</file>
-
-<file path=ppt/slides/slide18.xml><?xml version="1.0" encoding="utf-8"?>
-<p:sld xmlns:a="http://schemas.openxmlformats.org/drawingml/2006/main" xmlns:r="http://schemas.openxmlformats.org/officeDocument/2006/relationships" xmlns:p="http://schemas.openxmlformats.org/presentationml/2006/main">
-  <p:cSld name="Slide 18">
-    <p:bg>
-      <p:bgPr>
-        <a:solidFill>
-          <a:srgbClr val="FFFFFF"/>
-        </a:solidFill>
-      </p:bgPr>
-    </p:bg>
-    <p:spTree>
-      <p:nvGrpSpPr>
-        <p:cNvPr id="1" name=""/>
-        <p:cNvGrpSpPr/>
-        <p:nvPr/>
-      </p:nvGrpSpPr>
-      <p:grpSpPr>
-        <a:xfrm>
-          <a:off x="0" y="0"/>
-          <a:ext cx="0" cy="0"/>
-          <a:chOff x="0" y="0"/>
-          <a:chExt cx="0" cy="0"/>
-        </a:xfrm>
-      </p:grpSpPr>
-      <p:sp>
-        <p:nvSpPr>
-          <p:cNvPr id="2" name="Shape 0"/>
-          <p:cNvSpPr/>
-          <p:nvPr/>
-        </p:nvSpPr>
-        <p:spPr>
-          <a:xfrm>
-            <a:off x="457200" y="384048"/>
-            <a:ext cx="530352" cy="530352"/>
-          </a:xfrm>
-          <a:prstGeom prst="ellipse">
-            <a:avLst/>
-          </a:prstGeom>
-          <a:solidFill>
-            <a:srgbClr val="E35205"/>
-          </a:solidFill>
-          <a:ln/>
-          <a:effectLst>
-            <a:outerShdw sx="100000" sy="100000" kx="0" ky="0" algn="bl" rotWithShape="0" blurRad="76200" dist="25400" dir="5400000">
-              <a:srgbClr val="000000">
-                <a:alpha val="12000"/>
-              </a:srgbClr>
-            </a:outerShdw>
-          </a:effectLst>
-        </p:spPr>
-      </p:sp>
-      <p:pic>
-        <p:nvPicPr>
-          <p:cNvPr id="3" name="Image 0" descr="preencoded.png">    </p:cNvPr>
-          <p:cNvPicPr>
-            <a:picLocks noChangeAspect="1"/>
-          </p:cNvPicPr>
-          <p:nvPr/>
-        </p:nvPicPr>
-        <p:blipFill>
-          <a:blip r:embed="rId1"/>
-          <a:stretch>
-            <a:fillRect/>
-          </a:stretch>
-        </p:blipFill>
-        <p:spPr>
-          <a:xfrm>
-            <a:off x="594360" y="521208"/>
-            <a:ext cx="256032" cy="256032"/>
-          </a:xfrm>
-          <a:prstGeom prst="rect">
-            <a:avLst/>
-          </a:prstGeom>
-        </p:spPr>
-      </p:pic>
-      <p:sp>
-        <p:nvSpPr>
-          <p:cNvPr id="4" name="Text 1"/>
-          <p:cNvSpPr/>
-          <p:nvPr/>
-        </p:nvSpPr>
-        <p:spPr>
-          <a:xfrm>
-            <a:off x="1143000" y="329184"/>
-            <a:ext cx="7498080" cy="603504"/>
-          </a:xfrm>
-          <a:prstGeom prst="rect">
-            <a:avLst/>
-          </a:prstGeom>
-          <a:noFill/>
-          <a:ln/>
-        </p:spPr>
-        <p:txBody>
-          <a:bodyPr wrap="square" lIns="0" tIns="0" rIns="0" bIns="0" rtlCol="0" anchor="ctr"/>
-          <a:lstStyle/>
-          <a:p>
-            <a:pPr indent="0" marL="0">
-              <a:buNone/>
-            </a:pPr>
-            <a:r>
-              <a:rPr lang="en-US" sz="2600" b="1" dirty="0">
-                <a:solidFill>
-                  <a:srgbClr val="1F2937"/>
-                </a:solidFill>
-                <a:latin typeface="Arial" pitchFamily="34" charset="0"/>
-                <a:ea typeface="Arial" pitchFamily="34" charset="-122"/>
-                <a:cs typeface="Arial" pitchFamily="34" charset="-120"/>
-              </a:rPr>
-              <a:t>Lab steps</a:t>
-            </a:r>
-            <a:endParaRPr lang="en-US" sz="2600" dirty="0"/>
-          </a:p>
-        </p:txBody>
-      </p:sp>
-      <p:sp>
-        <p:nvSpPr>
-          <p:cNvPr id="5" name="Shape 2"/>
-          <p:cNvSpPr/>
-          <p:nvPr/>
-        </p:nvSpPr>
-        <p:spPr>
-          <a:xfrm>
-            <a:off x="457200" y="1325880"/>
-            <a:ext cx="8229600" cy="822960"/>
-          </a:xfrm>
-          <a:prstGeom prst="roundRect">
-            <a:avLst>
-              <a:gd name="adj" fmla="val 8889"/>
-            </a:avLst>
-          </a:prstGeom>
-          <a:solidFill>
-            <a:srgbClr val="E8EDF3"/>
-          </a:solidFill>
-          <a:ln/>
-        </p:spPr>
-      </p:sp>
-      <p:sp>
-        <p:nvSpPr>
-          <p:cNvPr id="6" name="Text 3"/>
-          <p:cNvSpPr/>
-          <p:nvPr/>
-        </p:nvSpPr>
-        <p:spPr>
-          <a:xfrm>
-            <a:off x="731520" y="1325880"/>
-            <a:ext cx="7680960" cy="822960"/>
-          </a:xfrm>
-          <a:prstGeom prst="rect">
-            <a:avLst/>
-          </a:prstGeom>
-          <a:noFill/>
-          <a:ln/>
-        </p:spPr>
-        <p:txBody>
-          <a:bodyPr wrap="square" lIns="0" tIns="0" rIns="0" bIns="0" rtlCol="0" anchor="ctr">
-            <a:normAutofit/>
-          </a:bodyPr>
-          <a:lstStyle/>
-          <a:p>
-            <a:pPr indent="0" marL="0">
-              <a:buNone/>
-            </a:pPr>
-            <a:r>
-              <a:rPr lang="en-US" sz="1400" i="1" dirty="0">
-                <a:solidFill>
-                  <a:srgbClr val="E35205"/>
-                </a:solidFill>
-                <a:latin typeface="Calibri" pitchFamily="34" charset="0"/>
-                <a:ea typeface="Calibri" pitchFamily="34" charset="-122"/>
-                <a:cs typeface="Calibri" pitchFamily="34" charset="-120"/>
-              </a:rPr>
-              <a:t>📋 Worksheet 6 — labs/week06-authn-authz/worksheet.md (Part 3) · kickoff: docker compose up → http://localhost:8080</a:t>
-            </a:r>
-            <a:endParaRPr lang="en-US" sz="1400" dirty="0"/>
-          </a:p>
-        </p:txBody>
-      </p:sp>
-      <p:sp>
-        <p:nvSpPr>
-          <p:cNvPr id="7" name="Shape 4"/>
-          <p:cNvSpPr/>
-          <p:nvPr/>
-        </p:nvSpPr>
-        <p:spPr>
-          <a:xfrm>
-            <a:off x="502920" y="2313432"/>
-            <a:ext cx="384048" cy="384048"/>
-          </a:xfrm>
-          <a:prstGeom prst="ellipse">
-            <a:avLst/>
-          </a:prstGeom>
-          <a:solidFill>
-            <a:srgbClr val="E35205"/>
-          </a:solidFill>
-          <a:ln/>
-        </p:spPr>
-      </p:sp>
-      <p:sp>
-        <p:nvSpPr>
-          <p:cNvPr id="8" name="Text 5"/>
-          <p:cNvSpPr/>
-          <p:nvPr/>
-        </p:nvSpPr>
-        <p:spPr>
-          <a:xfrm>
-            <a:off x="502920" y="2313432"/>
-            <a:ext cx="384048" cy="384048"/>
-          </a:xfrm>
-          <a:prstGeom prst="rect">
-            <a:avLst/>
-          </a:prstGeom>
-          <a:noFill/>
-          <a:ln/>
-        </p:spPr>
-        <p:txBody>
-          <a:bodyPr wrap="square" lIns="0" tIns="0" rIns="0" bIns="0" rtlCol="0" anchor="ctr"/>
-          <a:lstStyle/>
-          <a:p>
-            <a:pPr algn="ctr" indent="0" marL="0">
-              <a:buNone/>
-            </a:pPr>
-            <a:r>
-              <a:rPr lang="en-US" sz="1500" b="1" dirty="0">
-                <a:solidFill>
-                  <a:srgbClr val="0E1726"/>
-                </a:solidFill>
-                <a:latin typeface="Arial" pitchFamily="34" charset="0"/>
-                <a:ea typeface="Arial" pitchFamily="34" charset="-122"/>
-                <a:cs typeface="Arial" pitchFamily="34" charset="-120"/>
-              </a:rPr>
-              <a:t>1</a:t>
-            </a:r>
-            <a:endParaRPr lang="en-US" sz="1500" dirty="0"/>
-          </a:p>
-        </p:txBody>
-      </p:sp>
-      <p:sp>
-        <p:nvSpPr>
-          <p:cNvPr id="9" name="Text 6"/>
-          <p:cNvSpPr/>
-          <p:nvPr/>
-        </p:nvSpPr>
-        <p:spPr>
-          <a:xfrm>
-            <a:off x="1051560" y="2313432"/>
-            <a:ext cx="7589520" cy="402336"/>
-          </a:xfrm>
-          <a:prstGeom prst="rect">
-            <a:avLst/>
-          </a:prstGeom>
-          <a:noFill/>
-          <a:ln/>
-        </p:spPr>
-        <p:txBody>
-          <a:bodyPr wrap="square" lIns="0" tIns="0" rIns="0" bIns="0" rtlCol="0" anchor="ctr">
-            <a:normAutofit/>
-          </a:bodyPr>
-          <a:lstStyle/>
-          <a:p>
-            <a:pPr indent="0" marL="0">
-              <a:buNone/>
-            </a:pPr>
-            <a:r>
-              <a:rPr lang="en-US" sz="1350" dirty="0">
-                <a:solidFill>
-                  <a:srgbClr val="1F2937"/>
-                </a:solidFill>
-                <a:latin typeface="Calibri" pitchFamily="34" charset="0"/>
-                <a:ea typeface="Calibri" pitchFamily="34" charset="-122"/>
-                <a:cs typeface="Calibri" pitchFamily="34" charset="-120"/>
-              </a:rPr>
-              <a:t>Find IDOR endpoints; enumerate other users' objects</a:t>
-            </a:r>
-            <a:endParaRPr lang="en-US" sz="1350" dirty="0"/>
-          </a:p>
-        </p:txBody>
-      </p:sp>
-      <p:sp>
-        <p:nvSpPr>
-          <p:cNvPr id="10" name="Shape 7"/>
-          <p:cNvSpPr/>
-          <p:nvPr/>
-        </p:nvSpPr>
-        <p:spPr>
-          <a:xfrm>
-            <a:off x="502920" y="2788920"/>
-            <a:ext cx="384048" cy="384048"/>
-          </a:xfrm>
-          <a:prstGeom prst="ellipse">
-            <a:avLst/>
-          </a:prstGeom>
-          <a:solidFill>
-            <a:srgbClr val="E35205"/>
-          </a:solidFill>
-          <a:ln/>
-        </p:spPr>
-      </p:sp>
-      <p:sp>
-        <p:nvSpPr>
-          <p:cNvPr id="11" name="Text 8"/>
-          <p:cNvSpPr/>
-          <p:nvPr/>
-        </p:nvSpPr>
-        <p:spPr>
-          <a:xfrm>
-            <a:off x="502920" y="2788920"/>
-            <a:ext cx="384048" cy="384048"/>
-          </a:xfrm>
-          <a:prstGeom prst="rect">
-            <a:avLst/>
-          </a:prstGeom>
-          <a:noFill/>
-          <a:ln/>
-        </p:spPr>
-        <p:txBody>
-          <a:bodyPr wrap="square" lIns="0" tIns="0" rIns="0" bIns="0" rtlCol="0" anchor="ctr"/>
-          <a:lstStyle/>
-          <a:p>
-            <a:pPr algn="ctr" indent="0" marL="0">
-              <a:buNone/>
-            </a:pPr>
-            <a:r>
-              <a:rPr lang="en-US" sz="1500" b="1" dirty="0">
-                <a:solidFill>
-                  <a:srgbClr val="0E1726"/>
-                </a:solidFill>
-                <a:latin typeface="Arial" pitchFamily="34" charset="0"/>
-                <a:ea typeface="Arial" pitchFamily="34" charset="-122"/>
-                <a:cs typeface="Arial" pitchFamily="34" charset="-120"/>
-              </a:rPr>
-              <a:t>2</a:t>
-            </a:r>
-            <a:endParaRPr lang="en-US" sz="1500" dirty="0"/>
-          </a:p>
-        </p:txBody>
-      </p:sp>
-      <p:sp>
-        <p:nvSpPr>
-          <p:cNvPr id="12" name="Text 9"/>
-          <p:cNvSpPr/>
-          <p:nvPr/>
-        </p:nvSpPr>
-        <p:spPr>
-          <a:xfrm>
-            <a:off x="1051560" y="2788920"/>
-            <a:ext cx="7589520" cy="658368"/>
-          </a:xfrm>
-          <a:prstGeom prst="rect">
-            <a:avLst/>
-          </a:prstGeom>
-          <a:noFill/>
-          <a:ln/>
-        </p:spPr>
-        <p:txBody>
-          <a:bodyPr wrap="square" lIns="0" tIns="0" rIns="0" bIns="0" rtlCol="0" anchor="ctr">
-            <a:normAutofit/>
-          </a:bodyPr>
-          <a:lstStyle/>
-          <a:p>
-            <a:pPr indent="0" marL="0">
-              <a:buNone/>
-            </a:pPr>
-            <a:r>
-              <a:rPr lang="en-US" sz="1350" dirty="0">
-                <a:solidFill>
-                  <a:srgbClr val="1F2937"/>
-                </a:solidFill>
-                <a:latin typeface="Calibri" pitchFamily="34" charset="0"/>
-                <a:ea typeface="Calibri" pitchFamily="34" charset="-122"/>
-                <a:cs typeface="Calibri" pitchFamily="34" charset="-120"/>
-              </a:rPr>
-              <a:t>Crack/forge a weak JWT (alg:none AND the weak HMAC secret — two separate graded attacks)</a:t>
-            </a:r>
-            <a:endParaRPr lang="en-US" sz="1350" dirty="0"/>
-          </a:p>
-        </p:txBody>
-      </p:sp>
-      <p:sp>
-        <p:nvSpPr>
-          <p:cNvPr id="13" name="Shape 10"/>
-          <p:cNvSpPr/>
-          <p:nvPr/>
-        </p:nvSpPr>
-        <p:spPr>
-          <a:xfrm>
-            <a:off x="502920" y="3520440"/>
-            <a:ext cx="384048" cy="384048"/>
-          </a:xfrm>
-          <a:prstGeom prst="ellipse">
-            <a:avLst/>
-          </a:prstGeom>
-          <a:solidFill>
-            <a:srgbClr val="E35205"/>
-          </a:solidFill>
-          <a:ln/>
-        </p:spPr>
-      </p:sp>
-      <p:sp>
-        <p:nvSpPr>
-          <p:cNvPr id="14" name="Text 11"/>
-          <p:cNvSpPr/>
-          <p:nvPr/>
-        </p:nvSpPr>
-        <p:spPr>
-          <a:xfrm>
-            <a:off x="502920" y="3520440"/>
-            <a:ext cx="384048" cy="384048"/>
-          </a:xfrm>
-          <a:prstGeom prst="rect">
-            <a:avLst/>
-          </a:prstGeom>
-          <a:noFill/>
-          <a:ln/>
-        </p:spPr>
-        <p:txBody>
-          <a:bodyPr wrap="square" lIns="0" tIns="0" rIns="0" bIns="0" rtlCol="0" anchor="ctr"/>
-          <a:lstStyle/>
-          <a:p>
-            <a:pPr algn="ctr" indent="0" marL="0">
-              <a:buNone/>
-            </a:pPr>
-            <a:r>
-              <a:rPr lang="en-US" sz="1500" b="1" dirty="0">
-                <a:solidFill>
-                  <a:srgbClr val="0E1726"/>
-                </a:solidFill>
-                <a:latin typeface="Arial" pitchFamily="34" charset="0"/>
-                <a:ea typeface="Arial" pitchFamily="34" charset="-122"/>
-                <a:cs typeface="Arial" pitchFamily="34" charset="-120"/>
-              </a:rPr>
-              <a:t>3</a:t>
-            </a:r>
-            <a:endParaRPr lang="en-US" sz="1500" dirty="0"/>
-          </a:p>
-        </p:txBody>
-      </p:sp>
-      <p:sp>
-        <p:nvSpPr>
-          <p:cNvPr id="15" name="Text 12"/>
-          <p:cNvSpPr/>
-          <p:nvPr/>
-        </p:nvSpPr>
-        <p:spPr>
-          <a:xfrm>
-            <a:off x="1051560" y="3520440"/>
-            <a:ext cx="7589520" cy="402336"/>
-          </a:xfrm>
-          <a:prstGeom prst="rect">
-            <a:avLst/>
-          </a:prstGeom>
-          <a:noFill/>
-          <a:ln/>
-        </p:spPr>
-        <p:txBody>
-          <a:bodyPr wrap="square" lIns="0" tIns="0" rIns="0" bIns="0" rtlCol="0" anchor="ctr">
-            <a:normAutofit/>
-          </a:bodyPr>
-          <a:lstStyle/>
-          <a:p>
-            <a:pPr indent="0" marL="0">
-              <a:buNone/>
-            </a:pPr>
-            <a:r>
-              <a:rPr lang="en-US" sz="1350" dirty="0">
-                <a:solidFill>
-                  <a:srgbClr val="1F2937"/>
-                </a:solidFill>
-                <a:latin typeface="Calibri" pitchFamily="34" charset="0"/>
-                <a:ea typeface="Calibri" pitchFamily="34" charset="-122"/>
-                <a:cs typeface="Calibri" pitchFamily="34" charset="-120"/>
-              </a:rPr>
-              <a:t>Switch to solution_app.py; re-test: access denied</a:t>
-            </a:r>
-            <a:endParaRPr lang="en-US" sz="1350" dirty="0"/>
-          </a:p>
-        </p:txBody>
-      </p:sp>
-      <p:sp>
-        <p:nvSpPr>
-          <p:cNvPr id="16" name="Shape 13"/>
-          <p:cNvSpPr/>
-          <p:nvPr/>
-        </p:nvSpPr>
-        <p:spPr>
-          <a:xfrm>
-            <a:off x="502920" y="3995928"/>
-            <a:ext cx="384048" cy="384048"/>
-          </a:xfrm>
-          <a:prstGeom prst="ellipse">
-            <a:avLst/>
-          </a:prstGeom>
-          <a:solidFill>
-            <a:srgbClr val="E35205"/>
-          </a:solidFill>
-          <a:ln/>
-        </p:spPr>
-      </p:sp>
-      <p:sp>
-        <p:nvSpPr>
-          <p:cNvPr id="17" name="Text 14"/>
-          <p:cNvSpPr/>
-          <p:nvPr/>
-        </p:nvSpPr>
-        <p:spPr>
-          <a:xfrm>
-            <a:off x="502920" y="3995928"/>
-            <a:ext cx="384048" cy="384048"/>
-          </a:xfrm>
-          <a:prstGeom prst="rect">
-            <a:avLst/>
-          </a:prstGeom>
-          <a:noFill/>
-          <a:ln/>
-        </p:spPr>
-        <p:txBody>
-          <a:bodyPr wrap="square" lIns="0" tIns="0" rIns="0" bIns="0" rtlCol="0" anchor="ctr"/>
-          <a:lstStyle/>
-          <a:p>
-            <a:pPr algn="ctr" indent="0" marL="0">
-              <a:buNone/>
-            </a:pPr>
-            <a:r>
-              <a:rPr lang="en-US" sz="1500" b="1" dirty="0">
-                <a:solidFill>
-                  <a:srgbClr val="0E1726"/>
-                </a:solidFill>
-                <a:latin typeface="Arial" pitchFamily="34" charset="0"/>
-                <a:ea typeface="Arial" pitchFamily="34" charset="-122"/>
-                <a:cs typeface="Arial" pitchFamily="34" charset="-120"/>
-              </a:rPr>
-              <a:t>4</a:t>
-            </a:r>
-            <a:endParaRPr lang="en-US" sz="1500" dirty="0"/>
-          </a:p>
-        </p:txBody>
-      </p:sp>
-      <p:sp>
-        <p:nvSpPr>
-          <p:cNvPr id="18" name="Text 15"/>
-          <p:cNvSpPr/>
-          <p:nvPr/>
-        </p:nvSpPr>
-        <p:spPr>
-          <a:xfrm>
-            <a:off x="1051560" y="3995928"/>
-            <a:ext cx="7589520" cy="402336"/>
-          </a:xfrm>
-          <a:prstGeom prst="rect">
-            <a:avLst/>
-          </a:prstGeom>
-          <a:noFill/>
-          <a:ln/>
-        </p:spPr>
-        <p:txBody>
-          <a:bodyPr wrap="square" lIns="0" tIns="0" rIns="0" bIns="0" rtlCol="0" anchor="ctr">
-            <a:normAutofit/>
-          </a:bodyPr>
-          <a:lstStyle/>
-          <a:p>
-            <a:pPr indent="0" marL="0">
-              <a:buNone/>
-            </a:pPr>
-            <a:r>
-              <a:rPr lang="en-US" sz="1350" dirty="0">
-                <a:solidFill>
-                  <a:srgbClr val="1F2937"/>
-                </a:solidFill>
-                <a:latin typeface="Calibri" pitchFamily="34" charset="0"/>
-                <a:ea typeface="Calibri" pitchFamily="34" charset="-122"/>
-                <a:cs typeface="Calibri" pitchFamily="34" charset="-120"/>
-              </a:rPr>
-              <a:t>Cite the exact line that fixes each of the three attacks</a:t>
-            </a:r>
-            <a:endParaRPr lang="en-US" sz="1350" dirty="0"/>
-          </a:p>
-        </p:txBody>
-      </p:sp>
-      <p:sp>
-        <p:nvSpPr>
-          <p:cNvPr id="19" name="Text 16"/>
-          <p:cNvSpPr/>
-          <p:nvPr/>
-        </p:nvSpPr>
-        <p:spPr>
-          <a:xfrm>
-            <a:off x="457200" y="4800600"/>
-            <a:ext cx="6949440" cy="274320"/>
-          </a:xfrm>
-          <a:prstGeom prst="rect">
-            <a:avLst/>
-          </a:prstGeom>
-          <a:noFill/>
-          <a:ln/>
-        </p:spPr>
-        <p:txBody>
-          <a:bodyPr wrap="square" lIns="0" tIns="0" rIns="0" bIns="0" rtlCol="0" anchor="ctr"/>
-          <a:lstStyle/>
-          <a:p>
-            <a:pPr indent="0" marL="0">
-              <a:buNone/>
-            </a:pPr>
-            <a:r>
-              <a:rPr lang="en-US" sz="900" dirty="0">
-                <a:solidFill>
-                  <a:srgbClr val="64748B"/>
-                </a:solidFill>
-                <a:latin typeface="Calibri" pitchFamily="34" charset="0"/>
-                <a:ea typeface="Calibri" pitchFamily="34" charset="-122"/>
-                <a:cs typeface="Calibri" pitchFamily="34" charset="-120"/>
-              </a:rPr>
-              <a:t>Software Security · Week 6</a:t>
-            </a:r>
-            <a:endParaRPr lang="en-US" sz="900" dirty="0"/>
-          </a:p>
-        </p:txBody>
-      </p:sp>
-      <p:pic>
-        <p:nvPicPr>
-          <p:cNvPr id="20" name="Image 1" descr="/Users/pop7/Library/CloudStorage/OneDrive-MonsterConnectCo.,Ltd/Lecture/KOSEN69 - software-security/slides/pptx/assets/logo-small.png">    </p:cNvPr>
-          <p:cNvPicPr>
-            <a:picLocks noChangeAspect="1"/>
-          </p:cNvPicPr>
-          <p:nvPr/>
-        </p:nvPicPr>
-        <p:blipFill>
-          <a:blip r:embed="rId2"/>
-          <a:stretch>
-            <a:fillRect/>
-          </a:stretch>
-        </p:blipFill>
-        <p:spPr>
-          <a:xfrm>
-            <a:off x="7882128" y="4700016"/>
-            <a:ext cx="768096" cy="356616"/>
-          </a:xfrm>
-          <a:prstGeom prst="rect">
-            <a:avLst/>
-          </a:prstGeom>
-        </p:spPr>
-      </p:pic>
-    </p:spTree>
-  </p:cSld>
-  <p:clrMapOvr>
-    <a:masterClrMapping/>
-  </p:clrMapOvr>
-</p:sld>
-</file>
-
-<file path=ppt/slides/slide19.xml><?xml version="1.0" encoding="utf-8"?>
-<p:sld xmlns:a="http://schemas.openxmlformats.org/drawingml/2006/main" xmlns:r="http://schemas.openxmlformats.org/officeDocument/2006/relationships" xmlns:p="http://schemas.openxmlformats.org/presentationml/2006/main">
-  <p:cSld name="Slide 19">
-    <p:bg>
-      <p:bgPr>
-        <a:solidFill>
-          <a:srgbClr val="FFFFFF"/>
-        </a:solidFill>
-      </p:bgPr>
-    </p:bg>
-    <p:spTree>
-      <p:nvGrpSpPr>
-        <p:cNvPr id="1" name=""/>
-        <p:cNvGrpSpPr/>
-        <p:nvPr/>
-      </p:nvGrpSpPr>
-      <p:grpSpPr>
-        <a:xfrm>
-          <a:off x="0" y="0"/>
-          <a:ext cx="0" cy="0"/>
-          <a:chOff x="0" y="0"/>
-          <a:chExt cx="0" cy="0"/>
-        </a:xfrm>
-      </p:grpSpPr>
-      <p:sp>
-        <p:nvSpPr>
-          <p:cNvPr id="2" name="Shape 0"/>
-          <p:cNvSpPr/>
-          <p:nvPr/>
-        </p:nvSpPr>
-        <p:spPr>
-          <a:xfrm>
-            <a:off x="457200" y="384048"/>
-            <a:ext cx="530352" cy="530352"/>
-          </a:xfrm>
-          <a:prstGeom prst="ellipse">
-            <a:avLst/>
-          </a:prstGeom>
-          <a:solidFill>
-            <a:srgbClr val="E35205"/>
-          </a:solidFill>
-          <a:ln/>
-          <a:effectLst>
-            <a:outerShdw sx="100000" sy="100000" kx="0" ky="0" algn="bl" rotWithShape="0" blurRad="76200" dist="25400" dir="5400000">
-              <a:srgbClr val="000000">
-                <a:alpha val="12000"/>
-              </a:srgbClr>
-            </a:outerShdw>
-          </a:effectLst>
-        </p:spPr>
-      </p:sp>
-      <p:pic>
-        <p:nvPicPr>
-          <p:cNvPr id="3" name="Image 0" descr="preencoded.png">    </p:cNvPr>
-          <p:cNvPicPr>
-            <a:picLocks noChangeAspect="1"/>
-          </p:cNvPicPr>
-          <p:nvPr/>
-        </p:nvPicPr>
-        <p:blipFill>
-          <a:blip r:embed="rId1"/>
-          <a:stretch>
-            <a:fillRect/>
-          </a:stretch>
-        </p:blipFill>
-        <p:spPr>
-          <a:xfrm>
-            <a:off x="594360" y="521208"/>
-            <a:ext cx="256032" cy="256032"/>
-          </a:xfrm>
-          <a:prstGeom prst="rect">
-            <a:avLst/>
-          </a:prstGeom>
-        </p:spPr>
-      </p:pic>
-      <p:sp>
-        <p:nvSpPr>
-          <p:cNvPr id="4" name="Text 1"/>
-          <p:cNvSpPr/>
-          <p:nvPr/>
-        </p:nvSpPr>
-        <p:spPr>
-          <a:xfrm>
-            <a:off x="1143000" y="329184"/>
-            <a:ext cx="7498080" cy="603504"/>
-          </a:xfrm>
-          <a:prstGeom prst="rect">
-            <a:avLst/>
-          </a:prstGeom>
-          <a:noFill/>
-          <a:ln/>
-        </p:spPr>
-        <p:txBody>
-          <a:bodyPr wrap="square" lIns="0" tIns="0" rIns="0" bIns="0" rtlCol="0" anchor="ctr"/>
-          <a:lstStyle/>
-          <a:p>
-            <a:pPr indent="0" marL="0">
-              <a:buNone/>
-            </a:pPr>
-            <a:r>
-              <a:rPr lang="en-US" sz="2600" b="1" dirty="0">
-                <a:solidFill>
-                  <a:srgbClr val="1F2937"/>
-                </a:solidFill>
-                <a:latin typeface="Arial" pitchFamily="34" charset="0"/>
-                <a:ea typeface="Arial" pitchFamily="34" charset="-122"/>
-                <a:cs typeface="Arial" pitchFamily="34" charset="-120"/>
-              </a:rPr>
-              <a:t>Deliverable</a:t>
-            </a:r>
-            <a:endParaRPr lang="en-US" sz="2600" dirty="0"/>
-          </a:p>
-        </p:txBody>
-      </p:sp>
-      <p:sp>
-        <p:nvSpPr>
-          <p:cNvPr id="5" name="Shape 2"/>
-          <p:cNvSpPr/>
-          <p:nvPr/>
-        </p:nvSpPr>
-        <p:spPr>
-          <a:xfrm>
-            <a:off x="457200" y="1325880"/>
-            <a:ext cx="8229600" cy="1517904"/>
-          </a:xfrm>
-          <a:prstGeom prst="roundRect">
-            <a:avLst>
-              <a:gd name="adj" fmla="val 4819"/>
-            </a:avLst>
-          </a:prstGeom>
-          <a:solidFill>
-            <a:srgbClr val="F1F5F9"/>
-          </a:solidFill>
-          <a:ln/>
-          <a:effectLst>
-            <a:outerShdw sx="100000" sy="100000" kx="0" ky="0" algn="bl" rotWithShape="0" blurRad="76200" dist="25400" dir="5400000">
-              <a:srgbClr val="000000">
-                <a:alpha val="12000"/>
-              </a:srgbClr>
-            </a:outerShdw>
-          </a:effectLst>
-        </p:spPr>
-      </p:sp>
-      <p:sp>
-        <p:nvSpPr>
-          <p:cNvPr id="6" name="Text 3"/>
-          <p:cNvSpPr/>
-          <p:nvPr/>
-        </p:nvSpPr>
-        <p:spPr>
-          <a:xfrm>
-            <a:off x="731520" y="1435608"/>
-            <a:ext cx="7680960" cy="1298448"/>
-          </a:xfrm>
-          <a:prstGeom prst="rect">
-            <a:avLst/>
-          </a:prstGeom>
-          <a:noFill/>
-          <a:ln/>
-        </p:spPr>
-        <p:txBody>
-          <a:bodyPr wrap="square" lIns="0" tIns="0" rIns="0" bIns="0" rtlCol="0" anchor="t">
-            <a:normAutofit/>
-          </a:bodyPr>
-          <a:lstStyle/>
-          <a:p>
-            <a:pPr marL="342900" indent="-342900">
-              <a:spcAft>
-                <a:spcPts val="600"/>
-              </a:spcAft>
-              <a:buSzPct val="100000"/>
-              <a:buChar char="•"/>
-            </a:pPr>
-            <a:r>
-              <a:rPr lang="en-US" sz="1400" dirty="0">
-                <a:solidFill>
-                  <a:srgbClr val="1F2937"/>
-                </a:solidFill>
-                <a:latin typeface="Calibri" pitchFamily="34" charset="0"/>
-                <a:ea typeface="Calibri" pitchFamily="34" charset="-122"/>
-                <a:cs typeface="Calibri" pitchFamily="34" charset="-120"/>
-              </a:rPr>
-              <a:t>IDOR + JWT findings with impact</a:t>
-            </a:r>
-            <a:endParaRPr lang="en-US" sz="1400" dirty="0"/>
-          </a:p>
-          <a:p>
-            <a:pPr marL="342900" indent="-342900">
-              <a:spcAft>
-                <a:spcPts val="600"/>
-              </a:spcAft>
-              <a:buSzPct val="100000"/>
-              <a:buChar char="•"/>
-            </a:pPr>
-            <a:r>
-              <a:rPr lang="en-US" sz="1400" dirty="0">
-                <a:solidFill>
-                  <a:srgbClr val="1F2937"/>
-                </a:solidFill>
-                <a:latin typeface="Calibri" pitchFamily="34" charset="0"/>
-                <a:ea typeface="Calibri" pitchFamily="34" charset="-122"/>
-                <a:cs typeface="Calibri" pitchFamily="34" charset="-120"/>
-              </a:rPr>
-              <a:t>Citation of the fix lines in solution_app.py for all three attacks</a:t>
-            </a:r>
-            <a:endParaRPr lang="en-US" sz="1400" dirty="0"/>
-          </a:p>
-          <a:p>
-            <a:pPr marL="342900" indent="-342900">
-              <a:spcAft>
-                <a:spcPts val="600"/>
-              </a:spcAft>
-              <a:buSzPct val="100000"/>
-              <a:buChar char="•"/>
-            </a:pPr>
-            <a:r>
-              <a:rPr lang="en-US" sz="1400" dirty="0">
-                <a:solidFill>
-                  <a:srgbClr val="1F2937"/>
-                </a:solidFill>
-                <a:latin typeface="Calibri" pitchFamily="34" charset="0"/>
-                <a:ea typeface="Calibri" pitchFamily="34" charset="-122"/>
-                <a:cs typeface="Calibri" pitchFamily="34" charset="-120"/>
-              </a:rPr>
-              <a:t>Proof the forged token / cross-user access now fails</a:t>
-            </a:r>
-            <a:endParaRPr lang="en-US" sz="1400" dirty="0"/>
-          </a:p>
-          <a:p>
-            <a:pPr marL="342900" indent="-342900">
-              <a:spcAft>
-                <a:spcPts val="600"/>
-              </a:spcAft>
-              <a:buSzPct val="100000"/>
-              <a:buChar char="•"/>
-            </a:pPr>
-            <a:r>
-              <a:rPr lang="en-US" sz="1400" dirty="0">
-                <a:solidFill>
-                  <a:srgbClr val="1F2937"/>
-                </a:solidFill>
-                <a:latin typeface="Calibri" pitchFamily="34" charset="0"/>
-                <a:ea typeface="Calibri" pitchFamily="34" charset="-122"/>
-                <a:cs typeface="Calibri" pitchFamily="34" charset="-120"/>
-              </a:rPr>
-              <a:t>+ Audit the AI / EiPE / Prompt Problem (see worksheet)</a:t>
-            </a:r>
-            <a:endParaRPr lang="en-US" sz="1400" dirty="0"/>
-          </a:p>
-        </p:txBody>
-      </p:sp>
-      <p:sp>
-        <p:nvSpPr>
-          <p:cNvPr id="7" name="Text 4"/>
-          <p:cNvSpPr/>
-          <p:nvPr/>
-        </p:nvSpPr>
-        <p:spPr>
-          <a:xfrm>
-            <a:off x="457200" y="4800600"/>
-            <a:ext cx="6949440" cy="274320"/>
-          </a:xfrm>
-          <a:prstGeom prst="rect">
-            <a:avLst/>
-          </a:prstGeom>
-          <a:noFill/>
-          <a:ln/>
-        </p:spPr>
-        <p:txBody>
-          <a:bodyPr wrap="square" lIns="0" tIns="0" rIns="0" bIns="0" rtlCol="0" anchor="ctr"/>
-          <a:lstStyle/>
-          <a:p>
-            <a:pPr indent="0" marL="0">
-              <a:buNone/>
-            </a:pPr>
-            <a:r>
-              <a:rPr lang="en-US" sz="900" dirty="0">
-                <a:solidFill>
-                  <a:srgbClr val="64748B"/>
-                </a:solidFill>
-                <a:latin typeface="Calibri" pitchFamily="34" charset="0"/>
-                <a:ea typeface="Calibri" pitchFamily="34" charset="-122"/>
-                <a:cs typeface="Calibri" pitchFamily="34" charset="-120"/>
-              </a:rPr>
-              <a:t>Software Security · Week 6</a:t>
-            </a:r>
-            <a:endParaRPr lang="en-US" sz="900" dirty="0"/>
-          </a:p>
-        </p:txBody>
-      </p:sp>
-      <p:pic>
-        <p:nvPicPr>
-          <p:cNvPr id="8" name="Image 1" descr="/Users/pop7/Library/CloudStorage/OneDrive-MonsterConnectCo.,Ltd/Lecture/KOSEN69 - software-security/slides/pptx/assets/logo-small.png">    </p:cNvPr>
-          <p:cNvPicPr>
-            <a:picLocks noChangeAspect="1"/>
-          </p:cNvPicPr>
-          <p:nvPr/>
-        </p:nvPicPr>
-        <p:blipFill>
-          <a:blip r:embed="rId2"/>
-          <a:stretch>
-            <a:fillRect/>
-          </a:stretch>
-        </p:blipFill>
-        <p:spPr>
-          <a:xfrm>
-            <a:off x="7882128" y="4700016"/>
-            <a:ext cx="768096" cy="356616"/>
-          </a:xfrm>
-          <a:prstGeom prst="rect">
-            <a:avLst/>
-          </a:prstGeom>
-        </p:spPr>
-      </p:pic>
-    </p:spTree>
-  </p:cSld>
-  <p:clrMapOvr>
-    <a:masterClrMapping/>
-  </p:clrMapOvr>
-</p:sld>
-</file>
-
 <file path=ppt/slides/slide2.xml><?xml version="1.0" encoding="utf-8"?>
 <p:sld xmlns:a="http://schemas.openxmlformats.org/drawingml/2006/main" xmlns:r="http://schemas.openxmlformats.org/officeDocument/2006/relationships" xmlns:p="http://schemas.openxmlformats.org/presentationml/2006/main">
   <p:cSld name="Slide 2">
@@ -8415,7 +8278,7 @@
                 <a:ea typeface="Arial" pitchFamily="34" charset="-122"/>
                 <a:cs typeface="Arial" pitchFamily="34" charset="-120"/>
               </a:rPr>
-              <a:t>Key takeaways</a:t>
+              <a:t>🗺️ Game — IDOR Treasure Hunt + JWT Forgery</a:t>
             </a:r>
             <a:endParaRPr lang="en-US" sz="2600" dirty="0"/>
           </a:p>
@@ -8429,25 +8292,16 @@
         </p:nvSpPr>
         <p:spPr>
           <a:xfrm>
-            <a:off x="457200" y="1325880"/>
-            <a:ext cx="8229600" cy="1207008"/>
-          </a:xfrm>
-          <a:prstGeom prst="roundRect">
-            <a:avLst>
-              <a:gd name="adj" fmla="val 6061"/>
-            </a:avLst>
+            <a:off x="502920" y="1325880"/>
+            <a:ext cx="384048" cy="384048"/>
+          </a:xfrm>
+          <a:prstGeom prst="ellipse">
+            <a:avLst/>
           </a:prstGeom>
           <a:solidFill>
-            <a:srgbClr val="F1F5F9"/>
+            <a:srgbClr val="E35205"/>
           </a:solidFill>
           <a:ln/>
-          <a:effectLst>
-            <a:outerShdw sx="100000" sy="100000" kx="0" ky="0" algn="bl" rotWithShape="0" blurRad="76200" dist="25400" dir="5400000">
-              <a:srgbClr val="000000">
-                <a:alpha val="12000"/>
-              </a:srgbClr>
-            </a:outerShdw>
-          </a:effectLst>
         </p:spPr>
       </p:sp>
       <p:sp>
@@ -8458,8 +8312,8 @@
         </p:nvSpPr>
         <p:spPr>
           <a:xfrm>
-            <a:off x="731520" y="1435608"/>
-            <a:ext cx="7680960" cy="987552"/>
+            <a:off x="502920" y="1325880"/>
+            <a:ext cx="384048" cy="384048"/>
           </a:xfrm>
           <a:prstGeom prst="rect">
             <a:avLst/>
@@ -8468,20 +8322,55 @@
           <a:ln/>
         </p:spPr>
         <p:txBody>
-          <a:bodyPr wrap="square" lIns="0" tIns="0" rIns="0" bIns="0" rtlCol="0" anchor="t">
+          <a:bodyPr wrap="square" lIns="0" tIns="0" rIns="0" bIns="0" rtlCol="0" anchor="ctr"/>
+          <a:lstStyle/>
+          <a:p>
+            <a:pPr algn="ctr" indent="0" marL="0">
+              <a:buNone/>
+            </a:pPr>
+            <a:r>
+              <a:rPr lang="en-US" sz="1500" b="1" dirty="0">
+                <a:solidFill>
+                  <a:srgbClr val="0E1726"/>
+                </a:solidFill>
+                <a:latin typeface="Arial" pitchFamily="34" charset="0"/>
+                <a:ea typeface="Arial" pitchFamily="34" charset="-122"/>
+                <a:cs typeface="Arial" pitchFamily="34" charset="-120"/>
+              </a:rPr>
+              <a:t>1</a:t>
+            </a:r>
+            <a:endParaRPr lang="en-US" sz="1500" dirty="0"/>
+          </a:p>
+        </p:txBody>
+      </p:sp>
+      <p:sp>
+        <p:nvSpPr>
+          <p:cNvPr id="7" name="Text 4"/>
+          <p:cNvSpPr/>
+          <p:nvPr/>
+        </p:nvSpPr>
+        <p:spPr>
+          <a:xfrm>
+            <a:off x="1051560" y="1325880"/>
+            <a:ext cx="7589520" cy="658368"/>
+          </a:xfrm>
+          <a:prstGeom prst="rect">
+            <a:avLst/>
+          </a:prstGeom>
+          <a:noFill/>
+          <a:ln/>
+        </p:spPr>
+        <p:txBody>
+          <a:bodyPr wrap="square" lIns="0" tIns="0" rIns="0" bIns="0" rtlCol="0" anchor="ctr">
             <a:normAutofit/>
           </a:bodyPr>
           <a:lstStyle/>
           <a:p>
-            <a:pPr marL="342900" indent="-342900">
-              <a:spcAft>
-                <a:spcPts val="600"/>
-              </a:spcAft>
-              <a:buSzPct val="100000"/>
-              <a:buChar char="•"/>
-            </a:pPr>
-            <a:r>
-              <a:rPr lang="en-US" sz="1400" dirty="0">
+            <a:pPr indent="0" marL="0">
+              <a:buNone/>
+            </a:pPr>
+            <a:r>
+              <a:rPr lang="en-US" sz="1350" dirty="0">
                 <a:solidFill>
                   <a:srgbClr val="1F2937"/>
                 </a:solidFill>
@@ -8489,20 +8378,99 @@
                 <a:ea typeface="Calibri" pitchFamily="34" charset="-122"/>
                 <a:cs typeface="Calibri" pitchFamily="34" charset="-120"/>
               </a:rPr>
-              <a:t>Authenticate once, authorize every request</a:t>
-            </a:r>
-            <a:endParaRPr lang="en-US" sz="1400" dirty="0"/>
-          </a:p>
-          <a:p>
-            <a:pPr marL="342900" indent="-342900">
-              <a:spcAft>
-                <a:spcPts val="600"/>
-              </a:spcAft>
-              <a:buSzPct val="100000"/>
-              <a:buChar char="•"/>
-            </a:pPr>
-            <a:r>
-              <a:rPr lang="en-US" sz="1400" dirty="0">
+              <a:t>Tamper object IDs to reach another user's data (horizontal — become "bob," not admin) → each secret = a flag</a:t>
+            </a:r>
+            <a:endParaRPr lang="en-US" sz="1350" dirty="0"/>
+          </a:p>
+        </p:txBody>
+      </p:sp>
+      <p:sp>
+        <p:nvSpPr>
+          <p:cNvPr id="8" name="Shape 5"/>
+          <p:cNvSpPr/>
+          <p:nvPr/>
+        </p:nvSpPr>
+        <p:spPr>
+          <a:xfrm>
+            <a:off x="502920" y="2057400"/>
+            <a:ext cx="384048" cy="384048"/>
+          </a:xfrm>
+          <a:prstGeom prst="ellipse">
+            <a:avLst/>
+          </a:prstGeom>
+          <a:solidFill>
+            <a:srgbClr val="E35205"/>
+          </a:solidFill>
+          <a:ln/>
+        </p:spPr>
+      </p:sp>
+      <p:sp>
+        <p:nvSpPr>
+          <p:cNvPr id="9" name="Text 6"/>
+          <p:cNvSpPr/>
+          <p:nvPr/>
+        </p:nvSpPr>
+        <p:spPr>
+          <a:xfrm>
+            <a:off x="502920" y="2057400"/>
+            <a:ext cx="384048" cy="384048"/>
+          </a:xfrm>
+          <a:prstGeom prst="rect">
+            <a:avLst/>
+          </a:prstGeom>
+          <a:noFill/>
+          <a:ln/>
+        </p:spPr>
+        <p:txBody>
+          <a:bodyPr wrap="square" lIns="0" tIns="0" rIns="0" bIns="0" rtlCol="0" anchor="ctr"/>
+          <a:lstStyle/>
+          <a:p>
+            <a:pPr algn="ctr" indent="0" marL="0">
+              <a:buNone/>
+            </a:pPr>
+            <a:r>
+              <a:rPr lang="en-US" sz="1500" b="1" dirty="0">
+                <a:solidFill>
+                  <a:srgbClr val="0E1726"/>
+                </a:solidFill>
+                <a:latin typeface="Arial" pitchFamily="34" charset="0"/>
+                <a:ea typeface="Arial" pitchFamily="34" charset="-122"/>
+                <a:cs typeface="Arial" pitchFamily="34" charset="-120"/>
+              </a:rPr>
+              <a:t>2</a:t>
+            </a:r>
+            <a:endParaRPr lang="en-US" sz="1500" dirty="0"/>
+          </a:p>
+        </p:txBody>
+      </p:sp>
+      <p:sp>
+        <p:nvSpPr>
+          <p:cNvPr id="10" name="Text 7"/>
+          <p:cNvSpPr/>
+          <p:nvPr/>
+        </p:nvSpPr>
+        <p:spPr>
+          <a:xfrm>
+            <a:off x="1051560" y="2057400"/>
+            <a:ext cx="7589520" cy="402336"/>
+          </a:xfrm>
+          <a:prstGeom prst="rect">
+            <a:avLst/>
+          </a:prstGeom>
+          <a:noFill/>
+          <a:ln/>
+        </p:spPr>
+        <p:txBody>
+          <a:bodyPr wrap="square" lIns="0" tIns="0" rIns="0" bIns="0" rtlCol="0" anchor="ctr">
+            <a:normAutofit/>
+          </a:bodyPr>
+          <a:lstStyle/>
+          <a:p>
+            <a:pPr indent="0" marL="0">
+              <a:buNone/>
+            </a:pPr>
+            <a:r>
+              <a:rPr lang="en-US" sz="1350" dirty="0">
                 <a:solidFill>
                   <a:srgbClr val="1F2937"/>
                 </a:solidFill>
@@ -8510,20 +8478,99 @@
                 <a:ea typeface="Calibri" pitchFamily="34" charset="-122"/>
                 <a:cs typeface="Calibri" pitchFamily="34" charset="-120"/>
               </a:rPr>
-              <a:t>Never trust client-supplied IDs or tokens blindly</a:t>
-            </a:r>
-            <a:endParaRPr lang="en-US" sz="1400" dirty="0"/>
-          </a:p>
-          <a:p>
-            <a:pPr marL="342900" indent="-342900">
-              <a:spcAft>
-                <a:spcPts val="600"/>
-              </a:spcAft>
-              <a:buSzPct val="100000"/>
-              <a:buChar char="•"/>
-            </a:pPr>
-            <a:r>
-              <a:rPr lang="en-US" sz="1400" dirty="0">
+              <a:t>Forge a weak JWT two ways: alg:none, then crack the hardcoded HMAC secret</a:t>
+            </a:r>
+            <a:endParaRPr lang="en-US" sz="1350" dirty="0"/>
+          </a:p>
+        </p:txBody>
+      </p:sp>
+      <p:sp>
+        <p:nvSpPr>
+          <p:cNvPr id="11" name="Shape 8"/>
+          <p:cNvSpPr/>
+          <p:nvPr/>
+        </p:nvSpPr>
+        <p:spPr>
+          <a:xfrm>
+            <a:off x="502920" y="2532888"/>
+            <a:ext cx="384048" cy="384048"/>
+          </a:xfrm>
+          <a:prstGeom prst="ellipse">
+            <a:avLst/>
+          </a:prstGeom>
+          <a:solidFill>
+            <a:srgbClr val="E35205"/>
+          </a:solidFill>
+          <a:ln/>
+        </p:spPr>
+      </p:sp>
+      <p:sp>
+        <p:nvSpPr>
+          <p:cNvPr id="12" name="Text 9"/>
+          <p:cNvSpPr/>
+          <p:nvPr/>
+        </p:nvSpPr>
+        <p:spPr>
+          <a:xfrm>
+            <a:off x="502920" y="2532888"/>
+            <a:ext cx="384048" cy="384048"/>
+          </a:xfrm>
+          <a:prstGeom prst="rect">
+            <a:avLst/>
+          </a:prstGeom>
+          <a:noFill/>
+          <a:ln/>
+        </p:spPr>
+        <p:txBody>
+          <a:bodyPr wrap="square" lIns="0" tIns="0" rIns="0" bIns="0" rtlCol="0" anchor="ctr"/>
+          <a:lstStyle/>
+          <a:p>
+            <a:pPr algn="ctr" indent="0" marL="0">
+              <a:buNone/>
+            </a:pPr>
+            <a:r>
+              <a:rPr lang="en-US" sz="1500" b="1" dirty="0">
+                <a:solidFill>
+                  <a:srgbClr val="0E1726"/>
+                </a:solidFill>
+                <a:latin typeface="Arial" pitchFamily="34" charset="0"/>
+                <a:ea typeface="Arial" pitchFamily="34" charset="-122"/>
+                <a:cs typeface="Arial" pitchFamily="34" charset="-120"/>
+              </a:rPr>
+              <a:t>3</a:t>
+            </a:r>
+            <a:endParaRPr lang="en-US" sz="1500" dirty="0"/>
+          </a:p>
+        </p:txBody>
+      </p:sp>
+      <p:sp>
+        <p:nvSpPr>
+          <p:cNvPr id="13" name="Text 10"/>
+          <p:cNvSpPr/>
+          <p:nvPr/>
+        </p:nvSpPr>
+        <p:spPr>
+          <a:xfrm>
+            <a:off x="1051560" y="2532888"/>
+            <a:ext cx="7589520" cy="658368"/>
+          </a:xfrm>
+          <a:prstGeom prst="rect">
+            <a:avLst/>
+          </a:prstGeom>
+          <a:noFill/>
+          <a:ln/>
+        </p:spPr>
+        <p:txBody>
+          <a:bodyPr wrap="square" lIns="0" tIns="0" rIns="0" bIns="0" rtlCol="0" anchor="ctr">
+            <a:normAutofit/>
+          </a:bodyPr>
+          <a:lstStyle/>
+          <a:p>
+            <a:pPr indent="0" marL="0">
+              <a:buNone/>
+            </a:pPr>
+            <a:r>
+              <a:rPr lang="en-US" sz="1350" dirty="0">
                 <a:solidFill>
                   <a:srgbClr val="1F2937"/>
                 </a:solidFill>
@@ -8531,15 +8578,15 @@
                 <a:ea typeface="Calibri" pitchFamily="34" charset="-122"/>
                 <a:cs typeface="Calibri" pitchFamily="34" charset="-120"/>
               </a:rPr>
-              <a:t>Deny by default</a:t>
-            </a:r>
-            <a:endParaRPr lang="en-US" sz="1400" dirty="0"/>
-          </a:p>
-        </p:txBody>
-      </p:sp>
-      <p:sp>
-        <p:nvSpPr>
-          <p:cNvPr id="7" name="Text 4"/>
+              <a:t>Defend: switch to solution_app.py (already fixed), prove it blocks all three attacks (403 + two 401s), cite the exact fix line for each</a:t>
+            </a:r>
+            <a:endParaRPr lang="en-US" sz="1350" dirty="0"/>
+          </a:p>
+        </p:txBody>
+      </p:sp>
+      <p:sp>
+        <p:nvSpPr>
+          <p:cNvPr id="14" name="Text 11"/>
           <p:cNvSpPr/>
           <p:nvPr/>
         </p:nvSpPr>
@@ -8578,7 +8625,7 @@
       </p:sp>
       <p:pic>
         <p:nvPicPr>
-          <p:cNvPr id="8" name="Image 1" descr="/Users/pop7/Library/CloudStorage/OneDrive-MonsterConnectCo.,Ltd/Lecture/KOSEN69 - software-security/slides/pptx/assets/logo-small.png">    </p:cNvPr>
+          <p:cNvPr id="15" name="Image 1" descr="/Users/pop7/Library/CloudStorage/OneDrive-MonsterConnectCo.,Ltd/Lecture/KOSEN69 - software-security/slides/pptx/assets/logo-small.png">    </p:cNvPr>
           <p:cNvPicPr>
             <a:picLocks noChangeAspect="1"/>
           </p:cNvPicPr>
@@ -8634,6 +8681,1277 @@
       </p:grpSpPr>
       <p:sp>
         <p:nvSpPr>
+          <p:cNvPr id="2" name="Shape 0"/>
+          <p:cNvSpPr/>
+          <p:nvPr/>
+        </p:nvSpPr>
+        <p:spPr>
+          <a:xfrm>
+            <a:off x="457200" y="384048"/>
+            <a:ext cx="530352" cy="530352"/>
+          </a:xfrm>
+          <a:prstGeom prst="ellipse">
+            <a:avLst/>
+          </a:prstGeom>
+          <a:solidFill>
+            <a:srgbClr val="E35205"/>
+          </a:solidFill>
+          <a:ln/>
+          <a:effectLst>
+            <a:outerShdw sx="100000" sy="100000" kx="0" ky="0" algn="bl" rotWithShape="0" blurRad="76200" dist="25400" dir="5400000">
+              <a:srgbClr val="000000">
+                <a:alpha val="12000"/>
+              </a:srgbClr>
+            </a:outerShdw>
+          </a:effectLst>
+        </p:spPr>
+      </p:sp>
+      <p:pic>
+        <p:nvPicPr>
+          <p:cNvPr id="3" name="Image 0" descr="preencoded.png">    </p:cNvPr>
+          <p:cNvPicPr>
+            <a:picLocks noChangeAspect="1"/>
+          </p:cNvPicPr>
+          <p:nvPr/>
+        </p:nvPicPr>
+        <p:blipFill>
+          <a:blip r:embed="rId1"/>
+          <a:stretch>
+            <a:fillRect/>
+          </a:stretch>
+        </p:blipFill>
+        <p:spPr>
+          <a:xfrm>
+            <a:off x="594360" y="521208"/>
+            <a:ext cx="256032" cy="256032"/>
+          </a:xfrm>
+          <a:prstGeom prst="rect">
+            <a:avLst/>
+          </a:prstGeom>
+        </p:spPr>
+      </p:pic>
+      <p:sp>
+        <p:nvSpPr>
+          <p:cNvPr id="4" name="Text 1"/>
+          <p:cNvSpPr/>
+          <p:nvPr/>
+        </p:nvSpPr>
+        <p:spPr>
+          <a:xfrm>
+            <a:off x="1143000" y="329184"/>
+            <a:ext cx="7498080" cy="603504"/>
+          </a:xfrm>
+          <a:prstGeom prst="rect">
+            <a:avLst/>
+          </a:prstGeom>
+          <a:noFill/>
+          <a:ln/>
+        </p:spPr>
+        <p:txBody>
+          <a:bodyPr wrap="square" lIns="0" tIns="0" rIns="0" bIns="0" rtlCol="0" anchor="ctr"/>
+          <a:lstStyle/>
+          <a:p>
+            <a:pPr indent="0" marL="0">
+              <a:buNone/>
+            </a:pPr>
+            <a:r>
+              <a:rPr lang="en-US" sz="2600" b="1" dirty="0">
+                <a:solidFill>
+                  <a:srgbClr val="1F2937"/>
+                </a:solidFill>
+                <a:latin typeface="Arial" pitchFamily="34" charset="0"/>
+                <a:ea typeface="Arial" pitchFamily="34" charset="-122"/>
+                <a:cs typeface="Arial" pitchFamily="34" charset="-120"/>
+              </a:rPr>
+              <a:t>Lab steps</a:t>
+            </a:r>
+            <a:endParaRPr lang="en-US" sz="2600" dirty="0"/>
+          </a:p>
+        </p:txBody>
+      </p:sp>
+      <p:sp>
+        <p:nvSpPr>
+          <p:cNvPr id="5" name="Shape 2"/>
+          <p:cNvSpPr/>
+          <p:nvPr/>
+        </p:nvSpPr>
+        <p:spPr>
+          <a:xfrm>
+            <a:off x="457200" y="1325880"/>
+            <a:ext cx="8229600" cy="822960"/>
+          </a:xfrm>
+          <a:prstGeom prst="roundRect">
+            <a:avLst>
+              <a:gd name="adj" fmla="val 8889"/>
+            </a:avLst>
+          </a:prstGeom>
+          <a:solidFill>
+            <a:srgbClr val="E8EDF3"/>
+          </a:solidFill>
+          <a:ln/>
+        </p:spPr>
+      </p:sp>
+      <p:sp>
+        <p:nvSpPr>
+          <p:cNvPr id="6" name="Text 3"/>
+          <p:cNvSpPr/>
+          <p:nvPr/>
+        </p:nvSpPr>
+        <p:spPr>
+          <a:xfrm>
+            <a:off x="731520" y="1325880"/>
+            <a:ext cx="7680960" cy="822960"/>
+          </a:xfrm>
+          <a:prstGeom prst="rect">
+            <a:avLst/>
+          </a:prstGeom>
+          <a:noFill/>
+          <a:ln/>
+        </p:spPr>
+        <p:txBody>
+          <a:bodyPr wrap="square" lIns="0" tIns="0" rIns="0" bIns="0" rtlCol="0" anchor="ctr">
+            <a:normAutofit/>
+          </a:bodyPr>
+          <a:lstStyle/>
+          <a:p>
+            <a:pPr indent="0" marL="0">
+              <a:buNone/>
+            </a:pPr>
+            <a:r>
+              <a:rPr lang="en-US" sz="1400" i="1" dirty="0">
+                <a:solidFill>
+                  <a:srgbClr val="E35205"/>
+                </a:solidFill>
+                <a:latin typeface="Calibri" pitchFamily="34" charset="0"/>
+                <a:ea typeface="Calibri" pitchFamily="34" charset="-122"/>
+                <a:cs typeface="Calibri" pitchFamily="34" charset="-120"/>
+              </a:rPr>
+              <a:t>📋 Worksheet 6 — labs/week06-authn-authz/worksheet.md (Part 3) · kickoff: docker compose up → http://localhost:8080</a:t>
+            </a:r>
+            <a:endParaRPr lang="en-US" sz="1400" dirty="0"/>
+          </a:p>
+        </p:txBody>
+      </p:sp>
+      <p:sp>
+        <p:nvSpPr>
+          <p:cNvPr id="7" name="Shape 4"/>
+          <p:cNvSpPr/>
+          <p:nvPr/>
+        </p:nvSpPr>
+        <p:spPr>
+          <a:xfrm>
+            <a:off x="502920" y="2313432"/>
+            <a:ext cx="384048" cy="384048"/>
+          </a:xfrm>
+          <a:prstGeom prst="ellipse">
+            <a:avLst/>
+          </a:prstGeom>
+          <a:solidFill>
+            <a:srgbClr val="E35205"/>
+          </a:solidFill>
+          <a:ln/>
+        </p:spPr>
+      </p:sp>
+      <p:sp>
+        <p:nvSpPr>
+          <p:cNvPr id="8" name="Text 5"/>
+          <p:cNvSpPr/>
+          <p:nvPr/>
+        </p:nvSpPr>
+        <p:spPr>
+          <a:xfrm>
+            <a:off x="502920" y="2313432"/>
+            <a:ext cx="384048" cy="384048"/>
+          </a:xfrm>
+          <a:prstGeom prst="rect">
+            <a:avLst/>
+          </a:prstGeom>
+          <a:noFill/>
+          <a:ln/>
+        </p:spPr>
+        <p:txBody>
+          <a:bodyPr wrap="square" lIns="0" tIns="0" rIns="0" bIns="0" rtlCol="0" anchor="ctr"/>
+          <a:lstStyle/>
+          <a:p>
+            <a:pPr algn="ctr" indent="0" marL="0">
+              <a:buNone/>
+            </a:pPr>
+            <a:r>
+              <a:rPr lang="en-US" sz="1500" b="1" dirty="0">
+                <a:solidFill>
+                  <a:srgbClr val="0E1726"/>
+                </a:solidFill>
+                <a:latin typeface="Arial" pitchFamily="34" charset="0"/>
+                <a:ea typeface="Arial" pitchFamily="34" charset="-122"/>
+                <a:cs typeface="Arial" pitchFamily="34" charset="-120"/>
+              </a:rPr>
+              <a:t>1</a:t>
+            </a:r>
+            <a:endParaRPr lang="en-US" sz="1500" dirty="0"/>
+          </a:p>
+        </p:txBody>
+      </p:sp>
+      <p:sp>
+        <p:nvSpPr>
+          <p:cNvPr id="9" name="Text 6"/>
+          <p:cNvSpPr/>
+          <p:nvPr/>
+        </p:nvSpPr>
+        <p:spPr>
+          <a:xfrm>
+            <a:off x="1051560" y="2313432"/>
+            <a:ext cx="7589520" cy="402336"/>
+          </a:xfrm>
+          <a:prstGeom prst="rect">
+            <a:avLst/>
+          </a:prstGeom>
+          <a:noFill/>
+          <a:ln/>
+        </p:spPr>
+        <p:txBody>
+          <a:bodyPr wrap="square" lIns="0" tIns="0" rIns="0" bIns="0" rtlCol="0" anchor="ctr">
+            <a:normAutofit/>
+          </a:bodyPr>
+          <a:lstStyle/>
+          <a:p>
+            <a:pPr indent="0" marL="0">
+              <a:buNone/>
+            </a:pPr>
+            <a:r>
+              <a:rPr lang="en-US" sz="1350" dirty="0">
+                <a:solidFill>
+                  <a:srgbClr val="1F2937"/>
+                </a:solidFill>
+                <a:latin typeface="Calibri" pitchFamily="34" charset="0"/>
+                <a:ea typeface="Calibri" pitchFamily="34" charset="-122"/>
+                <a:cs typeface="Calibri" pitchFamily="34" charset="-120"/>
+              </a:rPr>
+              <a:t>Find IDOR endpoints; enumerate other users' objects</a:t>
+            </a:r>
+            <a:endParaRPr lang="en-US" sz="1350" dirty="0"/>
+          </a:p>
+        </p:txBody>
+      </p:sp>
+      <p:sp>
+        <p:nvSpPr>
+          <p:cNvPr id="10" name="Shape 7"/>
+          <p:cNvSpPr/>
+          <p:nvPr/>
+        </p:nvSpPr>
+        <p:spPr>
+          <a:xfrm>
+            <a:off x="502920" y="2788920"/>
+            <a:ext cx="384048" cy="384048"/>
+          </a:xfrm>
+          <a:prstGeom prst="ellipse">
+            <a:avLst/>
+          </a:prstGeom>
+          <a:solidFill>
+            <a:srgbClr val="E35205"/>
+          </a:solidFill>
+          <a:ln/>
+        </p:spPr>
+      </p:sp>
+      <p:sp>
+        <p:nvSpPr>
+          <p:cNvPr id="11" name="Text 8"/>
+          <p:cNvSpPr/>
+          <p:nvPr/>
+        </p:nvSpPr>
+        <p:spPr>
+          <a:xfrm>
+            <a:off x="502920" y="2788920"/>
+            <a:ext cx="384048" cy="384048"/>
+          </a:xfrm>
+          <a:prstGeom prst="rect">
+            <a:avLst/>
+          </a:prstGeom>
+          <a:noFill/>
+          <a:ln/>
+        </p:spPr>
+        <p:txBody>
+          <a:bodyPr wrap="square" lIns="0" tIns="0" rIns="0" bIns="0" rtlCol="0" anchor="ctr"/>
+          <a:lstStyle/>
+          <a:p>
+            <a:pPr algn="ctr" indent="0" marL="0">
+              <a:buNone/>
+            </a:pPr>
+            <a:r>
+              <a:rPr lang="en-US" sz="1500" b="1" dirty="0">
+                <a:solidFill>
+                  <a:srgbClr val="0E1726"/>
+                </a:solidFill>
+                <a:latin typeface="Arial" pitchFamily="34" charset="0"/>
+                <a:ea typeface="Arial" pitchFamily="34" charset="-122"/>
+                <a:cs typeface="Arial" pitchFamily="34" charset="-120"/>
+              </a:rPr>
+              <a:t>2</a:t>
+            </a:r>
+            <a:endParaRPr lang="en-US" sz="1500" dirty="0"/>
+          </a:p>
+        </p:txBody>
+      </p:sp>
+      <p:sp>
+        <p:nvSpPr>
+          <p:cNvPr id="12" name="Text 9"/>
+          <p:cNvSpPr/>
+          <p:nvPr/>
+        </p:nvSpPr>
+        <p:spPr>
+          <a:xfrm>
+            <a:off x="1051560" y="2788920"/>
+            <a:ext cx="7589520" cy="658368"/>
+          </a:xfrm>
+          <a:prstGeom prst="rect">
+            <a:avLst/>
+          </a:prstGeom>
+          <a:noFill/>
+          <a:ln/>
+        </p:spPr>
+        <p:txBody>
+          <a:bodyPr wrap="square" lIns="0" tIns="0" rIns="0" bIns="0" rtlCol="0" anchor="ctr">
+            <a:normAutofit/>
+          </a:bodyPr>
+          <a:lstStyle/>
+          <a:p>
+            <a:pPr indent="0" marL="0">
+              <a:buNone/>
+            </a:pPr>
+            <a:r>
+              <a:rPr lang="en-US" sz="1350" dirty="0">
+                <a:solidFill>
+                  <a:srgbClr val="1F2937"/>
+                </a:solidFill>
+                <a:latin typeface="Calibri" pitchFamily="34" charset="0"/>
+                <a:ea typeface="Calibri" pitchFamily="34" charset="-122"/>
+                <a:cs typeface="Calibri" pitchFamily="34" charset="-120"/>
+              </a:rPr>
+              <a:t>Crack/forge a weak JWT (alg:none AND the weak HMAC secret — two separate graded attacks)</a:t>
+            </a:r>
+            <a:endParaRPr lang="en-US" sz="1350" dirty="0"/>
+          </a:p>
+        </p:txBody>
+      </p:sp>
+      <p:sp>
+        <p:nvSpPr>
+          <p:cNvPr id="13" name="Shape 10"/>
+          <p:cNvSpPr/>
+          <p:nvPr/>
+        </p:nvSpPr>
+        <p:spPr>
+          <a:xfrm>
+            <a:off x="502920" y="3520440"/>
+            <a:ext cx="384048" cy="384048"/>
+          </a:xfrm>
+          <a:prstGeom prst="ellipse">
+            <a:avLst/>
+          </a:prstGeom>
+          <a:solidFill>
+            <a:srgbClr val="E35205"/>
+          </a:solidFill>
+          <a:ln/>
+        </p:spPr>
+      </p:sp>
+      <p:sp>
+        <p:nvSpPr>
+          <p:cNvPr id="14" name="Text 11"/>
+          <p:cNvSpPr/>
+          <p:nvPr/>
+        </p:nvSpPr>
+        <p:spPr>
+          <a:xfrm>
+            <a:off x="502920" y="3520440"/>
+            <a:ext cx="384048" cy="384048"/>
+          </a:xfrm>
+          <a:prstGeom prst="rect">
+            <a:avLst/>
+          </a:prstGeom>
+          <a:noFill/>
+          <a:ln/>
+        </p:spPr>
+        <p:txBody>
+          <a:bodyPr wrap="square" lIns="0" tIns="0" rIns="0" bIns="0" rtlCol="0" anchor="ctr"/>
+          <a:lstStyle/>
+          <a:p>
+            <a:pPr algn="ctr" indent="0" marL="0">
+              <a:buNone/>
+            </a:pPr>
+            <a:r>
+              <a:rPr lang="en-US" sz="1500" b="1" dirty="0">
+                <a:solidFill>
+                  <a:srgbClr val="0E1726"/>
+                </a:solidFill>
+                <a:latin typeface="Arial" pitchFamily="34" charset="0"/>
+                <a:ea typeface="Arial" pitchFamily="34" charset="-122"/>
+                <a:cs typeface="Arial" pitchFamily="34" charset="-120"/>
+              </a:rPr>
+              <a:t>3</a:t>
+            </a:r>
+            <a:endParaRPr lang="en-US" sz="1500" dirty="0"/>
+          </a:p>
+        </p:txBody>
+      </p:sp>
+      <p:sp>
+        <p:nvSpPr>
+          <p:cNvPr id="15" name="Text 12"/>
+          <p:cNvSpPr/>
+          <p:nvPr/>
+        </p:nvSpPr>
+        <p:spPr>
+          <a:xfrm>
+            <a:off x="1051560" y="3520440"/>
+            <a:ext cx="7589520" cy="402336"/>
+          </a:xfrm>
+          <a:prstGeom prst="rect">
+            <a:avLst/>
+          </a:prstGeom>
+          <a:noFill/>
+          <a:ln/>
+        </p:spPr>
+        <p:txBody>
+          <a:bodyPr wrap="square" lIns="0" tIns="0" rIns="0" bIns="0" rtlCol="0" anchor="ctr">
+            <a:normAutofit/>
+          </a:bodyPr>
+          <a:lstStyle/>
+          <a:p>
+            <a:pPr indent="0" marL="0">
+              <a:buNone/>
+            </a:pPr>
+            <a:r>
+              <a:rPr lang="en-US" sz="1350" dirty="0">
+                <a:solidFill>
+                  <a:srgbClr val="1F2937"/>
+                </a:solidFill>
+                <a:latin typeface="Calibri" pitchFamily="34" charset="0"/>
+                <a:ea typeface="Calibri" pitchFamily="34" charset="-122"/>
+                <a:cs typeface="Calibri" pitchFamily="34" charset="-120"/>
+              </a:rPr>
+              <a:t>Switch to solution_app.py; re-test: access denied</a:t>
+            </a:r>
+            <a:endParaRPr lang="en-US" sz="1350" dirty="0"/>
+          </a:p>
+        </p:txBody>
+      </p:sp>
+      <p:sp>
+        <p:nvSpPr>
+          <p:cNvPr id="16" name="Shape 13"/>
+          <p:cNvSpPr/>
+          <p:nvPr/>
+        </p:nvSpPr>
+        <p:spPr>
+          <a:xfrm>
+            <a:off x="502920" y="3995928"/>
+            <a:ext cx="384048" cy="384048"/>
+          </a:xfrm>
+          <a:prstGeom prst="ellipse">
+            <a:avLst/>
+          </a:prstGeom>
+          <a:solidFill>
+            <a:srgbClr val="E35205"/>
+          </a:solidFill>
+          <a:ln/>
+        </p:spPr>
+      </p:sp>
+      <p:sp>
+        <p:nvSpPr>
+          <p:cNvPr id="17" name="Text 14"/>
+          <p:cNvSpPr/>
+          <p:nvPr/>
+        </p:nvSpPr>
+        <p:spPr>
+          <a:xfrm>
+            <a:off x="502920" y="3995928"/>
+            <a:ext cx="384048" cy="384048"/>
+          </a:xfrm>
+          <a:prstGeom prst="rect">
+            <a:avLst/>
+          </a:prstGeom>
+          <a:noFill/>
+          <a:ln/>
+        </p:spPr>
+        <p:txBody>
+          <a:bodyPr wrap="square" lIns="0" tIns="0" rIns="0" bIns="0" rtlCol="0" anchor="ctr"/>
+          <a:lstStyle/>
+          <a:p>
+            <a:pPr algn="ctr" indent="0" marL="0">
+              <a:buNone/>
+            </a:pPr>
+            <a:r>
+              <a:rPr lang="en-US" sz="1500" b="1" dirty="0">
+                <a:solidFill>
+                  <a:srgbClr val="0E1726"/>
+                </a:solidFill>
+                <a:latin typeface="Arial" pitchFamily="34" charset="0"/>
+                <a:ea typeface="Arial" pitchFamily="34" charset="-122"/>
+                <a:cs typeface="Arial" pitchFamily="34" charset="-120"/>
+              </a:rPr>
+              <a:t>4</a:t>
+            </a:r>
+            <a:endParaRPr lang="en-US" sz="1500" dirty="0"/>
+          </a:p>
+        </p:txBody>
+      </p:sp>
+      <p:sp>
+        <p:nvSpPr>
+          <p:cNvPr id="18" name="Text 15"/>
+          <p:cNvSpPr/>
+          <p:nvPr/>
+        </p:nvSpPr>
+        <p:spPr>
+          <a:xfrm>
+            <a:off x="1051560" y="3995928"/>
+            <a:ext cx="7589520" cy="402336"/>
+          </a:xfrm>
+          <a:prstGeom prst="rect">
+            <a:avLst/>
+          </a:prstGeom>
+          <a:noFill/>
+          <a:ln/>
+        </p:spPr>
+        <p:txBody>
+          <a:bodyPr wrap="square" lIns="0" tIns="0" rIns="0" bIns="0" rtlCol="0" anchor="ctr">
+            <a:normAutofit/>
+          </a:bodyPr>
+          <a:lstStyle/>
+          <a:p>
+            <a:pPr indent="0" marL="0">
+              <a:buNone/>
+            </a:pPr>
+            <a:r>
+              <a:rPr lang="en-US" sz="1350" dirty="0">
+                <a:solidFill>
+                  <a:srgbClr val="1F2937"/>
+                </a:solidFill>
+                <a:latin typeface="Calibri" pitchFamily="34" charset="0"/>
+                <a:ea typeface="Calibri" pitchFamily="34" charset="-122"/>
+                <a:cs typeface="Calibri" pitchFamily="34" charset="-120"/>
+              </a:rPr>
+              <a:t>Cite the exact line that fixes each of the three attacks</a:t>
+            </a:r>
+            <a:endParaRPr lang="en-US" sz="1350" dirty="0"/>
+          </a:p>
+        </p:txBody>
+      </p:sp>
+      <p:sp>
+        <p:nvSpPr>
+          <p:cNvPr id="19" name="Text 16"/>
+          <p:cNvSpPr/>
+          <p:nvPr/>
+        </p:nvSpPr>
+        <p:spPr>
+          <a:xfrm>
+            <a:off x="457200" y="4800600"/>
+            <a:ext cx="6949440" cy="274320"/>
+          </a:xfrm>
+          <a:prstGeom prst="rect">
+            <a:avLst/>
+          </a:prstGeom>
+          <a:noFill/>
+          <a:ln/>
+        </p:spPr>
+        <p:txBody>
+          <a:bodyPr wrap="square" lIns="0" tIns="0" rIns="0" bIns="0" rtlCol="0" anchor="ctr"/>
+          <a:lstStyle/>
+          <a:p>
+            <a:pPr indent="0" marL="0">
+              <a:buNone/>
+            </a:pPr>
+            <a:r>
+              <a:rPr lang="en-US" sz="900" dirty="0">
+                <a:solidFill>
+                  <a:srgbClr val="64748B"/>
+                </a:solidFill>
+                <a:latin typeface="Calibri" pitchFamily="34" charset="0"/>
+                <a:ea typeface="Calibri" pitchFamily="34" charset="-122"/>
+                <a:cs typeface="Calibri" pitchFamily="34" charset="-120"/>
+              </a:rPr>
+              <a:t>Software Security · Week 6</a:t>
+            </a:r>
+            <a:endParaRPr lang="en-US" sz="900" dirty="0"/>
+          </a:p>
+        </p:txBody>
+      </p:sp>
+      <p:pic>
+        <p:nvPicPr>
+          <p:cNvPr id="20" name="Image 1" descr="/Users/pop7/Library/CloudStorage/OneDrive-MonsterConnectCo.,Ltd/Lecture/KOSEN69 - software-security/slides/pptx/assets/logo-small.png">    </p:cNvPr>
+          <p:cNvPicPr>
+            <a:picLocks noChangeAspect="1"/>
+          </p:cNvPicPr>
+          <p:nvPr/>
+        </p:nvPicPr>
+        <p:blipFill>
+          <a:blip r:embed="rId2"/>
+          <a:stretch>
+            <a:fillRect/>
+          </a:stretch>
+        </p:blipFill>
+        <p:spPr>
+          <a:xfrm>
+            <a:off x="7882128" y="4700016"/>
+            <a:ext cx="768096" cy="356616"/>
+          </a:xfrm>
+          <a:prstGeom prst="rect">
+            <a:avLst/>
+          </a:prstGeom>
+        </p:spPr>
+      </p:pic>
+    </p:spTree>
+  </p:cSld>
+  <p:clrMapOvr>
+    <a:masterClrMapping/>
+  </p:clrMapOvr>
+</p:sld>
+</file>
+
+<file path=ppt/slides/slide22.xml><?xml version="1.0" encoding="utf-8"?>
+<p:sld xmlns:a="http://schemas.openxmlformats.org/drawingml/2006/main" xmlns:r="http://schemas.openxmlformats.org/officeDocument/2006/relationships" xmlns:p="http://schemas.openxmlformats.org/presentationml/2006/main">
+  <p:cSld name="Slide 22">
+    <p:bg>
+      <p:bgPr>
+        <a:solidFill>
+          <a:srgbClr val="FFFFFF"/>
+        </a:solidFill>
+      </p:bgPr>
+    </p:bg>
+    <p:spTree>
+      <p:nvGrpSpPr>
+        <p:cNvPr id="1" name=""/>
+        <p:cNvGrpSpPr/>
+        <p:nvPr/>
+      </p:nvGrpSpPr>
+      <p:grpSpPr>
+        <a:xfrm>
+          <a:off x="0" y="0"/>
+          <a:ext cx="0" cy="0"/>
+          <a:chOff x="0" y="0"/>
+          <a:chExt cx="0" cy="0"/>
+        </a:xfrm>
+      </p:grpSpPr>
+      <p:sp>
+        <p:nvSpPr>
+          <p:cNvPr id="2" name="Shape 0"/>
+          <p:cNvSpPr/>
+          <p:nvPr/>
+        </p:nvSpPr>
+        <p:spPr>
+          <a:xfrm>
+            <a:off x="457200" y="384048"/>
+            <a:ext cx="530352" cy="530352"/>
+          </a:xfrm>
+          <a:prstGeom prst="ellipse">
+            <a:avLst/>
+          </a:prstGeom>
+          <a:solidFill>
+            <a:srgbClr val="E35205"/>
+          </a:solidFill>
+          <a:ln/>
+          <a:effectLst>
+            <a:outerShdw sx="100000" sy="100000" kx="0" ky="0" algn="bl" rotWithShape="0" blurRad="76200" dist="25400" dir="5400000">
+              <a:srgbClr val="000000">
+                <a:alpha val="12000"/>
+              </a:srgbClr>
+            </a:outerShdw>
+          </a:effectLst>
+        </p:spPr>
+      </p:sp>
+      <p:pic>
+        <p:nvPicPr>
+          <p:cNvPr id="3" name="Image 0" descr="preencoded.png">    </p:cNvPr>
+          <p:cNvPicPr>
+            <a:picLocks noChangeAspect="1"/>
+          </p:cNvPicPr>
+          <p:nvPr/>
+        </p:nvPicPr>
+        <p:blipFill>
+          <a:blip r:embed="rId1"/>
+          <a:stretch>
+            <a:fillRect/>
+          </a:stretch>
+        </p:blipFill>
+        <p:spPr>
+          <a:xfrm>
+            <a:off x="594360" y="521208"/>
+            <a:ext cx="256032" cy="256032"/>
+          </a:xfrm>
+          <a:prstGeom prst="rect">
+            <a:avLst/>
+          </a:prstGeom>
+        </p:spPr>
+      </p:pic>
+      <p:sp>
+        <p:nvSpPr>
+          <p:cNvPr id="4" name="Text 1"/>
+          <p:cNvSpPr/>
+          <p:nvPr/>
+        </p:nvSpPr>
+        <p:spPr>
+          <a:xfrm>
+            <a:off x="1143000" y="329184"/>
+            <a:ext cx="7498080" cy="603504"/>
+          </a:xfrm>
+          <a:prstGeom prst="rect">
+            <a:avLst/>
+          </a:prstGeom>
+          <a:noFill/>
+          <a:ln/>
+        </p:spPr>
+        <p:txBody>
+          <a:bodyPr wrap="square" lIns="0" tIns="0" rIns="0" bIns="0" rtlCol="0" anchor="ctr"/>
+          <a:lstStyle/>
+          <a:p>
+            <a:pPr indent="0" marL="0">
+              <a:buNone/>
+            </a:pPr>
+            <a:r>
+              <a:rPr lang="en-US" sz="2600" b="1" dirty="0">
+                <a:solidFill>
+                  <a:srgbClr val="1F2937"/>
+                </a:solidFill>
+                <a:latin typeface="Arial" pitchFamily="34" charset="0"/>
+                <a:ea typeface="Arial" pitchFamily="34" charset="-122"/>
+                <a:cs typeface="Arial" pitchFamily="34" charset="-120"/>
+              </a:rPr>
+              <a:t>Deliverable</a:t>
+            </a:r>
+            <a:endParaRPr lang="en-US" sz="2600" dirty="0"/>
+          </a:p>
+        </p:txBody>
+      </p:sp>
+      <p:sp>
+        <p:nvSpPr>
+          <p:cNvPr id="5" name="Shape 2"/>
+          <p:cNvSpPr/>
+          <p:nvPr/>
+        </p:nvSpPr>
+        <p:spPr>
+          <a:xfrm>
+            <a:off x="457200" y="1325880"/>
+            <a:ext cx="8229600" cy="1517904"/>
+          </a:xfrm>
+          <a:prstGeom prst="roundRect">
+            <a:avLst>
+              <a:gd name="adj" fmla="val 4819"/>
+            </a:avLst>
+          </a:prstGeom>
+          <a:solidFill>
+            <a:srgbClr val="F1F5F9"/>
+          </a:solidFill>
+          <a:ln/>
+          <a:effectLst>
+            <a:outerShdw sx="100000" sy="100000" kx="0" ky="0" algn="bl" rotWithShape="0" blurRad="76200" dist="25400" dir="5400000">
+              <a:srgbClr val="000000">
+                <a:alpha val="12000"/>
+              </a:srgbClr>
+            </a:outerShdw>
+          </a:effectLst>
+        </p:spPr>
+      </p:sp>
+      <p:sp>
+        <p:nvSpPr>
+          <p:cNvPr id="6" name="Text 3"/>
+          <p:cNvSpPr/>
+          <p:nvPr/>
+        </p:nvSpPr>
+        <p:spPr>
+          <a:xfrm>
+            <a:off x="731520" y="1435608"/>
+            <a:ext cx="7680960" cy="1298448"/>
+          </a:xfrm>
+          <a:prstGeom prst="rect">
+            <a:avLst/>
+          </a:prstGeom>
+          <a:noFill/>
+          <a:ln/>
+        </p:spPr>
+        <p:txBody>
+          <a:bodyPr wrap="square" lIns="0" tIns="0" rIns="0" bIns="0" rtlCol="0" anchor="t">
+            <a:normAutofit/>
+          </a:bodyPr>
+          <a:lstStyle/>
+          <a:p>
+            <a:pPr marL="342900" indent="-342900">
+              <a:spcAft>
+                <a:spcPts val="600"/>
+              </a:spcAft>
+              <a:buSzPct val="100000"/>
+              <a:buChar char="•"/>
+            </a:pPr>
+            <a:r>
+              <a:rPr lang="en-US" sz="1400" dirty="0">
+                <a:solidFill>
+                  <a:srgbClr val="1F2937"/>
+                </a:solidFill>
+                <a:latin typeface="Calibri" pitchFamily="34" charset="0"/>
+                <a:ea typeface="Calibri" pitchFamily="34" charset="-122"/>
+                <a:cs typeface="Calibri" pitchFamily="34" charset="-120"/>
+              </a:rPr>
+              <a:t>IDOR + JWT findings with impact</a:t>
+            </a:r>
+            <a:endParaRPr lang="en-US" sz="1400" dirty="0"/>
+          </a:p>
+          <a:p>
+            <a:pPr marL="342900" indent="-342900">
+              <a:spcAft>
+                <a:spcPts val="600"/>
+              </a:spcAft>
+              <a:buSzPct val="100000"/>
+              <a:buChar char="•"/>
+            </a:pPr>
+            <a:r>
+              <a:rPr lang="en-US" sz="1400" dirty="0">
+                <a:solidFill>
+                  <a:srgbClr val="1F2937"/>
+                </a:solidFill>
+                <a:latin typeface="Calibri" pitchFamily="34" charset="0"/>
+                <a:ea typeface="Calibri" pitchFamily="34" charset="-122"/>
+                <a:cs typeface="Calibri" pitchFamily="34" charset="-120"/>
+              </a:rPr>
+              <a:t>Citation of the fix lines in solution_app.py for all three attacks</a:t>
+            </a:r>
+            <a:endParaRPr lang="en-US" sz="1400" dirty="0"/>
+          </a:p>
+          <a:p>
+            <a:pPr marL="342900" indent="-342900">
+              <a:spcAft>
+                <a:spcPts val="600"/>
+              </a:spcAft>
+              <a:buSzPct val="100000"/>
+              <a:buChar char="•"/>
+            </a:pPr>
+            <a:r>
+              <a:rPr lang="en-US" sz="1400" dirty="0">
+                <a:solidFill>
+                  <a:srgbClr val="1F2937"/>
+                </a:solidFill>
+                <a:latin typeface="Calibri" pitchFamily="34" charset="0"/>
+                <a:ea typeface="Calibri" pitchFamily="34" charset="-122"/>
+                <a:cs typeface="Calibri" pitchFamily="34" charset="-120"/>
+              </a:rPr>
+              <a:t>Proof the forged token / cross-user access now fails</a:t>
+            </a:r>
+            <a:endParaRPr lang="en-US" sz="1400" dirty="0"/>
+          </a:p>
+          <a:p>
+            <a:pPr marL="342900" indent="-342900">
+              <a:spcAft>
+                <a:spcPts val="600"/>
+              </a:spcAft>
+              <a:buSzPct val="100000"/>
+              <a:buChar char="•"/>
+            </a:pPr>
+            <a:r>
+              <a:rPr lang="en-US" sz="1400" dirty="0">
+                <a:solidFill>
+                  <a:srgbClr val="1F2937"/>
+                </a:solidFill>
+                <a:latin typeface="Calibri" pitchFamily="34" charset="0"/>
+                <a:ea typeface="Calibri" pitchFamily="34" charset="-122"/>
+                <a:cs typeface="Calibri" pitchFamily="34" charset="-120"/>
+              </a:rPr>
+              <a:t>+ Audit the AI / EiPE / Prompt Problem (see worksheet)</a:t>
+            </a:r>
+            <a:endParaRPr lang="en-US" sz="1400" dirty="0"/>
+          </a:p>
+        </p:txBody>
+      </p:sp>
+      <p:sp>
+        <p:nvSpPr>
+          <p:cNvPr id="7" name="Text 4"/>
+          <p:cNvSpPr/>
+          <p:nvPr/>
+        </p:nvSpPr>
+        <p:spPr>
+          <a:xfrm>
+            <a:off x="457200" y="4800600"/>
+            <a:ext cx="6949440" cy="274320"/>
+          </a:xfrm>
+          <a:prstGeom prst="rect">
+            <a:avLst/>
+          </a:prstGeom>
+          <a:noFill/>
+          <a:ln/>
+        </p:spPr>
+        <p:txBody>
+          <a:bodyPr wrap="square" lIns="0" tIns="0" rIns="0" bIns="0" rtlCol="0" anchor="ctr"/>
+          <a:lstStyle/>
+          <a:p>
+            <a:pPr indent="0" marL="0">
+              <a:buNone/>
+            </a:pPr>
+            <a:r>
+              <a:rPr lang="en-US" sz="900" dirty="0">
+                <a:solidFill>
+                  <a:srgbClr val="64748B"/>
+                </a:solidFill>
+                <a:latin typeface="Calibri" pitchFamily="34" charset="0"/>
+                <a:ea typeface="Calibri" pitchFamily="34" charset="-122"/>
+                <a:cs typeface="Calibri" pitchFamily="34" charset="-120"/>
+              </a:rPr>
+              <a:t>Software Security · Week 6</a:t>
+            </a:r>
+            <a:endParaRPr lang="en-US" sz="900" dirty="0"/>
+          </a:p>
+        </p:txBody>
+      </p:sp>
+      <p:pic>
+        <p:nvPicPr>
+          <p:cNvPr id="8" name="Image 1" descr="/Users/pop7/Library/CloudStorage/OneDrive-MonsterConnectCo.,Ltd/Lecture/KOSEN69 - software-security/slides/pptx/assets/logo-small.png">    </p:cNvPr>
+          <p:cNvPicPr>
+            <a:picLocks noChangeAspect="1"/>
+          </p:cNvPicPr>
+          <p:nvPr/>
+        </p:nvPicPr>
+        <p:blipFill>
+          <a:blip r:embed="rId2"/>
+          <a:stretch>
+            <a:fillRect/>
+          </a:stretch>
+        </p:blipFill>
+        <p:spPr>
+          <a:xfrm>
+            <a:off x="7882128" y="4700016"/>
+            <a:ext cx="768096" cy="356616"/>
+          </a:xfrm>
+          <a:prstGeom prst="rect">
+            <a:avLst/>
+          </a:prstGeom>
+        </p:spPr>
+      </p:pic>
+    </p:spTree>
+  </p:cSld>
+  <p:clrMapOvr>
+    <a:masterClrMapping/>
+  </p:clrMapOvr>
+</p:sld>
+</file>
+
+<file path=ppt/slides/slide23.xml><?xml version="1.0" encoding="utf-8"?>
+<p:sld xmlns:a="http://schemas.openxmlformats.org/drawingml/2006/main" xmlns:r="http://schemas.openxmlformats.org/officeDocument/2006/relationships" xmlns:p="http://schemas.openxmlformats.org/presentationml/2006/main">
+  <p:cSld name="Slide 23">
+    <p:bg>
+      <p:bgPr>
+        <a:solidFill>
+          <a:srgbClr val="FFFFFF"/>
+        </a:solidFill>
+      </p:bgPr>
+    </p:bg>
+    <p:spTree>
+      <p:nvGrpSpPr>
+        <p:cNvPr id="1" name=""/>
+        <p:cNvGrpSpPr/>
+        <p:nvPr/>
+      </p:nvGrpSpPr>
+      <p:grpSpPr>
+        <a:xfrm>
+          <a:off x="0" y="0"/>
+          <a:ext cx="0" cy="0"/>
+          <a:chOff x="0" y="0"/>
+          <a:chExt cx="0" cy="0"/>
+        </a:xfrm>
+      </p:grpSpPr>
+      <p:sp>
+        <p:nvSpPr>
+          <p:cNvPr id="2" name="Shape 0"/>
+          <p:cNvSpPr/>
+          <p:nvPr/>
+        </p:nvSpPr>
+        <p:spPr>
+          <a:xfrm>
+            <a:off x="457200" y="384048"/>
+            <a:ext cx="530352" cy="530352"/>
+          </a:xfrm>
+          <a:prstGeom prst="ellipse">
+            <a:avLst/>
+          </a:prstGeom>
+          <a:solidFill>
+            <a:srgbClr val="E35205"/>
+          </a:solidFill>
+          <a:ln/>
+          <a:effectLst>
+            <a:outerShdw sx="100000" sy="100000" kx="0" ky="0" algn="bl" rotWithShape="0" blurRad="76200" dist="25400" dir="5400000">
+              <a:srgbClr val="000000">
+                <a:alpha val="12000"/>
+              </a:srgbClr>
+            </a:outerShdw>
+          </a:effectLst>
+        </p:spPr>
+      </p:sp>
+      <p:pic>
+        <p:nvPicPr>
+          <p:cNvPr id="3" name="Image 0" descr="preencoded.png">    </p:cNvPr>
+          <p:cNvPicPr>
+            <a:picLocks noChangeAspect="1"/>
+          </p:cNvPicPr>
+          <p:nvPr/>
+        </p:nvPicPr>
+        <p:blipFill>
+          <a:blip r:embed="rId1"/>
+          <a:stretch>
+            <a:fillRect/>
+          </a:stretch>
+        </p:blipFill>
+        <p:spPr>
+          <a:xfrm>
+            <a:off x="594360" y="521208"/>
+            <a:ext cx="256032" cy="256032"/>
+          </a:xfrm>
+          <a:prstGeom prst="rect">
+            <a:avLst/>
+          </a:prstGeom>
+        </p:spPr>
+      </p:pic>
+      <p:sp>
+        <p:nvSpPr>
+          <p:cNvPr id="4" name="Text 1"/>
+          <p:cNvSpPr/>
+          <p:nvPr/>
+        </p:nvSpPr>
+        <p:spPr>
+          <a:xfrm>
+            <a:off x="1143000" y="329184"/>
+            <a:ext cx="7498080" cy="603504"/>
+          </a:xfrm>
+          <a:prstGeom prst="rect">
+            <a:avLst/>
+          </a:prstGeom>
+          <a:noFill/>
+          <a:ln/>
+        </p:spPr>
+        <p:txBody>
+          <a:bodyPr wrap="square" lIns="0" tIns="0" rIns="0" bIns="0" rtlCol="0" anchor="ctr"/>
+          <a:lstStyle/>
+          <a:p>
+            <a:pPr indent="0" marL="0">
+              <a:buNone/>
+            </a:pPr>
+            <a:r>
+              <a:rPr lang="en-US" sz="2600" b="1" dirty="0">
+                <a:solidFill>
+                  <a:srgbClr val="1F2937"/>
+                </a:solidFill>
+                <a:latin typeface="Arial" pitchFamily="34" charset="0"/>
+                <a:ea typeface="Arial" pitchFamily="34" charset="-122"/>
+                <a:cs typeface="Arial" pitchFamily="34" charset="-120"/>
+              </a:rPr>
+              <a:t>Key takeaways</a:t>
+            </a:r>
+            <a:endParaRPr lang="en-US" sz="2600" dirty="0"/>
+          </a:p>
+        </p:txBody>
+      </p:sp>
+      <p:sp>
+        <p:nvSpPr>
+          <p:cNvPr id="5" name="Shape 2"/>
+          <p:cNvSpPr/>
+          <p:nvPr/>
+        </p:nvSpPr>
+        <p:spPr>
+          <a:xfrm>
+            <a:off x="457200" y="1325880"/>
+            <a:ext cx="8229600" cy="1207008"/>
+          </a:xfrm>
+          <a:prstGeom prst="roundRect">
+            <a:avLst>
+              <a:gd name="adj" fmla="val 6061"/>
+            </a:avLst>
+          </a:prstGeom>
+          <a:solidFill>
+            <a:srgbClr val="F1F5F9"/>
+          </a:solidFill>
+          <a:ln/>
+          <a:effectLst>
+            <a:outerShdw sx="100000" sy="100000" kx="0" ky="0" algn="bl" rotWithShape="0" blurRad="76200" dist="25400" dir="5400000">
+              <a:srgbClr val="000000">
+                <a:alpha val="12000"/>
+              </a:srgbClr>
+            </a:outerShdw>
+          </a:effectLst>
+        </p:spPr>
+      </p:sp>
+      <p:sp>
+        <p:nvSpPr>
+          <p:cNvPr id="6" name="Text 3"/>
+          <p:cNvSpPr/>
+          <p:nvPr/>
+        </p:nvSpPr>
+        <p:spPr>
+          <a:xfrm>
+            <a:off x="731520" y="1435608"/>
+            <a:ext cx="7680960" cy="987552"/>
+          </a:xfrm>
+          <a:prstGeom prst="rect">
+            <a:avLst/>
+          </a:prstGeom>
+          <a:noFill/>
+          <a:ln/>
+        </p:spPr>
+        <p:txBody>
+          <a:bodyPr wrap="square" lIns="0" tIns="0" rIns="0" bIns="0" rtlCol="0" anchor="t">
+            <a:normAutofit/>
+          </a:bodyPr>
+          <a:lstStyle/>
+          <a:p>
+            <a:pPr marL="342900" indent="-342900">
+              <a:spcAft>
+                <a:spcPts val="600"/>
+              </a:spcAft>
+              <a:buSzPct val="100000"/>
+              <a:buChar char="•"/>
+            </a:pPr>
+            <a:r>
+              <a:rPr lang="en-US" sz="1400" dirty="0">
+                <a:solidFill>
+                  <a:srgbClr val="1F2937"/>
+                </a:solidFill>
+                <a:latin typeface="Calibri" pitchFamily="34" charset="0"/>
+                <a:ea typeface="Calibri" pitchFamily="34" charset="-122"/>
+                <a:cs typeface="Calibri" pitchFamily="34" charset="-120"/>
+              </a:rPr>
+              <a:t>Authenticate once, authorize every request</a:t>
+            </a:r>
+            <a:endParaRPr lang="en-US" sz="1400" dirty="0"/>
+          </a:p>
+          <a:p>
+            <a:pPr marL="342900" indent="-342900">
+              <a:spcAft>
+                <a:spcPts val="600"/>
+              </a:spcAft>
+              <a:buSzPct val="100000"/>
+              <a:buChar char="•"/>
+            </a:pPr>
+            <a:r>
+              <a:rPr lang="en-US" sz="1400" dirty="0">
+                <a:solidFill>
+                  <a:srgbClr val="1F2937"/>
+                </a:solidFill>
+                <a:latin typeface="Calibri" pitchFamily="34" charset="0"/>
+                <a:ea typeface="Calibri" pitchFamily="34" charset="-122"/>
+                <a:cs typeface="Calibri" pitchFamily="34" charset="-120"/>
+              </a:rPr>
+              <a:t>Never trust client-supplied IDs or tokens blindly</a:t>
+            </a:r>
+            <a:endParaRPr lang="en-US" sz="1400" dirty="0"/>
+          </a:p>
+          <a:p>
+            <a:pPr marL="342900" indent="-342900">
+              <a:spcAft>
+                <a:spcPts val="600"/>
+              </a:spcAft>
+              <a:buSzPct val="100000"/>
+              <a:buChar char="•"/>
+            </a:pPr>
+            <a:r>
+              <a:rPr lang="en-US" sz="1400" dirty="0">
+                <a:solidFill>
+                  <a:srgbClr val="1F2937"/>
+                </a:solidFill>
+                <a:latin typeface="Calibri" pitchFamily="34" charset="0"/>
+                <a:ea typeface="Calibri" pitchFamily="34" charset="-122"/>
+                <a:cs typeface="Calibri" pitchFamily="34" charset="-120"/>
+              </a:rPr>
+              <a:t>Deny by default</a:t>
+            </a:r>
+            <a:endParaRPr lang="en-US" sz="1400" dirty="0"/>
+          </a:p>
+        </p:txBody>
+      </p:sp>
+      <p:sp>
+        <p:nvSpPr>
+          <p:cNvPr id="7" name="Text 4"/>
+          <p:cNvSpPr/>
+          <p:nvPr/>
+        </p:nvSpPr>
+        <p:spPr>
+          <a:xfrm>
+            <a:off x="457200" y="4800600"/>
+            <a:ext cx="6949440" cy="274320"/>
+          </a:xfrm>
+          <a:prstGeom prst="rect">
+            <a:avLst/>
+          </a:prstGeom>
+          <a:noFill/>
+          <a:ln/>
+        </p:spPr>
+        <p:txBody>
+          <a:bodyPr wrap="square" lIns="0" tIns="0" rIns="0" bIns="0" rtlCol="0" anchor="ctr"/>
+          <a:lstStyle/>
+          <a:p>
+            <a:pPr indent="0" marL="0">
+              <a:buNone/>
+            </a:pPr>
+            <a:r>
+              <a:rPr lang="en-US" sz="900" dirty="0">
+                <a:solidFill>
+                  <a:srgbClr val="64748B"/>
+                </a:solidFill>
+                <a:latin typeface="Calibri" pitchFamily="34" charset="0"/>
+                <a:ea typeface="Calibri" pitchFamily="34" charset="-122"/>
+                <a:cs typeface="Calibri" pitchFamily="34" charset="-120"/>
+              </a:rPr>
+              <a:t>Software Security · Week 6</a:t>
+            </a:r>
+            <a:endParaRPr lang="en-US" sz="900" dirty="0"/>
+          </a:p>
+        </p:txBody>
+      </p:sp>
+      <p:pic>
+        <p:nvPicPr>
+          <p:cNvPr id="8" name="Image 1" descr="/Users/pop7/Library/CloudStorage/OneDrive-MonsterConnectCo.,Ltd/Lecture/KOSEN69 - software-security/slides/pptx/assets/logo-small.png">    </p:cNvPr>
+          <p:cNvPicPr>
+            <a:picLocks noChangeAspect="1"/>
+          </p:cNvPicPr>
+          <p:nvPr/>
+        </p:nvPicPr>
+        <p:blipFill>
+          <a:blip r:embed="rId2"/>
+          <a:stretch>
+            <a:fillRect/>
+          </a:stretch>
+        </p:blipFill>
+        <p:spPr>
+          <a:xfrm>
+            <a:off x="7882128" y="4700016"/>
+            <a:ext cx="768096" cy="356616"/>
+          </a:xfrm>
+          <a:prstGeom prst="rect">
+            <a:avLst/>
+          </a:prstGeom>
+        </p:spPr>
+      </p:pic>
+    </p:spTree>
+  </p:cSld>
+  <p:clrMapOvr>
+    <a:masterClrMapping/>
+  </p:clrMapOvr>
+</p:sld>
+</file>
+
+<file path=ppt/slides/slide24.xml><?xml version="1.0" encoding="utf-8"?>
+<p:sld xmlns:a="http://schemas.openxmlformats.org/drawingml/2006/main" xmlns:r="http://schemas.openxmlformats.org/officeDocument/2006/relationships" xmlns:p="http://schemas.openxmlformats.org/presentationml/2006/main">
+  <p:cSld name="Slide 24">
+    <p:bg>
+      <p:bgPr>
+        <a:solidFill>
+          <a:srgbClr val="FFFFFF"/>
+        </a:solidFill>
+      </p:bgPr>
+    </p:bg>
+    <p:spTree>
+      <p:nvGrpSpPr>
+        <p:cNvPr id="1" name=""/>
+        <p:cNvGrpSpPr/>
+        <p:nvPr/>
+      </p:nvGrpSpPr>
+      <p:grpSpPr>
+        <a:xfrm>
+          <a:off x="0" y="0"/>
+          <a:ext cx="0" cy="0"/>
+          <a:chOff x="0" y="0"/>
+          <a:chExt cx="0" cy="0"/>
+        </a:xfrm>
+      </p:grpSpPr>
+      <p:sp>
+        <p:nvSpPr>
           <p:cNvPr id="2" name="Text 0"/>
           <p:cNvSpPr/>
           <p:nvPr/>
@@ -10137,7 +11455,7 @@
                 <a:ea typeface="Arial" pitchFamily="34" charset="-122"/>
                 <a:cs typeface="Arial" pitchFamily="34" charset="-120"/>
               </a:rPr>
-              <a:t>OAuth2 / OIDC (high level)</a:t>
+              <a:t>The fix: verify the signature — one check, every endpoint</a:t>
             </a:r>
             <a:endParaRPr lang="en-US" sz="2600" dirty="0"/>
           </a:p>
@@ -10152,6 +11470,165 @@
         <p:spPr>
           <a:xfrm>
             <a:off x="457200" y="1325880"/>
+            <a:ext cx="8229600" cy="1810512"/>
+          </a:xfrm>
+          <a:prstGeom prst="roundRect">
+            <a:avLst>
+              <a:gd name="adj" fmla="val 3030"/>
+            </a:avLst>
+          </a:prstGeom>
+          <a:solidFill>
+            <a:srgbClr val="0A1020"/>
+          </a:solidFill>
+          <a:ln w="12700">
+            <a:solidFill>
+              <a:srgbClr val="E8EDF3"/>
+            </a:solidFill>
+            <a:prstDash val="solid"/>
+          </a:ln>
+        </p:spPr>
+      </p:sp>
+      <p:sp>
+        <p:nvSpPr>
+          <p:cNvPr id="6" name="Text 3"/>
+          <p:cNvSpPr/>
+          <p:nvPr/>
+        </p:nvSpPr>
+        <p:spPr>
+          <a:xfrm>
+            <a:off x="640080" y="1399032"/>
+            <a:ext cx="7863840" cy="1664208"/>
+          </a:xfrm>
+          <a:prstGeom prst="rect">
+            <a:avLst/>
+          </a:prstGeom>
+          <a:noFill/>
+          <a:ln/>
+        </p:spPr>
+        <p:txBody>
+          <a:bodyPr wrap="square" lIns="0" tIns="0" rIns="0" bIns="0" rtlCol="0" anchor="t">
+            <a:normAutofit/>
+          </a:bodyPr>
+          <a:lstStyle/>
+          <a:p>
+            <a:pPr indent="0" marL="0">
+              <a:buNone/>
+            </a:pPr>
+            <a:r>
+              <a:rPr lang="en-US" sz="1150" dirty="0">
+                <a:solidFill>
+                  <a:srgbClr val="9FE7D6"/>
+                </a:solidFill>
+                <a:latin typeface="Courier New" pitchFamily="34" charset="0"/>
+                <a:ea typeface="Courier New" pitchFamily="34" charset="-122"/>
+                <a:cs typeface="Courier New" pitchFamily="34" charset="-120"/>
+              </a:rPr>
+              <a:t># vulnerable: 'none' allowed + weak secret -&gt; any forged token passes</a:t>
+            </a:r>
+            <a:endParaRPr lang="en-US" sz="1150" dirty="0"/>
+          </a:p>
+          <a:p>
+            <a:pPr indent="0" marL="0">
+              <a:buNone/>
+            </a:pPr>
+            <a:r>
+              <a:rPr lang="en-US" sz="1150" dirty="0">
+                <a:solidFill>
+                  <a:srgbClr val="9FE7D6"/>
+                </a:solidFill>
+                <a:latin typeface="Courier New" pitchFamily="34" charset="0"/>
+                <a:ea typeface="Courier New" pitchFamily="34" charset="-122"/>
+                <a:cs typeface="Courier New" pitchFamily="34" charset="-120"/>
+              </a:rPr>
+              <a:t>if alg == "none": jwt.decode(token, options={"verify_signature": False})</a:t>
+            </a:r>
+            <a:endParaRPr lang="en-US" sz="1150" dirty="0"/>
+          </a:p>
+          <a:p>
+            <a:pPr indent="0" marL="0">
+              <a:buNone/>
+            </a:pPr>
+            <a:r>
+              <a:rPr lang="en-US" sz="1150" dirty="0">
+                <a:solidFill>
+                  <a:srgbClr val="9FE7D6"/>
+                </a:solidFill>
+                <a:latin typeface="Courier New" pitchFamily="34" charset="0"/>
+                <a:ea typeface="Courier New" pitchFamily="34" charset="-122"/>
+                <a:cs typeface="Courier New" pitchFamily="34" charset="-120"/>
+              </a:rPr>
+              <a:t>SECRET = "secret"</a:t>
+            </a:r>
+            <a:endParaRPr lang="en-US" sz="1150" dirty="0"/>
+          </a:p>
+          <a:p>
+            <a:pPr indent="0" marL="0">
+              <a:buNone/>
+            </a:pPr>
+            <a:endParaRPr lang="en-US" sz="1150" dirty="0"/>
+          </a:p>
+          <a:p>
+            <a:pPr indent="0" marL="0">
+              <a:buNone/>
+            </a:pPr>
+            <a:r>
+              <a:rPr lang="en-US" sz="1150" dirty="0">
+                <a:solidFill>
+                  <a:srgbClr val="9FE7D6"/>
+                </a:solidFill>
+                <a:latin typeface="Courier New" pitchFamily="34" charset="0"/>
+                <a:ea typeface="Courier New" pitchFamily="34" charset="-122"/>
+                <a:cs typeface="Courier New" pitchFamily="34" charset="-120"/>
+              </a:rPr>
+              <a:t># fixed: pin the algorithm, strong secret, require exp + aud</a:t>
+            </a:r>
+            <a:endParaRPr lang="en-US" sz="1150" dirty="0"/>
+          </a:p>
+          <a:p>
+            <a:pPr indent="0" marL="0">
+              <a:buNone/>
+            </a:pPr>
+            <a:r>
+              <a:rPr lang="en-US" sz="1150" dirty="0">
+                <a:solidFill>
+                  <a:srgbClr val="9FE7D6"/>
+                </a:solidFill>
+                <a:latin typeface="Courier New" pitchFamily="34" charset="0"/>
+                <a:ea typeface="Courier New" pitchFamily="34" charset="-122"/>
+                <a:cs typeface="Courier New" pitchFamily="34" charset="-120"/>
+              </a:rPr>
+              <a:t>jwt.decode(token, SECRET, algorithms=["HS256"],</a:t>
+            </a:r>
+            <a:endParaRPr lang="en-US" sz="1150" dirty="0"/>
+          </a:p>
+          <a:p>
+            <a:pPr indent="0" marL="0">
+              <a:buNone/>
+            </a:pPr>
+            <a:r>
+              <a:rPr lang="en-US" sz="1150" dirty="0">
+                <a:solidFill>
+                  <a:srgbClr val="9FE7D6"/>
+                </a:solidFill>
+                <a:latin typeface="Courier New" pitchFamily="34" charset="0"/>
+                <a:ea typeface="Courier New" pitchFamily="34" charset="-122"/>
+                <a:cs typeface="Courier New" pitchFamily="34" charset="-120"/>
+              </a:rPr>
+              <a:t>           audience=AUD, options={"require": ["exp", "aud"]})</a:t>
+            </a:r>
+            <a:endParaRPr lang="en-US" sz="1150" dirty="0"/>
+          </a:p>
+        </p:txBody>
+      </p:sp>
+      <p:sp>
+        <p:nvSpPr>
+          <p:cNvPr id="7" name="Shape 4"/>
+          <p:cNvSpPr/>
+          <p:nvPr/>
+        </p:nvSpPr>
+        <p:spPr>
+          <a:xfrm>
+            <a:off x="457200" y="3300984"/>
             <a:ext cx="8229600" cy="1207008"/>
           </a:xfrm>
           <a:prstGeom prst="roundRect">
@@ -10174,13 +11651,13 @@
       </p:sp>
       <p:sp>
         <p:nvSpPr>
-          <p:cNvPr id="6" name="Text 3"/>
-          <p:cNvSpPr/>
-          <p:nvPr/>
-        </p:nvSpPr>
-        <p:spPr>
-          <a:xfrm>
-            <a:off x="731520" y="1435608"/>
+          <p:cNvPr id="8" name="Text 5"/>
+          <p:cNvSpPr/>
+          <p:nvPr/>
+        </p:nvSpPr>
+        <p:spPr>
+          <a:xfrm>
+            <a:off x="731520" y="3410712"/>
             <a:ext cx="7680960" cy="987552"/>
           </a:xfrm>
           <a:prstGeom prst="rect">
@@ -10211,7 +11688,7 @@
                 <a:ea typeface="Calibri" pitchFamily="34" charset="-122"/>
                 <a:cs typeface="Calibri" pitchFamily="34" charset="-120"/>
               </a:rPr>
-              <a:t>Delegated access via tokens — don't share passwords</a:t>
+              <a:t>base64url is encoding, not a seal — only the signature check stops forgery</a:t>
             </a:r>
             <a:endParaRPr lang="en-US" sz="1400" dirty="0"/>
           </a:p>
@@ -10232,7 +11709,7 @@
                 <a:ea typeface="Calibri" pitchFamily="34" charset="-122"/>
                 <a:cs typeface="Calibri" pitchFamily="34" charset="-120"/>
               </a:rPr>
-              <a:t>OIDC adds identity (ID token) on top of OAuth2</a:t>
+              <a:t>Pin algorithms=["HS256"] (never "none") + a strong random secret from env</a:t>
             </a:r>
             <a:endParaRPr lang="en-US" sz="1400" dirty="0"/>
           </a:p>
@@ -10253,7 +11730,7 @@
                 <a:ea typeface="Calibri" pitchFamily="34" charset="-122"/>
                 <a:cs typeface="Calibri" pitchFamily="34" charset="-120"/>
               </a:rPr>
-              <a:t>Common bugs: open redirect, missing state, token leakage</a:t>
+              <a:t>Fix it in one place (current_user) → every endpoint is covered at once</a:t>
             </a:r>
             <a:endParaRPr lang="en-US" sz="1400" dirty="0"/>
           </a:p>
@@ -10261,7 +11738,7 @@
       </p:sp>
       <p:sp>
         <p:nvSpPr>
-          <p:cNvPr id="7" name="Text 4"/>
+          <p:cNvPr id="9" name="Text 6"/>
           <p:cNvSpPr/>
           <p:nvPr/>
         </p:nvSpPr>
@@ -10300,7 +11777,7 @@
       </p:sp>
       <p:pic>
         <p:nvPicPr>
-          <p:cNvPr id="8" name="Image 1" descr="/Users/pop7/Library/CloudStorage/OneDrive-MonsterConnectCo.,Ltd/Lecture/KOSEN69 - software-security/slides/pptx/assets/logo-small.png">    </p:cNvPr>
+          <p:cNvPr id="10" name="Image 1" descr="/Users/pop7/Library/CloudStorage/OneDrive-MonsterConnectCo.,Ltd/Lecture/KOSEN69 - software-security/slides/pptx/assets/logo-small.png">    </p:cNvPr>
           <p:cNvPicPr>
             <a:picLocks noChangeAspect="1"/>
           </p:cNvPicPr>
@@ -10438,7 +11915,7 @@
                 <a:ea typeface="Arial" pitchFamily="34" charset="-122"/>
                 <a:cs typeface="Arial" pitchFamily="34" charset="-120"/>
               </a:rPr>
-              <a:t>IDOR &amp; broken access control</a:t>
+              <a:t>JWT forgery in one picture</a:t>
             </a:r>
             <a:endParaRPr lang="en-US" sz="2600" dirty="0"/>
           </a:p>
@@ -10446,41 +11923,14 @@
       </p:sp>
       <p:sp>
         <p:nvSpPr>
-          <p:cNvPr id="5" name="Shape 2"/>
-          <p:cNvSpPr/>
-          <p:nvPr/>
-        </p:nvSpPr>
-        <p:spPr>
-          <a:xfrm>
-            <a:off x="457200" y="1325880"/>
-            <a:ext cx="8229600" cy="713232"/>
-          </a:xfrm>
-          <a:prstGeom prst="roundRect">
-            <a:avLst>
-              <a:gd name="adj" fmla="val 7692"/>
-            </a:avLst>
-          </a:prstGeom>
-          <a:solidFill>
-            <a:srgbClr val="0A1020"/>
-          </a:solidFill>
-          <a:ln w="12700">
-            <a:solidFill>
-              <a:srgbClr val="E8EDF3"/>
-            </a:solidFill>
-            <a:prstDash val="solid"/>
-          </a:ln>
-        </p:spPr>
-      </p:sp>
-      <p:sp>
-        <p:nvSpPr>
-          <p:cNvPr id="6" name="Text 3"/>
-          <p:cNvSpPr/>
-          <p:nvPr/>
-        </p:nvSpPr>
-        <p:spPr>
-          <a:xfrm>
-            <a:off x="640080" y="1399032"/>
-            <a:ext cx="7863840" cy="566928"/>
+          <p:cNvPr id="5" name="Text 2"/>
+          <p:cNvSpPr/>
+          <p:nvPr/>
+        </p:nvSpPr>
+        <p:spPr>
+          <a:xfrm>
+            <a:off x="548640" y="1325880"/>
+            <a:ext cx="8046720" cy="2194560"/>
           </a:xfrm>
           <a:prstGeom prst="rect">
             <a:avLst/>
@@ -10498,97 +11948,6 @@
               <a:buNone/>
             </a:pPr>
             <a:r>
-              <a:rPr lang="en-US" sz="1150" dirty="0">
-                <a:solidFill>
-                  <a:srgbClr val="9FE7D6"/>
-                </a:solidFill>
-                <a:latin typeface="Courier New" pitchFamily="34" charset="0"/>
-                <a:ea typeface="Courier New" pitchFamily="34" charset="-122"/>
-                <a:cs typeface="Courier New" pitchFamily="34" charset="-120"/>
-              </a:rPr>
-              <a:t>GET /api/orders/1   → your order</a:t>
-            </a:r>
-            <a:endParaRPr lang="en-US" sz="1150" dirty="0"/>
-          </a:p>
-          <a:p>
-            <a:pPr indent="0" marL="0">
-              <a:buNone/>
-            </a:pPr>
-            <a:r>
-              <a:rPr lang="en-US" sz="1150" dirty="0">
-                <a:solidFill>
-                  <a:srgbClr val="9FE7D6"/>
-                </a:solidFill>
-                <a:latin typeface="Courier New" pitchFamily="34" charset="0"/>
-                <a:ea typeface="Courier New" pitchFamily="34" charset="-122"/>
-                <a:cs typeface="Courier New" pitchFamily="34" charset="-120"/>
-              </a:rPr>
-              <a:t>GET /api/orders/2   → someone else's  😱</a:t>
-            </a:r>
-            <a:endParaRPr lang="en-US" sz="1150" dirty="0"/>
-          </a:p>
-        </p:txBody>
-      </p:sp>
-      <p:sp>
-        <p:nvSpPr>
-          <p:cNvPr id="7" name="Shape 4"/>
-          <p:cNvSpPr/>
-          <p:nvPr/>
-        </p:nvSpPr>
-        <p:spPr>
-          <a:xfrm>
-            <a:off x="457200" y="2203704"/>
-            <a:ext cx="8229600" cy="896112"/>
-          </a:xfrm>
-          <a:prstGeom prst="roundRect">
-            <a:avLst>
-              <a:gd name="adj" fmla="val 8163"/>
-            </a:avLst>
-          </a:prstGeom>
-          <a:solidFill>
-            <a:srgbClr val="F1F5F9"/>
-          </a:solidFill>
-          <a:ln/>
-          <a:effectLst>
-            <a:outerShdw sx="100000" sy="100000" kx="0" ky="0" algn="bl" rotWithShape="0" blurRad="76200" dist="25400" dir="5400000">
-              <a:srgbClr val="000000">
-                <a:alpha val="12000"/>
-              </a:srgbClr>
-            </a:outerShdw>
-          </a:effectLst>
-        </p:spPr>
-      </p:sp>
-      <p:sp>
-        <p:nvSpPr>
-          <p:cNvPr id="8" name="Text 5"/>
-          <p:cNvSpPr/>
-          <p:nvPr/>
-        </p:nvSpPr>
-        <p:spPr>
-          <a:xfrm>
-            <a:off x="731520" y="2313432"/>
-            <a:ext cx="7680960" cy="676656"/>
-          </a:xfrm>
-          <a:prstGeom prst="rect">
-            <a:avLst/>
-          </a:prstGeom>
-          <a:noFill/>
-          <a:ln/>
-        </p:spPr>
-        <p:txBody>
-          <a:bodyPr wrap="square" lIns="0" tIns="0" rIns="0" bIns="0" rtlCol="0" anchor="t">
-            <a:normAutofit/>
-          </a:bodyPr>
-          <a:lstStyle/>
-          <a:p>
-            <a:pPr marL="342900" indent="-342900">
-              <a:spcAft>
-                <a:spcPts val="600"/>
-              </a:spcAft>
-              <a:buSzPct val="100000"/>
-              <a:buChar char="•"/>
-            </a:pPr>
-            <a:r>
               <a:rPr lang="en-US" sz="1400" dirty="0">
                 <a:solidFill>
                   <a:srgbClr val="1F2937"/>
@@ -10597,66 +11956,45 @@
                 <a:ea typeface="Calibri" pitchFamily="34" charset="-122"/>
                 <a:cs typeface="Calibri" pitchFamily="34" charset="-120"/>
               </a:rPr>
-              <a:t>Object reference with no ownership check</a:t>
+              <a:t>See diagram: A JWT is header.payload.signature in base64url: the header and payload are readable and editable by anyone, only the signature is a seal. Two forgeries: alg:none sets an empty signature and a vulnerable server skips the check and accepts sub:admin; a weak secret lets the attacker re-sign sub:admin so the signature verifies. The fix pins algorithms to HS256, uses a strong secret, and requires exp and aud, so both forged tokens return 401 — and because the check lives in current_user it covers every endpoint at once. (web only)</a:t>
             </a:r>
             <a:endParaRPr lang="en-US" sz="1400" dirty="0"/>
           </a:p>
-          <a:p>
-            <a:pPr marL="342900" indent="-342900">
-              <a:spcAft>
-                <a:spcPts val="600"/>
-              </a:spcAft>
-              <a:buSzPct val="100000"/>
-              <a:buChar char="•"/>
-            </a:pPr>
-            <a:r>
-              <a:rPr lang="en-US" sz="1400" dirty="0">
-                <a:solidFill>
-                  <a:srgbClr val="1F2937"/>
+        </p:txBody>
+      </p:sp>
+      <p:sp>
+        <p:nvSpPr>
+          <p:cNvPr id="6" name="Text 3"/>
+          <p:cNvSpPr/>
+          <p:nvPr/>
+        </p:nvSpPr>
+        <p:spPr>
+          <a:xfrm>
+            <a:off x="457200" y="4800600"/>
+            <a:ext cx="6949440" cy="274320"/>
+          </a:xfrm>
+          <a:prstGeom prst="rect">
+            <a:avLst/>
+          </a:prstGeom>
+          <a:noFill/>
+          <a:ln/>
+        </p:spPr>
+        <p:txBody>
+          <a:bodyPr wrap="square" lIns="0" tIns="0" rIns="0" bIns="0" rtlCol="0" anchor="ctr"/>
+          <a:lstStyle/>
+          <a:p>
+            <a:pPr indent="0" marL="0">
+              <a:buNone/>
+            </a:pPr>
+            <a:r>
+              <a:rPr lang="en-US" sz="900" dirty="0">
+                <a:solidFill>
+                  <a:srgbClr val="64748B"/>
                 </a:solidFill>
                 <a:latin typeface="Calibri" pitchFamily="34" charset="0"/>
                 <a:ea typeface="Calibri" pitchFamily="34" charset="-122"/>
                 <a:cs typeface="Calibri" pitchFamily="34" charset="-120"/>
               </a:rPr>
-              <a:t>Vertical (become admin) vs horizontal (other users)</a:t>
-            </a:r>
-            <a:endParaRPr lang="en-US" sz="1400" dirty="0"/>
-          </a:p>
-        </p:txBody>
-      </p:sp>
-      <p:sp>
-        <p:nvSpPr>
-          <p:cNvPr id="9" name="Text 6"/>
-          <p:cNvSpPr/>
-          <p:nvPr/>
-        </p:nvSpPr>
-        <p:spPr>
-          <a:xfrm>
-            <a:off x="457200" y="4800600"/>
-            <a:ext cx="6949440" cy="274320"/>
-          </a:xfrm>
-          <a:prstGeom prst="rect">
-            <a:avLst/>
-          </a:prstGeom>
-          <a:noFill/>
-          <a:ln/>
-        </p:spPr>
-        <p:txBody>
-          <a:bodyPr wrap="square" lIns="0" tIns="0" rIns="0" bIns="0" rtlCol="0" anchor="ctr"/>
-          <a:lstStyle/>
-          <a:p>
-            <a:pPr indent="0" marL="0">
-              <a:buNone/>
-            </a:pPr>
-            <a:r>
-              <a:rPr lang="en-US" sz="900" dirty="0">
-                <a:solidFill>
-                  <a:srgbClr val="64748B"/>
-                </a:solidFill>
-                <a:latin typeface="Calibri" pitchFamily="34" charset="0"/>
-                <a:ea typeface="Calibri" pitchFamily="34" charset="-122"/>
-                <a:cs typeface="Calibri" pitchFamily="34" charset="-120"/>
-              </a:rPr>
               <a:t>Software Security · Week 6</a:t>
             </a:r>
             <a:endParaRPr lang="en-US" sz="900" dirty="0"/>
@@ -10665,7 +12003,7 @@
       </p:sp>
       <p:pic>
         <p:nvPicPr>
-          <p:cNvPr id="10" name="Image 1" descr="/Users/pop7/Library/CloudStorage/OneDrive-MonsterConnectCo.,Ltd/Lecture/KOSEN69 - software-security/slides/pptx/assets/logo-small.png">    </p:cNvPr>
+          <p:cNvPr id="7" name="Image 1" descr="/Users/pop7/Library/CloudStorage/OneDrive-MonsterConnectCo.,Ltd/Lecture/KOSEN69 - software-security/slides/pptx/assets/logo-small.png">    </p:cNvPr>
           <p:cNvPicPr>
             <a:picLocks noChangeAspect="1"/>
           </p:cNvPicPr>
@@ -10803,7 +12141,7 @@
                 <a:ea typeface="Arial" pitchFamily="34" charset="-122"/>
                 <a:cs typeface="Arial" pitchFamily="34" charset="-120"/>
               </a:rPr>
-              <a:t>One request, two gates</a:t>
+              <a:t>OAuth2 / OIDC (high level)</a:t>
             </a:r>
             <a:endParaRPr lang="en-US" sz="2600" dirty="0"/>
           </a:p>
@@ -10811,14 +12149,43 @@
       </p:sp>
       <p:sp>
         <p:nvSpPr>
-          <p:cNvPr id="5" name="Text 2"/>
-          <p:cNvSpPr/>
-          <p:nvPr/>
-        </p:nvSpPr>
-        <p:spPr>
-          <a:xfrm>
-            <a:off x="548640" y="1325880"/>
-            <a:ext cx="8046720" cy="1920240"/>
+          <p:cNvPr id="5" name="Shape 2"/>
+          <p:cNvSpPr/>
+          <p:nvPr/>
+        </p:nvSpPr>
+        <p:spPr>
+          <a:xfrm>
+            <a:off x="457200" y="1325880"/>
+            <a:ext cx="8229600" cy="1207008"/>
+          </a:xfrm>
+          <a:prstGeom prst="roundRect">
+            <a:avLst>
+              <a:gd name="adj" fmla="val 6061"/>
+            </a:avLst>
+          </a:prstGeom>
+          <a:solidFill>
+            <a:srgbClr val="F1F5F9"/>
+          </a:solidFill>
+          <a:ln/>
+          <a:effectLst>
+            <a:outerShdw sx="100000" sy="100000" kx="0" ky="0" algn="bl" rotWithShape="0" blurRad="76200" dist="25400" dir="5400000">
+              <a:srgbClr val="000000">
+                <a:alpha val="12000"/>
+              </a:srgbClr>
+            </a:outerShdw>
+          </a:effectLst>
+        </p:spPr>
+      </p:sp>
+      <p:sp>
+        <p:nvSpPr>
+          <p:cNvPr id="6" name="Text 3"/>
+          <p:cNvSpPr/>
+          <p:nvPr/>
+        </p:nvSpPr>
+        <p:spPr>
+          <a:xfrm>
+            <a:off x="731520" y="1435608"/>
+            <a:ext cx="7680960" cy="987552"/>
           </a:xfrm>
           <a:prstGeom prst="rect">
             <a:avLst/>
@@ -10832,8 +12199,12 @@
           </a:bodyPr>
           <a:lstStyle/>
           <a:p>
-            <a:pPr indent="0" marL="0">
-              <a:buNone/>
+            <a:pPr marL="342900" indent="-342900">
+              <a:spcAft>
+                <a:spcPts val="600"/>
+              </a:spcAft>
+              <a:buSzPct val="100000"/>
+              <a:buChar char="•"/>
             </a:pPr>
             <a:r>
               <a:rPr lang="en-US" sz="1400" dirty="0">
@@ -10844,45 +12215,87 @@
                 <a:ea typeface="Calibri" pitchFamily="34" charset="-122"/>
                 <a:cs typeface="Calibri" pitchFamily="34" charset="-120"/>
               </a:rPr>
-              <a:t>See diagram: One HTTP request must pass two gates. Gate 1, authentication: verify the token's signature and algorithm — broken by alg:none and a weak hardcoded secret, so a forged token passes. Gate 2, authorization: does the caller own THIS object — broken because the ownership check never runs. The key point: even a perfectly valid, genuine token clears Gate 1 but must not be enough to clear Gate 2 on its own — alice's own valid login token can still read bob's order if Gate 2 is missing. (web only)</a:t>
+              <a:t>Delegated access via tokens — don't share passwords</a:t>
             </a:r>
             <a:endParaRPr lang="en-US" sz="1400" dirty="0"/>
           </a:p>
-        </p:txBody>
-      </p:sp>
-      <p:sp>
-        <p:nvSpPr>
-          <p:cNvPr id="6" name="Text 3"/>
-          <p:cNvSpPr/>
-          <p:nvPr/>
-        </p:nvSpPr>
-        <p:spPr>
-          <a:xfrm>
-            <a:off x="457200" y="4800600"/>
-            <a:ext cx="6949440" cy="274320"/>
-          </a:xfrm>
-          <a:prstGeom prst="rect">
-            <a:avLst/>
-          </a:prstGeom>
-          <a:noFill/>
-          <a:ln/>
-        </p:spPr>
-        <p:txBody>
-          <a:bodyPr wrap="square" lIns="0" tIns="0" rIns="0" bIns="0" rtlCol="0" anchor="ctr"/>
-          <a:lstStyle/>
-          <a:p>
-            <a:pPr indent="0" marL="0">
-              <a:buNone/>
-            </a:pPr>
-            <a:r>
-              <a:rPr lang="en-US" sz="900" dirty="0">
-                <a:solidFill>
-                  <a:srgbClr val="64748B"/>
+          <a:p>
+            <a:pPr marL="342900" indent="-342900">
+              <a:spcAft>
+                <a:spcPts val="600"/>
+              </a:spcAft>
+              <a:buSzPct val="100000"/>
+              <a:buChar char="•"/>
+            </a:pPr>
+            <a:r>
+              <a:rPr lang="en-US" sz="1400" dirty="0">
+                <a:solidFill>
+                  <a:srgbClr val="1F2937"/>
                 </a:solidFill>
                 <a:latin typeface="Calibri" pitchFamily="34" charset="0"/>
                 <a:ea typeface="Calibri" pitchFamily="34" charset="-122"/>
                 <a:cs typeface="Calibri" pitchFamily="34" charset="-120"/>
               </a:rPr>
+              <a:t>OIDC adds identity (ID token) on top of OAuth2</a:t>
+            </a:r>
+            <a:endParaRPr lang="en-US" sz="1400" dirty="0"/>
+          </a:p>
+          <a:p>
+            <a:pPr marL="342900" indent="-342900">
+              <a:spcAft>
+                <a:spcPts val="600"/>
+              </a:spcAft>
+              <a:buSzPct val="100000"/>
+              <a:buChar char="•"/>
+            </a:pPr>
+            <a:r>
+              <a:rPr lang="en-US" sz="1400" dirty="0">
+                <a:solidFill>
+                  <a:srgbClr val="1F2937"/>
+                </a:solidFill>
+                <a:latin typeface="Calibri" pitchFamily="34" charset="0"/>
+                <a:ea typeface="Calibri" pitchFamily="34" charset="-122"/>
+                <a:cs typeface="Calibri" pitchFamily="34" charset="-120"/>
+              </a:rPr>
+              <a:t>Common bugs: open redirect, missing state, token leakage</a:t>
+            </a:r>
+            <a:endParaRPr lang="en-US" sz="1400" dirty="0"/>
+          </a:p>
+        </p:txBody>
+      </p:sp>
+      <p:sp>
+        <p:nvSpPr>
+          <p:cNvPr id="7" name="Text 4"/>
+          <p:cNvSpPr/>
+          <p:nvPr/>
+        </p:nvSpPr>
+        <p:spPr>
+          <a:xfrm>
+            <a:off x="457200" y="4800600"/>
+            <a:ext cx="6949440" cy="274320"/>
+          </a:xfrm>
+          <a:prstGeom prst="rect">
+            <a:avLst/>
+          </a:prstGeom>
+          <a:noFill/>
+          <a:ln/>
+        </p:spPr>
+        <p:txBody>
+          <a:bodyPr wrap="square" lIns="0" tIns="0" rIns="0" bIns="0" rtlCol="0" anchor="ctr"/>
+          <a:lstStyle/>
+          <a:p>
+            <a:pPr indent="0" marL="0">
+              <a:buNone/>
+            </a:pPr>
+            <a:r>
+              <a:rPr lang="en-US" sz="900" dirty="0">
+                <a:solidFill>
+                  <a:srgbClr val="64748B"/>
+                </a:solidFill>
+                <a:latin typeface="Calibri" pitchFamily="34" charset="0"/>
+                <a:ea typeface="Calibri" pitchFamily="34" charset="-122"/>
+                <a:cs typeface="Calibri" pitchFamily="34" charset="-120"/>
+              </a:rPr>
               <a:t>Software Security · Week 6</a:t>
             </a:r>
             <a:endParaRPr lang="en-US" sz="900" dirty="0"/>
@@ -10891,7 +12304,7 @@
       </p:sp>
       <p:pic>
         <p:nvPicPr>
-          <p:cNvPr id="7" name="Image 1" descr="/Users/pop7/Library/CloudStorage/OneDrive-MonsterConnectCo.,Ltd/Lecture/KOSEN69 - software-security/slides/pptx/assets/logo-small.png">    </p:cNvPr>
+          <p:cNvPr id="8" name="Image 1" descr="/Users/pop7/Library/CloudStorage/OneDrive-MonsterConnectCo.,Ltd/Lecture/KOSEN69 - software-security/slides/pptx/assets/logo-small.png">    </p:cNvPr>
           <p:cNvPicPr>
             <a:picLocks noChangeAspect="1"/>
           </p:cNvPicPr>
